--- a/decks/day4/module-7-lab-kickoff.pptx
+++ b/decks/day4/module-7-lab-kickoff.pptx
@@ -7406,7 +7406,7 @@
                 <a:ea typeface="Calibri" pitchFamily="34" charset="-122"/>
                 <a:cs typeface="Calibri" pitchFamily="34" charset="-120"/>
               </a:rPr>
-              <a:t>Foundry IQ knowledge source</a:t>
+              <a:t>Bundled reference docs</a:t>
             </a:r>
             <a:endParaRPr lang="en-US" sz="1500" dirty="0"/>
           </a:p>
@@ -7447,7 +7447,7 @@
                 <a:ea typeface="Calibri" pitchFamily="34" charset="-122"/>
                 <a:cs typeface="Calibri" pitchFamily="34" charset="-120"/>
               </a:rPr>
-              <a:t>the same one your Day 2/3 docs assistant already grounds against</a:t>
+              <a:t>included in the repo (labs/day4/python/data/docs/); nothing to provision, no live knowledge base required</a:t>
             </a:r>
             <a:endParaRPr lang="en-US" sz="1150" dirty="0"/>
           </a:p>

--- a/decks/day4/module-7-lab-kickoff.pptx
+++ b/decks/day4/module-7-lab-kickoff.pptx
@@ -16,9 +16,10 @@
     <p:sldId id="264" r:id="rId10"/>
     <p:sldId id="265" r:id="rId11"/>
     <p:sldId id="266" r:id="rId12"/>
+    <p:sldId id="267" r:id="rId13"/>
   </p:sldIdLst>
   <p:notesMasterIdLst>
-    <p:notesMasterId r:id="rId13"/>
+    <p:notesMasterId r:id="rId14"/>
   </p:notesMasterIdLst>
   <p:sldSz cx="9144000" cy="5143500"/>
   <p:notesSz cx="5143500" cy="9144000"/>
@@ -512,7 +513,7 @@
           <a:p>
             <a:r>
               <a:rPr lang="en-US" dirty="0"/>
-              <a:t>• This lab composes every module from today: orchestration patterns (2), workflow primitives (3), memory contracts (4), and a trajectory evaluation with a cost metric (5), plus the guardrail from Module 6 — now a required deliverable, not a stretch goal.
+              <a:t>• This lab composes every module from today: workflow primitives (3), orchestration patterns (2), memory contracts (4), and a trajectory evaluation with a cost metric (5), plus the guardrail from Module 6 — now a required deliverable, not a stretch goal. Note for presenters: the lab's own part order (basics, then orchestrations, then eval) deliberately runs opposite to today's lecture order (orchestration patterns in Module 2, before workflow fundamentals in Module 3) — build it by hand first, then appreciate the shortcut, is the lab's own teaching sequence.
 • GROUNDING SOURCE: https://learn.microsoft.com/en-us/agent-framework/concepts/workflows/
 • GROUNDING SOURCE: https://learn.microsoft.com/azure/foundry/concepts/evaluation-evaluators/agent-evaluators</a:t>
             </a:r>
@@ -602,9 +603,8 @@
           <a:p>
             <a:r>
               <a:rPr lang="en-US" dirty="0"/>
-              <a:t>• Reworded for the 3-part structure — same substance as the locked spec, but the budget guardrail is now a required Part B deliverable, not a stretch goal, per this session's design decision.
-• GROUNDING SOURCE: https://learn.microsoft.com/en-us/agent-framework/agents/evaluation
-• GROUNDING SOURCE: https://learn.microsoft.com/en-us/agent-framework/agents/looping</a:t>
+              <a:t>• Mirrors Day 3 Module 9's prerequisites-card style. The ADO MCP path is only needed for the optional Ticket agent stretch, not the core lab.
+• GROUNDING SOURCE: https://learn.microsoft.com/en-us/agent-framework/agents/evaluation</a:t>
             </a:r>
             <a:endParaRPr lang="en-US" dirty="0"/>
           </a:p>
@@ -692,9 +692,9 @@
           <a:p>
             <a:r>
               <a:rPr lang="en-US" dirty="0"/>
-              <a:t>• Close the core Day 4 live time here. Learners have every primitive from Modules 1-6 before starting the lab.
-• GROUNDING SOURCE: https://learn.microsoft.com/en-us/agent-framework/concepts/workflows/
-• GROUNDING SOURCE: https://learn.microsoft.com/azure/foundry/concepts/evaluation-evaluators/agent-evaluators</a:t>
+              <a:t>• Reworded for the workflow-basics/orchestrations/evaluate structure — the budget guardrail is a required deliverable for BOTH orchestration constructions in Part B, not a stretch goal.
+• GROUNDING SOURCE: https://learn.microsoft.com/en-us/agent-framework/agents/evaluation
+• GROUNDING SOURCE: https://learn.microsoft.com/en-us/agent-framework/agents/looping</a:t>
             </a:r>
             <a:endParaRPr lang="en-US" dirty="0"/>
           </a:p>
@@ -718,6 +718,96 @@
             <a:fld id="{F7021451-1387-4CA6-816F-3879F97B5CBC}" type="slidenum">
               <a:rPr lang="en-US"/>
               <a:t>11</a:t>
+            </a:fld>
+            <a:endParaRPr lang="en-US"/>
+          </a:p>
+        </p:txBody>
+      </p:sp>
+    </p:spTree>
+    <p:extLst>
+      <p:ext uri="{BB962C8B-B14F-4D97-AF65-F5344CB8AC3E}">
+        <p14:creationId xmlns:p14="http://schemas.microsoft.com/office/powerpoint/2010/main" val="1024086991"/>
+      </p:ext>
+    </p:extLst>
+  </p:cSld>
+  <p:clrMapOvr>
+    <a:masterClrMapping/>
+  </p:clrMapOvr>
+</p:notes>
+</file>
+
+<file path=ppt/notesSlides/notesSlide12.xml><?xml version="1.0" encoding="utf-8"?>
+<p:notes xmlns:a="http://schemas.openxmlformats.org/drawingml/2006/main" xmlns:r="http://schemas.openxmlformats.org/officeDocument/2006/relationships" xmlns:p="http://schemas.openxmlformats.org/presentationml/2006/main">
+  <p:cSld>
+    <p:spTree>
+      <p:nvGrpSpPr>
+        <p:cNvPr id="1" name=""/>
+        <p:cNvGrpSpPr/>
+        <p:nvPr/>
+      </p:nvGrpSpPr>
+      <p:grpSpPr>
+        <a:xfrm>
+          <a:off x="0" y="0"/>
+          <a:ext cx="0" cy="0"/>
+          <a:chOff x="0" y="0"/>
+          <a:chExt cx="0" cy="0"/>
+        </a:xfrm>
+      </p:grpSpPr>
+      <p:sp>
+        <p:nvSpPr>
+          <p:cNvPr id="2" name="Slide Image Placeholder 1"/>
+          <p:cNvSpPr>
+            <a:spLocks noGrp="1" noRot="1" noChangeAspect="1"/>
+          </p:cNvSpPr>
+          <p:nvPr>
+            <p:ph type="sldImg"/>
+          </p:nvPr>
+        </p:nvSpPr>
+        <p:spPr/>
+      </p:sp>
+      <p:sp>
+        <p:nvSpPr>
+          <p:cNvPr id="3" name="Notes Placeholder 2"/>
+          <p:cNvSpPr>
+            <a:spLocks noGrp="1"/>
+          </p:cNvSpPr>
+          <p:nvPr>
+            <p:ph type="body" idx="1"/>
+          </p:nvPr>
+        </p:nvSpPr>
+        <p:spPr/>
+        <p:txBody>
+          <a:bodyPr/>
+          <a:lstStyle/>
+          <a:p>
+            <a:r>
+              <a:rPr lang="en-US" dirty="0"/>
+              <a:t>• Close the core Day 4 live time here. Learners have every primitive from Modules 1-6 before starting the lab.
+• GROUNDING SOURCE: https://learn.microsoft.com/en-us/agent-framework/concepts/workflows/
+• GROUNDING SOURCE: https://learn.microsoft.com/azure/foundry/concepts/evaluation-evaluators/agent-evaluators</a:t>
+            </a:r>
+            <a:endParaRPr lang="en-US" dirty="0"/>
+          </a:p>
+        </p:txBody>
+      </p:sp>
+      <p:sp>
+        <p:nvSpPr>
+          <p:cNvPr id="4" name="Slide Number Placeholder 3"/>
+          <p:cNvSpPr>
+            <a:spLocks noGrp="1"/>
+          </p:cNvSpPr>
+          <p:nvPr>
+            <p:ph type="sldNum" sz="quarter" idx="10"/>
+          </p:nvPr>
+        </p:nvSpPr>
+        <p:spPr/>
+        <p:txBody>
+          <a:bodyPr/>
+          <a:lstStyle/>
+          <a:p>
+            <a:fld id="{F7021451-1387-4CA6-816F-3879F97B5CBC}" type="slidenum">
+              <a:rPr lang="en-US"/>
+              <a:t>12</a:t>
             </a:fld>
             <a:endParaRPr lang="en-US"/>
           </a:p>
@@ -782,7 +872,7 @@
           <a:p>
             <a:r>
               <a:rPr lang="en-US" dirty="0"/>
-              <a:t>• Same Planner/Retriever/Critic roles across all three parts — the roles don't change, only the orchestration mechanism does. The Summarizer role from an earlier draft was folded into the Critic to keep this lab digestible — the Critic both judges and produces the final answer.
+              <a:t>• Same Planner/Retriever/Critic roles across all three parts — the roles don't change, only what runs them does. The Summarizer role from an earlier draft was folded into the Critic to keep this lab digestible — the Critic both judges and produces the final answer.
 • GROUNDING SOURCE: https://learn.microsoft.com/en-us/agent-framework/concepts/workflows/</a:t>
             </a:r>
             <a:endParaRPr lang="en-US" dirty="0"/>
@@ -871,8 +961,8 @@
           <a:p>
             <a:r>
               <a:rPr lang="en-US" dirty="0"/>
-              <a:t>• This isn't filler — it's a live demonstration of the exact limitation Module 2's own takeaway already names ("Sequential cannot loop back"). The Critic here has no way to ask for another pass; that gap is what Part B exists to fix.
-• GROUNDING SOURCE: https://learn.microsoft.com/en-us/agent-framework/workflows/orchestrations/sequential</a:t>
+              <a:t>• This is deliberately NOT SequentialBuilder — that's Part B's shortcut. Part A wires the same three roles by hand with WorkflowBuilder + add_edge, straight-line, no conditional edges, so the graph primitives are visible before the prebuilt templates hide them. output_from is the one detail worth dwelling on: every AgentExecutor yields its own response as output by default, so without output_from=[critic] this 3-executor graph would produce three outputs, not one.
+• GROUNDING SOURCE: https://learn.microsoft.com/en-us/agent-framework/concepts/workflows/executors</a:t>
             </a:r>
             <a:endParaRPr lang="en-US" dirty="0"/>
           </a:p>
@@ -960,7 +1050,8 @@
           <a:p>
             <a:r>
               <a:rPr lang="en-US" dirty="0"/>
-              <a:t>• This is Module 3's conditional-edge primitive, applied to the exact gap Part A exposed. Rebuilding with WorkflowBuilder is a genuine rewrite of the orchestration plumbing, not a small diff on Part A's SequentialBuilder code — set that expectation directly with attendees.
+              <a:t>• Construction #1 (Sequential) is the shortcut for exactly what Part A built by hand — same limitation, one line of code. Construction #2 fixes it. Rebuilding with a custom WorkflowBuilder graph is a genuine rewrite of the orchestration plumbing, not a small diff on construction #1's code — set that expectation directly with attendees.
+• GROUNDING SOURCE: https://learn.microsoft.com/en-us/agent-framework/workflows/orchestrations/sequential
 • GROUNDING SOURCE: https://learn.microsoft.com/en-us/agent-framework/concepts/workflows/edges</a:t>
             </a:r>
             <a:endParaRPr lang="en-US" dirty="0"/>
@@ -1049,8 +1140,8 @@
           <a:p>
             <a:r>
               <a:rPr lang="en-US" dirty="0"/>
-              <a:t>• Unlike AgentLoopMiddleware's built-in max_iterations, a custom conditional edge has no automatic cap — the Critic-to-Planner loop can genuinely run forever if the model never approves. This is a correctness requirement for Part B, not a stretch goal, and it's the concrete reason Day 5's "budget guardrails revisited" module has something real to point back at.
-• GROUNDING SOURCE: https://learn.microsoft.com/en-us/agent-framework/agents/looping</a:t>
+              <a:t>• GroupChatBuilder's orchestrator_agent parameter is a real Agent, not a plain function — it decides who speaks next by reading the shared conversation, not by evaluating a Python condition. Participants here are plain Agent instances, not AgentExecutor-wrapped like construction #2 — confirmed against the framework's own Group Chat tutorial and Python sample. This is a genuine third implementation, not a one-line pattern swap.
+• GROUNDING SOURCE: https://learn.microsoft.com/en-us/agent-framework/workflows/orchestrations/group-chat</a:t>
             </a:r>
             <a:endParaRPr lang="en-US" dirty="0"/>
           </a:p>
@@ -1138,8 +1229,8 @@
           <a:p>
             <a:r>
               <a:rPr lang="en-US" dirty="0"/>
-              <a:t>• GroupChatBuilder's orchestrator_agent parameter is a real Agent, not a plain function — it can play the Critic's judging role directly. This is a genuine second implementation, not a one-line pattern swap, which is why the eval-change-re-eval discipline from Module 5 applies here for real: baseline from Part B, change to Part C, re-run, quantify.
-• GROUNDING SOURCE: https://learn.microsoft.com/en-us/agent-framework/workflows/orchestrations/group-chat</a:t>
+              <a:t>• Unlike AgentLoopMiddleware's built-in max_iterations, neither construction #2's conditional edge nor construction #3's orchestrator has an automatic cap — both loops can genuinely run forever if the model never approves. This is a correctness requirement for BOTH constructions, not a stretch goal, and it's the concrete reason Day 5's "budget guardrails revisited" module has something real to point back at.
+• GROUNDING SOURCE: https://learn.microsoft.com/en-us/agent-framework/agents/looping</a:t>
             </a:r>
             <a:endParaRPr lang="en-US" dirty="0"/>
           </a:p>
@@ -1227,7 +1318,7 @@
           <a:p>
             <a:r>
               <a:rPr lang="en-US" dirty="0"/>
-              <a:t>• Same discipline as Day 3 Part E, at workflow scale — Module 5's own framing. Building it once and reusing it across Parts A, B, and C is what makes the progression meaningful instead of three disconnected exercises.
+              <a:t>• Part C builds nothing new — it imports Part B's three build_workflow_*() functions directly. This is where Module 5's evaluation anchor actually lives in the lab, instead of being smeared across every part.
 • GROUNDING SOURCE: https://learn.microsoft.com/en-us/agent-framework/agents/evaluation</a:t>
             </a:r>
             <a:endParaRPr lang="en-US" dirty="0"/>
@@ -1316,8 +1407,8 @@
           <a:p>
             <a:r>
               <a:rPr lang="en-US" dirty="0"/>
-              <a:t>• The lab's own definition of what to measure, straight from the locked spec — plan quality, retrieval recall, and BOTH of the Critic's decisions (the reject-and-loop call and the final Answer), not just the final output. Run this same list against Parts A, B, and C.
-• GROUNDING SOURCE: https://learn.microsoft.com/azure/foundry/concepts/evaluation-evaluators/agent-evaluators</a:t>
+              <a:t>• Same discipline as Day 3 Part E, at workflow scale — Module 5's own framing. Building it once and reusing it for Part C's comparison is what makes the progression meaningful instead of three disconnected exercises. Part A and Part B's own demos use one hand-picked question each, not the golden set — the golden set's job is Part C's statistical comparison.
+• GROUNDING SOURCE: https://learn.microsoft.com/en-us/agent-framework/agents/evaluation</a:t>
             </a:r>
             <a:endParaRPr lang="en-US" dirty="0"/>
           </a:p>
@@ -1405,8 +1496,8 @@
           <a:p>
             <a:r>
               <a:rPr lang="en-US" dirty="0"/>
-              <a:t>• Mirrors Day 3 Module 9's prerequisites-card style. The ADO MCP path is only needed for the optional Ticket agent stretch, not the core lab.
-• GROUNDING SOURCE: https://learn.microsoft.com/en-us/agent-framework/agents/evaluation</a:t>
+              <a:t>• The lab's own definition of what to measure, straight from the locked spec — plan quality, retrieval recall, and BOTH of the Critic's decisions (the reject-and-loop call and the final Answer), not just the final output. This lab's actual implemented scope stops at approved/rejected/guardrail-tripped counting — cost-per-outcome and an LLM-judged trajectory score are named here as what a fuller harness would add, flagged explicitly as not implemented, not silently assumed.
+• GROUNDING SOURCE: https://learn.microsoft.com/azure/foundry/concepts/evaluation-evaluators/agent-evaluators</a:t>
             </a:r>
             <a:endParaRPr lang="en-US" dirty="0"/>
           </a:p>
@@ -1890,7 +1981,7 @@
                 <a:ea typeface="Calibri" pitchFamily="34" charset="-122"/>
                 <a:cs typeface="Calibri" pitchFamily="34" charset="-120"/>
               </a:rPr>
-              <a:t>Three parts, one scenario — start simple, then build up to a workflow you can evaluate and compare</a:t>
+              <a:t>Three parts, one scenario — workflow basics, then orchestrations, then evaluation</a:t>
             </a:r>
             <a:endParaRPr lang="en-US" sz="1800" dirty="0"/>
           </a:p>
@@ -2127,6 +2218,640 @@
                 <a:ea typeface="Calibri" pitchFamily="34" charset="-122"/>
                 <a:cs typeface="Calibri" pitchFamily="34" charset="-120"/>
               </a:rPr>
+              <a:t>Prerequisites</a:t>
+            </a:r>
+            <a:endParaRPr lang="en-US" sz="2800" dirty="0"/>
+          </a:p>
+        </p:txBody>
+      </p:sp>
+      <p:sp>
+        <p:nvSpPr>
+          <p:cNvPr id="5" name="Shape 3"/>
+          <p:cNvSpPr/>
+          <p:nvPr/>
+        </p:nvSpPr>
+        <p:spPr>
+          <a:xfrm>
+            <a:off x="365760" y="1078992"/>
+            <a:ext cx="4105656" cy="1655064"/>
+          </a:xfrm>
+          <a:prstGeom prst="roundRect">
+            <a:avLst>
+              <a:gd name="adj" fmla="val 3315"/>
+            </a:avLst>
+          </a:prstGeom>
+          <a:solidFill>
+            <a:srgbClr val="CADCFC"/>
+          </a:solidFill>
+          <a:ln w="10160">
+            <a:solidFill>
+              <a:srgbClr val="1E2761"/>
+            </a:solidFill>
+            <a:prstDash val="solid"/>
+          </a:ln>
+        </p:spPr>
+      </p:sp>
+      <p:sp>
+        <p:nvSpPr>
+          <p:cNvPr id="6" name="Text 4"/>
+          <p:cNvSpPr/>
+          <p:nvPr/>
+        </p:nvSpPr>
+        <p:spPr>
+          <a:xfrm>
+            <a:off x="512064" y="1197864"/>
+            <a:ext cx="3813048" cy="310896"/>
+          </a:xfrm>
+          <a:prstGeom prst="rect">
+            <a:avLst/>
+          </a:prstGeom>
+          <a:noFill/>
+          <a:ln/>
+        </p:spPr>
+        <p:txBody>
+          <a:bodyPr wrap="square" lIns="0" tIns="0" rIns="0" bIns="0" rtlCol="0" anchor="ctr">
+            <a:normAutofit/>
+          </a:bodyPr>
+          <a:lstStyle/>
+          <a:p>
+            <a:pPr indent="0" marL="0">
+              <a:buNone/>
+            </a:pPr>
+            <a:r>
+              <a:rPr lang="en-US" sz="1500" b="1" dirty="0">
+                <a:solidFill>
+                  <a:srgbClr val="1E2761"/>
+                </a:solidFill>
+                <a:latin typeface="Calibri" pitchFamily="34" charset="0"/>
+                <a:ea typeface="Calibri" pitchFamily="34" charset="-122"/>
+                <a:cs typeface="Calibri" pitchFamily="34" charset="-120"/>
+              </a:rPr>
+              <a:t>Day 3 lab complete</a:t>
+            </a:r>
+            <a:endParaRPr lang="en-US" sz="1500" dirty="0"/>
+          </a:p>
+        </p:txBody>
+      </p:sp>
+      <p:sp>
+        <p:nvSpPr>
+          <p:cNvPr id="7" name="Text 5"/>
+          <p:cNvSpPr/>
+          <p:nvPr/>
+        </p:nvSpPr>
+        <p:spPr>
+          <a:xfrm>
+            <a:off x="512064" y="1581912"/>
+            <a:ext cx="3813048" cy="1033272"/>
+          </a:xfrm>
+          <a:prstGeom prst="rect">
+            <a:avLst/>
+          </a:prstGeom>
+          <a:noFill/>
+          <a:ln/>
+        </p:spPr>
+        <p:txBody>
+          <a:bodyPr wrap="square" lIns="0" tIns="0" rIns="0" bIns="0" rtlCol="0" anchor="t">
+            <a:normAutofit/>
+          </a:bodyPr>
+          <a:lstStyle/>
+          <a:p>
+            <a:pPr indent="0" marL="0">
+              <a:buNone/>
+            </a:pPr>
+            <a:r>
+              <a:rPr lang="en-US" sz="1150" dirty="0">
+                <a:solidFill>
+                  <a:srgbClr val="212121"/>
+                </a:solidFill>
+                <a:latin typeface="Calibri" pitchFamily="34" charset="0"/>
+                <a:ea typeface="Calibri" pitchFamily="34" charset="-122"/>
+                <a:cs typeface="Calibri" pitchFamily="34" charset="-120"/>
+              </a:rPr>
+              <a:t>a working single agent with memory, streaming, structured outputs, and MCP</a:t>
+            </a:r>
+            <a:endParaRPr lang="en-US" sz="1150" dirty="0"/>
+          </a:p>
+        </p:txBody>
+      </p:sp>
+      <p:sp>
+        <p:nvSpPr>
+          <p:cNvPr id="8" name="Shape 6"/>
+          <p:cNvSpPr/>
+          <p:nvPr/>
+        </p:nvSpPr>
+        <p:spPr>
+          <a:xfrm>
+            <a:off x="4672584" y="1078992"/>
+            <a:ext cx="4105656" cy="1655064"/>
+          </a:xfrm>
+          <a:prstGeom prst="roundRect">
+            <a:avLst>
+              <a:gd name="adj" fmla="val 3315"/>
+            </a:avLst>
+          </a:prstGeom>
+          <a:solidFill>
+            <a:srgbClr val="F3F4F6"/>
+          </a:solidFill>
+          <a:ln w="10160">
+            <a:solidFill>
+              <a:srgbClr val="D1D5DB"/>
+            </a:solidFill>
+            <a:prstDash val="solid"/>
+          </a:ln>
+        </p:spPr>
+      </p:sp>
+      <p:sp>
+        <p:nvSpPr>
+          <p:cNvPr id="9" name="Text 7"/>
+          <p:cNvSpPr/>
+          <p:nvPr/>
+        </p:nvSpPr>
+        <p:spPr>
+          <a:xfrm>
+            <a:off x="4818888" y="1197864"/>
+            <a:ext cx="3813048" cy="310896"/>
+          </a:xfrm>
+          <a:prstGeom prst="rect">
+            <a:avLst/>
+          </a:prstGeom>
+          <a:noFill/>
+          <a:ln/>
+        </p:spPr>
+        <p:txBody>
+          <a:bodyPr wrap="square" lIns="0" tIns="0" rIns="0" bIns="0" rtlCol="0" anchor="ctr">
+            <a:normAutofit/>
+          </a:bodyPr>
+          <a:lstStyle/>
+          <a:p>
+            <a:pPr indent="0" marL="0">
+              <a:buNone/>
+            </a:pPr>
+            <a:r>
+              <a:rPr lang="en-US" sz="1500" b="1" dirty="0">
+                <a:solidFill>
+                  <a:srgbClr val="1E2761"/>
+                </a:solidFill>
+                <a:latin typeface="Calibri" pitchFamily="34" charset="0"/>
+                <a:ea typeface="Calibri" pitchFamily="34" charset="-122"/>
+                <a:cs typeface="Calibri" pitchFamily="34" charset="-120"/>
+              </a:rPr>
+              <a:t>Bundled reference docs</a:t>
+            </a:r>
+            <a:endParaRPr lang="en-US" sz="1500" dirty="0"/>
+          </a:p>
+        </p:txBody>
+      </p:sp>
+      <p:sp>
+        <p:nvSpPr>
+          <p:cNvPr id="10" name="Text 8"/>
+          <p:cNvSpPr/>
+          <p:nvPr/>
+        </p:nvSpPr>
+        <p:spPr>
+          <a:xfrm>
+            <a:off x="4818888" y="1581912"/>
+            <a:ext cx="3813048" cy="1033272"/>
+          </a:xfrm>
+          <a:prstGeom prst="rect">
+            <a:avLst/>
+          </a:prstGeom>
+          <a:noFill/>
+          <a:ln/>
+        </p:spPr>
+        <p:txBody>
+          <a:bodyPr wrap="square" lIns="0" tIns="0" rIns="0" bIns="0" rtlCol="0" anchor="t">
+            <a:normAutofit/>
+          </a:bodyPr>
+          <a:lstStyle/>
+          <a:p>
+            <a:pPr indent="0" marL="0">
+              <a:buNone/>
+            </a:pPr>
+            <a:r>
+              <a:rPr lang="en-US" sz="1150" dirty="0">
+                <a:solidFill>
+                  <a:srgbClr val="212121"/>
+                </a:solidFill>
+                <a:latin typeface="Calibri" pitchFamily="34" charset="0"/>
+                <a:ea typeface="Calibri" pitchFamily="34" charset="-122"/>
+                <a:cs typeface="Calibri" pitchFamily="34" charset="-120"/>
+              </a:rPr>
+              <a:t>included in the repo (labs/day4/python/data/docs/); nothing to provision, no live knowledge base required</a:t>
+            </a:r>
+            <a:endParaRPr lang="en-US" sz="1150" dirty="0"/>
+          </a:p>
+        </p:txBody>
+      </p:sp>
+      <p:sp>
+        <p:nvSpPr>
+          <p:cNvPr id="11" name="Shape 9"/>
+          <p:cNvSpPr/>
+          <p:nvPr/>
+        </p:nvSpPr>
+        <p:spPr>
+          <a:xfrm>
+            <a:off x="365760" y="2935224"/>
+            <a:ext cx="4105656" cy="1655064"/>
+          </a:xfrm>
+          <a:prstGeom prst="roundRect">
+            <a:avLst>
+              <a:gd name="adj" fmla="val 3315"/>
+            </a:avLst>
+          </a:prstGeom>
+          <a:solidFill>
+            <a:srgbClr val="F3F4F6"/>
+          </a:solidFill>
+          <a:ln w="10160">
+            <a:solidFill>
+              <a:srgbClr val="D1D5DB"/>
+            </a:solidFill>
+            <a:prstDash val="solid"/>
+          </a:ln>
+        </p:spPr>
+      </p:sp>
+      <p:sp>
+        <p:nvSpPr>
+          <p:cNvPr id="12" name="Text 10"/>
+          <p:cNvSpPr/>
+          <p:nvPr/>
+        </p:nvSpPr>
+        <p:spPr>
+          <a:xfrm>
+            <a:off x="512064" y="3054096"/>
+            <a:ext cx="3813048" cy="310896"/>
+          </a:xfrm>
+          <a:prstGeom prst="rect">
+            <a:avLst/>
+          </a:prstGeom>
+          <a:noFill/>
+          <a:ln/>
+        </p:spPr>
+        <p:txBody>
+          <a:bodyPr wrap="square" lIns="0" tIns="0" rIns="0" bIns="0" rtlCol="0" anchor="ctr">
+            <a:normAutofit/>
+          </a:bodyPr>
+          <a:lstStyle/>
+          <a:p>
+            <a:pPr indent="0" marL="0">
+              <a:buNone/>
+            </a:pPr>
+            <a:r>
+              <a:rPr lang="en-US" sz="1500" b="1" dirty="0">
+                <a:solidFill>
+                  <a:srgbClr val="1E2761"/>
+                </a:solidFill>
+                <a:latin typeface="Calibri" pitchFamily="34" charset="0"/>
+                <a:ea typeface="Calibri" pitchFamily="34" charset="-122"/>
+                <a:cs typeface="Calibri" pitchFamily="34" charset="-120"/>
+              </a:rPr>
+              <a:t>A Foundry judge model deployment</a:t>
+            </a:r>
+            <a:endParaRPr lang="en-US" sz="1500" dirty="0"/>
+          </a:p>
+        </p:txBody>
+      </p:sp>
+      <p:sp>
+        <p:nvSpPr>
+          <p:cNvPr id="13" name="Text 11"/>
+          <p:cNvSpPr/>
+          <p:nvPr/>
+        </p:nvSpPr>
+        <p:spPr>
+          <a:xfrm>
+            <a:off x="512064" y="3438144"/>
+            <a:ext cx="3813048" cy="1033272"/>
+          </a:xfrm>
+          <a:prstGeom prst="rect">
+            <a:avLst/>
+          </a:prstGeom>
+          <a:noFill/>
+          <a:ln/>
+        </p:spPr>
+        <p:txBody>
+          <a:bodyPr wrap="square" lIns="0" tIns="0" rIns="0" bIns="0" rtlCol="0" anchor="t">
+            <a:normAutofit/>
+          </a:bodyPr>
+          <a:lstStyle/>
+          <a:p>
+            <a:pPr indent="0" marL="0">
+              <a:buNone/>
+            </a:pPr>
+            <a:r>
+              <a:rPr lang="en-US" sz="1150" dirty="0">
+                <a:solidFill>
+                  <a:srgbClr val="212121"/>
+                </a:solidFill>
+                <a:latin typeface="Calibri" pitchFamily="34" charset="0"/>
+                <a:ea typeface="Calibri" pitchFamily="34" charset="-122"/>
+                <a:cs typeface="Calibri" pitchFamily="34" charset="-120"/>
+              </a:rPr>
+              <a:t>for cost/trajectory evaluation</a:t>
+            </a:r>
+            <a:endParaRPr lang="en-US" sz="1150" dirty="0"/>
+          </a:p>
+        </p:txBody>
+      </p:sp>
+      <p:sp>
+        <p:nvSpPr>
+          <p:cNvPr id="14" name="Shape 12"/>
+          <p:cNvSpPr/>
+          <p:nvPr/>
+        </p:nvSpPr>
+        <p:spPr>
+          <a:xfrm>
+            <a:off x="4672584" y="2935224"/>
+            <a:ext cx="4105656" cy="1655064"/>
+          </a:xfrm>
+          <a:prstGeom prst="roundRect">
+            <a:avLst>
+              <a:gd name="adj" fmla="val 3315"/>
+            </a:avLst>
+          </a:prstGeom>
+          <a:solidFill>
+            <a:srgbClr val="F3F4F6"/>
+          </a:solidFill>
+          <a:ln w="10160">
+            <a:solidFill>
+              <a:srgbClr val="D1D5DB"/>
+            </a:solidFill>
+            <a:prstDash val="solid"/>
+          </a:ln>
+        </p:spPr>
+      </p:sp>
+      <p:sp>
+        <p:nvSpPr>
+          <p:cNvPr id="15" name="Text 13"/>
+          <p:cNvSpPr/>
+          <p:nvPr/>
+        </p:nvSpPr>
+        <p:spPr>
+          <a:xfrm>
+            <a:off x="4818888" y="3054096"/>
+            <a:ext cx="3813048" cy="310896"/>
+          </a:xfrm>
+          <a:prstGeom prst="rect">
+            <a:avLst/>
+          </a:prstGeom>
+          <a:noFill/>
+          <a:ln/>
+        </p:spPr>
+        <p:txBody>
+          <a:bodyPr wrap="square" lIns="0" tIns="0" rIns="0" bIns="0" rtlCol="0" anchor="ctr">
+            <a:normAutofit/>
+          </a:bodyPr>
+          <a:lstStyle/>
+          <a:p>
+            <a:pPr indent="0" marL="0">
+              <a:buNone/>
+            </a:pPr>
+            <a:r>
+              <a:rPr lang="en-US" sz="1500" b="1" dirty="0">
+                <a:solidFill>
+                  <a:srgbClr val="1E2761"/>
+                </a:solidFill>
+                <a:latin typeface="Calibri" pitchFamily="34" charset="0"/>
+                <a:ea typeface="Calibri" pitchFamily="34" charset="-122"/>
+                <a:cs typeface="Calibri" pitchFamily="34" charset="-120"/>
+              </a:rPr>
+              <a:t>(Optional stretch only)</a:t>
+            </a:r>
+            <a:endParaRPr lang="en-US" sz="1500" dirty="0"/>
+          </a:p>
+        </p:txBody>
+      </p:sp>
+      <p:sp>
+        <p:nvSpPr>
+          <p:cNvPr id="16" name="Text 14"/>
+          <p:cNvSpPr/>
+          <p:nvPr/>
+        </p:nvSpPr>
+        <p:spPr>
+          <a:xfrm>
+            <a:off x="4818888" y="3438144"/>
+            <a:ext cx="3813048" cy="1033272"/>
+          </a:xfrm>
+          <a:prstGeom prst="rect">
+            <a:avLst/>
+          </a:prstGeom>
+          <a:noFill/>
+          <a:ln/>
+        </p:spPr>
+        <p:txBody>
+          <a:bodyPr wrap="square" lIns="0" tIns="0" rIns="0" bIns="0" rtlCol="0" anchor="t">
+            <a:normAutofit/>
+          </a:bodyPr>
+          <a:lstStyle/>
+          <a:p>
+            <a:pPr indent="0" marL="0">
+              <a:buNone/>
+            </a:pPr>
+            <a:r>
+              <a:rPr lang="en-US" sz="1150" dirty="0">
+                <a:solidFill>
+                  <a:srgbClr val="212121"/>
+                </a:solidFill>
+                <a:latin typeface="Calibri" pitchFamily="34" charset="0"/>
+                <a:ea typeface="Calibri" pitchFamily="34" charset="-122"/>
+                <a:cs typeface="Calibri" pitchFamily="34" charset="-120"/>
+              </a:rPr>
+              <a:t>Day 3's Azure DevOps MCP path, for the Ticket agent</a:t>
+            </a:r>
+            <a:endParaRPr lang="en-US" sz="1150" dirty="0"/>
+          </a:p>
+        </p:txBody>
+      </p:sp>
+      <p:sp>
+        <p:nvSpPr>
+          <p:cNvPr id="17" name="Shape 15"/>
+          <p:cNvSpPr/>
+          <p:nvPr/>
+        </p:nvSpPr>
+        <p:spPr>
+          <a:xfrm>
+            <a:off x="365760" y="4773168"/>
+            <a:ext cx="8412480" cy="0"/>
+          </a:xfrm>
+          <a:prstGeom prst="line">
+            <a:avLst/>
+          </a:prstGeom>
+          <a:noFill/>
+          <a:ln w="6350">
+            <a:solidFill>
+              <a:srgbClr val="D1D5DB"/>
+            </a:solidFill>
+            <a:prstDash val="solid"/>
+          </a:ln>
+        </p:spPr>
+      </p:sp>
+      <p:sp>
+        <p:nvSpPr>
+          <p:cNvPr id="18" name="Text 16"/>
+          <p:cNvSpPr/>
+          <p:nvPr/>
+        </p:nvSpPr>
+        <p:spPr>
+          <a:xfrm>
+            <a:off x="384048" y="4818888"/>
+            <a:ext cx="8275320" cy="182880"/>
+          </a:xfrm>
+          <a:prstGeom prst="rect">
+            <a:avLst/>
+          </a:prstGeom>
+          <a:noFill/>
+          <a:ln/>
+        </p:spPr>
+        <p:txBody>
+          <a:bodyPr wrap="square" lIns="0" tIns="0" rIns="0" bIns="0" rtlCol="0" anchor="ctr">
+            <a:normAutofit/>
+          </a:bodyPr>
+          <a:lstStyle/>
+          <a:p>
+            <a:pPr indent="0" marL="0">
+              <a:buNone/>
+            </a:pPr>
+            <a:r>
+              <a:rPr lang="en-US" sz="820" dirty="0">
+                <a:solidFill>
+                  <a:srgbClr val="6B7280"/>
+                </a:solidFill>
+                <a:latin typeface="Calibri" pitchFamily="34" charset="0"/>
+                <a:ea typeface="Calibri" pitchFamily="34" charset="-122"/>
+                <a:cs typeface="Calibri" pitchFamily="34" charset="-120"/>
+              </a:rPr>
+              <a:t>Source: https://learn.microsoft.com/en-us/agent-framework/agents/evaluation</a:t>
+            </a:r>
+            <a:endParaRPr lang="en-US" sz="820" dirty="0"/>
+          </a:p>
+        </p:txBody>
+      </p:sp>
+    </p:spTree>
+  </p:cSld>
+  <p:clrMapOvr>
+    <a:masterClrMapping/>
+  </p:clrMapOvr>
+</p:sld>
+</file>
+
+<file path=ppt/slides/slide11.xml><?xml version="1.0" encoding="utf-8"?>
+<p:sld xmlns:a="http://schemas.openxmlformats.org/drawingml/2006/main" xmlns:r="http://schemas.openxmlformats.org/officeDocument/2006/relationships" xmlns:p="http://schemas.openxmlformats.org/presentationml/2006/main">
+  <p:cSld name="Slide 11">
+    <p:bg>
+      <p:bgPr>
+        <a:solidFill>
+          <a:srgbClr val="FFFFFF"/>
+        </a:solidFill>
+      </p:bgPr>
+    </p:bg>
+    <p:spTree>
+      <p:nvGrpSpPr>
+        <p:cNvPr id="1" name=""/>
+        <p:cNvGrpSpPr/>
+        <p:nvPr/>
+      </p:nvGrpSpPr>
+      <p:grpSpPr>
+        <a:xfrm>
+          <a:off x="0" y="0"/>
+          <a:ext cx="0" cy="0"/>
+          <a:chOff x="0" y="0"/>
+          <a:chExt cx="0" cy="0"/>
+        </a:xfrm>
+      </p:grpSpPr>
+      <p:sp>
+        <p:nvSpPr>
+          <p:cNvPr id="2" name="Shape 0"/>
+          <p:cNvSpPr/>
+          <p:nvPr/>
+        </p:nvSpPr>
+        <p:spPr>
+          <a:xfrm>
+            <a:off x="0" y="0"/>
+            <a:ext cx="54864" cy="5143500"/>
+          </a:xfrm>
+          <a:prstGeom prst="rect">
+            <a:avLst/>
+          </a:prstGeom>
+          <a:solidFill>
+            <a:srgbClr val="1E2761"/>
+          </a:solidFill>
+          <a:ln/>
+        </p:spPr>
+      </p:sp>
+      <p:sp>
+        <p:nvSpPr>
+          <p:cNvPr id="3" name="Text 1"/>
+          <p:cNvSpPr/>
+          <p:nvPr/>
+        </p:nvSpPr>
+        <p:spPr>
+          <a:xfrm>
+            <a:off x="5486400" y="256032"/>
+            <a:ext cx="3337560" cy="228600"/>
+          </a:xfrm>
+          <a:prstGeom prst="rect">
+            <a:avLst/>
+          </a:prstGeom>
+          <a:noFill/>
+          <a:ln/>
+        </p:spPr>
+        <p:txBody>
+          <a:bodyPr wrap="square" lIns="0" tIns="0" rIns="0" bIns="0" rtlCol="0" anchor="ctr">
+            <a:normAutofit/>
+          </a:bodyPr>
+          <a:lstStyle/>
+          <a:p>
+            <a:pPr algn="r" indent="0" marL="0">
+              <a:buNone/>
+            </a:pPr>
+            <a:r>
+              <a:rPr lang="en-US" sz="950" dirty="0">
+                <a:solidFill>
+                  <a:srgbClr val="6B7280"/>
+                </a:solidFill>
+                <a:latin typeface="Calibri" pitchFamily="34" charset="0"/>
+                <a:ea typeface="Calibri" pitchFamily="34" charset="-122"/>
+                <a:cs typeface="Calibri" pitchFamily="34" charset="-120"/>
+              </a:rPr>
+              <a:t>Day 4 · Module 7</a:t>
+            </a:r>
+            <a:endParaRPr lang="en-US" sz="950" dirty="0"/>
+          </a:p>
+        </p:txBody>
+      </p:sp>
+      <p:sp>
+        <p:nvSpPr>
+          <p:cNvPr id="4" name="Text 2"/>
+          <p:cNvSpPr/>
+          <p:nvPr/>
+        </p:nvSpPr>
+        <p:spPr>
+          <a:xfrm>
+            <a:off x="365760" y="310896"/>
+            <a:ext cx="6583680" cy="603504"/>
+          </a:xfrm>
+          <a:prstGeom prst="rect">
+            <a:avLst/>
+          </a:prstGeom>
+          <a:noFill/>
+          <a:ln/>
+        </p:spPr>
+        <p:txBody>
+          <a:bodyPr wrap="square" lIns="0" tIns="0" rIns="0" bIns="0" rtlCol="0" anchor="ctr">
+            <a:normAutofit/>
+          </a:bodyPr>
+          <a:lstStyle/>
+          <a:p>
+            <a:pPr indent="0" marL="0">
+              <a:buNone/>
+            </a:pPr>
+            <a:r>
+              <a:rPr lang="en-US" sz="2800" b="1" dirty="0">
+                <a:solidFill>
+                  <a:srgbClr val="1E2761"/>
+                </a:solidFill>
+                <a:latin typeface="Calibri" pitchFamily="34" charset="0"/>
+                <a:ea typeface="Calibri" pitchFamily="34" charset="-122"/>
+                <a:cs typeface="Calibri" pitchFamily="34" charset="-120"/>
+              </a:rPr>
               <a:t>Definition of done</a:t>
             </a:r>
             <a:endParaRPr lang="en-US" sz="2800" dirty="0"/>
@@ -2135,7 +2860,7 @@
       </p:sp>
       <p:graphicFrame>
         <p:nvGraphicFramePr>
-          <p:cNvPr id="11" name="Table 0"/>
+          <p:cNvPr id="12" name="Table 0"/>
           <p:cNvGraphicFramePr>
             <a:graphicFrameLocks noGrp="1"/>
           </p:cNvGraphicFramePr>
@@ -2156,8 +2881,8 @@
             <a:tbl>
               <a:tblPr/>
               <a:tblGrid>
-                <a:gridCol w="1191148"/>
-                <a:gridCol w="7221332"/>
+                <a:gridCol w="1188720"/>
+                <a:gridCol w="7223760"/>
               </a:tblGrid>
               <a:tr h="502920">
                 <a:tc>
@@ -2383,7 +3108,7 @@
                           <a:ea typeface="Calibri" pitchFamily="34" charset="-122"/>
                           <a:cs typeface="Calibri" pitchFamily="34" charset="-120"/>
                         </a:rPr>
-                        <a:t>Runs end-to-end on the golden set; the "no correction" limitation shows up in at least one result</a:t>
+                        <a:t>The graph runs end-to-end and prints the Critic's verdict; the Mermaid diagram matches the graph</a:t>
                       </a:r>
                       <a:endParaRPr lang="en-US" sz="950" dirty="0">
                         <a:latin typeface="Calibri" charset="0"/>
@@ -2521,7 +3246,7 @@
                           <a:ea typeface="Calibri" pitchFamily="34" charset="-122"/>
                           <a:cs typeface="Calibri" pitchFamily="34" charset="-120"/>
                         </a:rPr>
-                        <a:t>Revision loop works; trajectory eval scores and cost per successful outcome captured</a:t>
+                        <a:t>All three constructions run on the same hard question; constructions #2/#3 both recover from construction #1's limitation</a:t>
                       </a:r>
                       <a:endParaRPr lang="en-US" sz="950" dirty="0">
                         <a:latin typeface="Calibri" charset="0"/>
@@ -2659,7 +3384,7 @@
                           <a:ea typeface="Calibri" pitchFamily="34" charset="-122"/>
                           <a:cs typeface="Calibri" pitchFamily="34" charset="-120"/>
                         </a:rPr>
-                        <a:t>Triggers cleanly in a stress test — required, not stretch</a:t>
+                        <a:t>Triggers cleanly in a stress test for BOTH constructions #2 and #3 — required, not stretch</a:t>
                       </a:r>
                       <a:endParaRPr lang="en-US" sz="950" dirty="0">
                         <a:latin typeface="Calibri" charset="0"/>
@@ -2797,7 +3522,7 @@
                           <a:ea typeface="Calibri" pitchFamily="34" charset="-122"/>
                           <a:cs typeface="Calibri" pitchFamily="34" charset="-120"/>
                         </a:rPr>
-                        <a:t>Rebuilt with Group Chat; same golden set re-run; delta vs. Part B quantified</a:t>
+                        <a:t>Golden set runs against all three constructions; a comparison table reports approved rate side by side</a:t>
                       </a:r>
                       <a:endParaRPr lang="en-US" sz="950" dirty="0">
                         <a:latin typeface="Calibri" charset="0"/>
@@ -2935,7 +3660,7 @@
                           <a:ea typeface="Calibri" pitchFamily="34" charset="-122"/>
                           <a:cs typeface="Calibri" pitchFamily="34" charset="-120"/>
                         </a:rPr>
-                        <a:t>Which approach fit best, and why — committed to the repo</a:t>
+                        <a:t>Which construction fit best, and why — committed to the repo</a:t>
                       </a:r>
                       <a:endParaRPr lang="en-US" sz="950" dirty="0">
                         <a:latin typeface="Calibri" charset="0"/>
@@ -3201,9 +3926,9 @@
 </p:sld>
 </file>
 
-<file path=ppt/slides/slide11.xml><?xml version="1.0" encoding="utf-8"?>
+<file path=ppt/slides/slide12.xml><?xml version="1.0" encoding="utf-8"?>
 <p:sld xmlns:a="http://schemas.openxmlformats.org/drawingml/2006/main" xmlns:r="http://schemas.openxmlformats.org/officeDocument/2006/relationships" xmlns:p="http://schemas.openxmlformats.org/presentationml/2006/main">
-  <p:cSld name="Slide 11">
+  <p:cSld name="Slide 12">
     <p:bg>
       <p:bgPr>
         <a:solidFill>
@@ -3446,7 +4171,7 @@
                 <a:ea typeface="Calibri" pitchFamily="34" charset="-122"/>
                 <a:cs typeface="Calibri" pitchFamily="34" charset="-120"/>
               </a:rPr>
-              <a:t>You build the same three roles three different ways — Sequential, a custom graph, Group Chat — and watch the same limitation get fixed, then compared against an alternative fix.</a:t>
+              <a:t>You build a workflow by hand before you use the prebuilt shortcut — Part A first, Part B second, deliberately in that order.</a:t>
             </a:r>
             <a:endParaRPr lang="en-US" sz="1300" dirty="0"/>
           </a:p>
@@ -3571,7 +4296,7 @@
                 <a:ea typeface="Calibri" pitchFamily="34" charset="-122"/>
                 <a:cs typeface="Calibri" pitchFamily="34" charset="-120"/>
               </a:rPr>
-              <a:t>You measure every part against the same golden set, so the differences you see are real, not noise.</a:t>
+              <a:t>You build the same three roles three different ways — Sequential, a custom graph, Group Chat — and watch the same limitation get fixed two different ways.</a:t>
             </a:r>
             <a:endParaRPr lang="en-US" sz="1300" dirty="0"/>
           </a:p>
@@ -3696,7 +4421,7 @@
                 <a:ea typeface="Calibri" pitchFamily="34" charset="-122"/>
                 <a:cs typeface="Calibri" pitchFamily="34" charset="-120"/>
               </a:rPr>
-              <a:t>You build the guardrail Module 6 argued for — required here, because nothing else bounds this loop.</a:t>
+              <a:t>You measure every construction against the same golden set in one dedicated evaluation pass, so the differences you see are real, not noise.</a:t>
             </a:r>
             <a:endParaRPr lang="en-US" sz="1300" dirty="0"/>
           </a:p>
@@ -3821,7 +4546,7 @@
                 <a:ea typeface="Calibri" pitchFamily="34" charset="-122"/>
                 <a:cs typeface="Calibri" pitchFamily="34" charset="-120"/>
               </a:rPr>
-              <a:t>You quantify the effect of a real change instead of assuming it helped.</a:t>
+              <a:t>You build the guardrail Module 6 argued for — required for both fixes, because nothing else bounds either loop.</a:t>
             </a:r>
             <a:endParaRPr lang="en-US" sz="1300" dirty="0"/>
           </a:p>
@@ -4064,7 +4789,7 @@
                 <a:ea typeface="Calibri" pitchFamily="34" charset="-122"/>
                 <a:cs typeface="Calibri" pitchFamily="34" charset="-120"/>
               </a:rPr>
-              <a:t>The same three roles — Planner, Retriever, Critic — implemented three different ways:</a:t>
+              <a:t>The same three roles — Planner, Retriever, Critic:</a:t>
             </a:r>
             <a:endParaRPr lang="en-US" sz="1600" dirty="0"/>
           </a:p>
@@ -4085,7 +4810,7 @@
                 <a:ea typeface="Calibri" pitchFamily="34" charset="-122"/>
                 <a:cs typeface="Calibri" pitchFamily="34" charset="-120"/>
               </a:rPr>
-              <a:t>Part A — SequentialBuilder, no correction</a:t>
+              <a:t>Part A — a raw WorkflowBuilder graph, by hand, no loop</a:t>
             </a:r>
             <a:endParaRPr lang="en-US" sz="1600" dirty="0"/>
           </a:p>
@@ -4106,7 +4831,7 @@
                 <a:ea typeface="Calibri" pitchFamily="34" charset="-122"/>
                 <a:cs typeface="Calibri" pitchFamily="34" charset="-120"/>
               </a:rPr>
-              <a:t>Part B — a custom WorkflowBuilder graph with a revision loop</a:t>
+              <a:t>Part B — the SAME roles, three ways: SequentialBuilder's shortcut, a custom graph with a revision loop, GroupChatBuilder's alternative fix</a:t>
             </a:r>
             <a:endParaRPr lang="en-US" sz="1600" dirty="0"/>
           </a:p>
@@ -4127,7 +4852,7 @@
                 <a:ea typeface="Calibri" pitchFamily="34" charset="-122"/>
                 <a:cs typeface="Calibri" pitchFamily="34" charset="-120"/>
               </a:rPr>
-              <a:t>Part C — GroupChatBuilder, an alternative to Part B's fix</a:t>
+              <a:t>Part C — the golden set against all three of Part B's constructions</a:t>
             </a:r>
             <a:endParaRPr lang="en-US" sz="1600" dirty="0"/>
           </a:p>
@@ -4186,7 +4911,7 @@
                 <a:ea typeface="Calibri" pitchFamily="34" charset="-122"/>
                 <a:cs typeface="Calibri" pitchFamily="34" charset="-120"/>
               </a:rPr>
-              <a:t>All three parts run against the same golden set — same questions, escalating orchestration sophistication, a visible eval delta at each step</a:t>
+              <a:t>Part C runs the same golden set against every construction from Part B — same questions, one comparison table</a:t>
             </a:r>
             <a:endParaRPr lang="en-US" sz="1600" dirty="0"/>
           </a:p>
@@ -4384,7 +5109,7 @@
                 <a:ea typeface="Calibri" pitchFamily="34" charset="-122"/>
                 <a:cs typeface="Calibri" pitchFamily="34" charset="-120"/>
               </a:rPr>
-              <a:t>Part A — Sequential (warm-up)</a:t>
+              <a:t>Part A — Workflow basics</a:t>
             </a:r>
             <a:endParaRPr lang="en-US" sz="2800" dirty="0"/>
           </a:p>
@@ -4429,7 +5154,7 @@
                 <a:ea typeface="Calibri" pitchFamily="34" charset="-122"/>
                 <a:cs typeface="Calibri" pitchFamily="34" charset="-120"/>
               </a:rPr>
-              <a:t>Build Planner → Retriever → Critic with plain SequentialBuilder — the simplest orchestration pattern, no loop</a:t>
+              <a:t>Wrap Planner, Retriever, Critic in AgentExecutor; wire them straight-line with WorkflowBuilder + add_edge — no loop, no conditional edges yet</a:t>
             </a:r>
             <a:endParaRPr lang="en-US" sz="1600" dirty="0"/>
           </a:p>
@@ -4450,7 +5175,7 @@
                 <a:ea typeface="Calibri" pitchFamily="34" charset="-122"/>
                 <a:cs typeface="Calibri" pitchFamily="34" charset="-120"/>
               </a:rPr>
-              <a:t>The Critic runs once: check passes → emit the Answer; check fails → the workflow just returns as-is, no correction</a:t>
+              <a:t>output_from=[critic] designates the Critic's response as the ONE workflow output — without it, all three executors' responses would count</a:t>
             </a:r>
             <a:endParaRPr lang="en-US" sz="1600" dirty="0"/>
           </a:p>
@@ -4471,7 +5196,7 @@
                 <a:ea typeface="Calibri" pitchFamily="34" charset="-122"/>
                 <a:cs typeface="Calibri" pitchFamily="34" charset="-120"/>
               </a:rPr>
-              <a:t>Run it against the golden set and watch it fail on the questions that need a second pass — this is the limitation, live, not a slide bullet</a:t>
+              <a:t>Run it once on a single question; visualize the graph with WorkflowViz(workflow).to_mermaid() (Module 3's own visualization tooling)</a:t>
             </a:r>
             <a:endParaRPr lang="en-US" sz="1600" dirty="0"/>
           </a:p>
@@ -4492,7 +5217,7 @@
                 <a:ea typeface="Calibri" pitchFamily="34" charset="-122"/>
                 <a:cs typeface="Calibri" pitchFamily="34" charset="-120"/>
               </a:rPr>
-              <a:t>Sets up Part B: the fix for what you just watched break</a:t>
+              <a:t>No golden set here — that's Part C's job. Part A is purely "how is a workflow actually built"</a:t>
             </a:r>
             <a:endParaRPr lang="en-US" sz="1600" dirty="0"/>
           </a:p>
@@ -4556,7 +5281,7 @@
                 <a:ea typeface="Calibri" pitchFamily="34" charset="-122"/>
                 <a:cs typeface="Calibri" pitchFamily="34" charset="-120"/>
               </a:rPr>
-              <a:t>Source: https://learn.microsoft.com/en-us/agent-framework/workflows/orchestrations/sequential</a:t>
+              <a:t>Source: https://learn.microsoft.com/en-us/agent-framework/concepts/workflows/executors</a:t>
             </a:r>
             <a:endParaRPr lang="en-US" sz="820" dirty="0"/>
           </a:p>
@@ -4690,7 +5415,7 @@
                 <a:ea typeface="Calibri" pitchFamily="34" charset="-122"/>
                 <a:cs typeface="Calibri" pitchFamily="34" charset="-120"/>
               </a:rPr>
-              <a:t>Part B — A custom graph fixes it</a:t>
+              <a:t>Part B — Orchestrations</a:t>
             </a:r>
             <a:endParaRPr lang="en-US" sz="2800" dirty="0"/>
           </a:p>
@@ -4705,7 +5430,7 @@
         <p:spPr>
           <a:xfrm>
             <a:off x="365760" y="1115568"/>
-            <a:ext cx="8412480" cy="1719072"/>
+            <a:ext cx="8412480" cy="2139696"/>
           </a:xfrm>
           <a:prstGeom prst="rect">
             <a:avLst/>
@@ -4730,7 +5455,7 @@
         <p:spPr>
           <a:xfrm>
             <a:off x="502920" y="1207008"/>
-            <a:ext cx="8138160" cy="1536192"/>
+            <a:ext cx="8138160" cy="1956816"/>
           </a:xfrm>
           <a:prstGeom prst="rect">
             <a:avLst/>
@@ -4748,15 +5473,15 @@
               <a:buNone/>
             </a:pPr>
             <a:r>
-              <a:rPr lang="en-US" sz="1280" dirty="0">
-                <a:solidFill>
-                  <a:srgbClr val="FFFFFF"/>
+              <a:rPr lang="en-US" sz="1280" i="1" dirty="0">
+                <a:solidFill>
+                  <a:srgbClr val="666666"/>
                 </a:solidFill>
                 <a:latin typeface="Consolas" pitchFamily="34" charset="0"/>
                 <a:ea typeface="Consolas" pitchFamily="34" charset="-122"/>
                 <a:cs typeface="Consolas" pitchFamily="34" charset="-120"/>
               </a:rPr>
-              <a:t>builder = WorkflowBuilder(start_executor=planner)</a:t>
+              <a:t># Construction #1 — the shortcut for Part A's graph</a:t>
             </a:r>
             <a:endParaRPr lang="en-US" sz="1280" dirty="0"/>
           </a:p>
@@ -4773,7 +5498,7 @@
                 <a:ea typeface="Consolas" pitchFamily="34" charset="-122"/>
                 <a:cs typeface="Consolas" pitchFamily="34" charset="-120"/>
               </a:rPr>
-              <a:t>builder.add_edge(planner, retriever)</a:t>
+              <a:t>SequentialBuilder(participants=[planner, retriever, critic]).build()</a:t>
             </a:r>
             <a:endParaRPr lang="en-US" sz="1280" dirty="0"/>
           </a:p>
@@ -4781,16 +5506,22 @@
             <a:pPr indent="0" marL="0">
               <a:buNone/>
             </a:pPr>
-            <a:r>
-              <a:rPr lang="en-US" sz="1280" dirty="0">
-                <a:solidFill>
-                  <a:srgbClr val="FFFFFF"/>
+            <a:endParaRPr lang="en-US" sz="1280" dirty="0"/>
+          </a:p>
+          <a:p>
+            <a:pPr indent="0" marL="0">
+              <a:buNone/>
+            </a:pPr>
+            <a:r>
+              <a:rPr lang="en-US" sz="1280" i="1" dirty="0">
+                <a:solidFill>
+                  <a:srgbClr val="666666"/>
                 </a:solidFill>
                 <a:latin typeface="Consolas" pitchFamily="34" charset="0"/>
                 <a:ea typeface="Consolas" pitchFamily="34" charset="-122"/>
                 <a:cs typeface="Consolas" pitchFamily="34" charset="-120"/>
               </a:rPr>
-              <a:t>builder.add_edge(retriever, critic)</a:t>
+              <a:t># Construction #2 — fixes its limitation</a:t>
             </a:r>
             <a:endParaRPr lang="en-US" sz="1280" dirty="0"/>
           </a:p>
@@ -4798,22 +5529,50 @@
             <a:pPr indent="0" marL="0">
               <a:buNone/>
             </a:pPr>
-            <a:endParaRPr lang="en-US" sz="1280" dirty="0"/>
-          </a:p>
-          <a:p>
-            <a:pPr indent="0" marL="0">
-              <a:buNone/>
-            </a:pPr>
-            <a:r>
-              <a:rPr lang="en-US" sz="1280" i="1" dirty="0">
-                <a:solidFill>
-                  <a:srgbClr val="666666"/>
+            <a:r>
+              <a:rPr lang="en-US" sz="1280" dirty="0">
+                <a:solidFill>
+                  <a:srgbClr val="FFFFFF"/>
                 </a:solidFill>
                 <a:latin typeface="Consolas" pitchFamily="34" charset="0"/>
                 <a:ea typeface="Consolas" pitchFamily="34" charset="-122"/>
                 <a:cs typeface="Consolas" pitchFamily="34" charset="-120"/>
               </a:rPr>
-              <a:t># The fix: route back to the planner when the critic isn't satisfied</a:t>
+              <a:t>builder = WorkflowBuilder(start_executor=planner)</a:t>
+            </a:r>
+            <a:endParaRPr lang="en-US" sz="1280" dirty="0"/>
+          </a:p>
+          <a:p>
+            <a:pPr indent="0" marL="0">
+              <a:buNone/>
+            </a:pPr>
+            <a:r>
+              <a:rPr lang="en-US" sz="1280" dirty="0">
+                <a:solidFill>
+                  <a:srgbClr val="FFFFFF"/>
+                </a:solidFill>
+                <a:latin typeface="Consolas" pitchFamily="34" charset="0"/>
+                <a:ea typeface="Consolas" pitchFamily="34" charset="-122"/>
+                <a:cs typeface="Consolas" pitchFamily="34" charset="-120"/>
+              </a:rPr>
+              <a:t>builder.add_edge(planner, retriever)</a:t>
+            </a:r>
+            <a:endParaRPr lang="en-US" sz="1280" dirty="0"/>
+          </a:p>
+          <a:p>
+            <a:pPr indent="0" marL="0">
+              <a:buNone/>
+            </a:pPr>
+            <a:r>
+              <a:rPr lang="en-US" sz="1280" dirty="0">
+                <a:solidFill>
+                  <a:srgbClr val="FFFFFF"/>
+                </a:solidFill>
+                <a:latin typeface="Consolas" pitchFamily="34" charset="0"/>
+                <a:ea typeface="Consolas" pitchFamily="34" charset="-122"/>
+                <a:cs typeface="Consolas" pitchFamily="34" charset="-120"/>
+              </a:rPr>
+              <a:t>builder.add_edge(retriever, critic)</a:t>
             </a:r>
             <a:endParaRPr lang="en-US" sz="1280" dirty="0"/>
           </a:p>
@@ -4930,7 +5689,7 @@
                 <a:ea typeface="Calibri" pitchFamily="34" charset="-122"/>
                 <a:cs typeface="Calibri" pitchFamily="34" charset="-120"/>
               </a:rPr>
-              <a:t>Rebuild Part A's three roles with WorkflowBuilder instead of SequentialBuilder — same roles, a genuinely different graph, not a small edit.</a:t>
+              <a:t>Same limitation as Part A: Sequential's Critic runs once, with nowhere to send a rejected verdict. Construction #2 fixes it with a conditional loop back to the Planner.</a:t>
             </a:r>
             <a:endParaRPr lang="en-US" sz="1300" dirty="0"/>
           </a:p>
@@ -4994,7 +5753,7 @@
                 <a:ea typeface="Calibri" pitchFamily="34" charset="-122"/>
                 <a:cs typeface="Calibri" pitchFamily="34" charset="-120"/>
               </a:rPr>
-              <a:t>Source: https://learn.microsoft.com/en-us/agent-framework/concepts/workflows/edges</a:t>
+              <a:t>Source: https://learn.microsoft.com/en-us/agent-framework/workflows/orchestrations/sequential  ·  +1 in notes</a:t>
             </a:r>
             <a:endParaRPr lang="en-US" sz="820" dirty="0"/>
           </a:p>
@@ -5120,7 +5879,7 @@
               <a:buNone/>
             </a:pPr>
             <a:r>
-              <a:rPr lang="en-US" sz="2500" b="1" dirty="0">
+              <a:rPr lang="en-US" sz="2800" b="1" dirty="0">
                 <a:solidFill>
                   <a:srgbClr val="1E2761"/>
                 </a:solidFill>
@@ -5128,22 +5887,149 @@
                 <a:ea typeface="Calibri" pitchFamily="34" charset="-122"/>
                 <a:cs typeface="Calibri" pitchFamily="34" charset="-120"/>
               </a:rPr>
-              <a:t>Part B's guardrail is required, not optional</a:t>
-            </a:r>
-            <a:endParaRPr lang="en-US" sz="2500" dirty="0"/>
-          </a:p>
-        </p:txBody>
-      </p:sp>
-      <p:sp>
-        <p:nvSpPr>
-          <p:cNvPr id="5" name="Text 3"/>
-          <p:cNvSpPr/>
-          <p:nvPr/>
-        </p:nvSpPr>
-        <p:spPr>
-          <a:xfrm>
-            <a:off x="502920" y="1170432"/>
-            <a:ext cx="7955280" cy="3520440"/>
+              <a:t>Part B — Group Chat, a second fix</a:t>
+            </a:r>
+            <a:endParaRPr lang="en-US" sz="2800" dirty="0"/>
+          </a:p>
+        </p:txBody>
+      </p:sp>
+      <p:sp>
+        <p:nvSpPr>
+          <p:cNvPr id="5" name="Shape 3"/>
+          <p:cNvSpPr/>
+          <p:nvPr/>
+        </p:nvSpPr>
+        <p:spPr>
+          <a:xfrm>
+            <a:off x="365760" y="1216152"/>
+            <a:ext cx="1911096" cy="2148840"/>
+          </a:xfrm>
+          <a:prstGeom prst="roundRect">
+            <a:avLst>
+              <a:gd name="adj" fmla="val 2871"/>
+            </a:avLst>
+          </a:prstGeom>
+          <a:solidFill>
+            <a:srgbClr val="CADCFC"/>
+          </a:solidFill>
+          <a:ln w="10160">
+            <a:solidFill>
+              <a:srgbClr val="1E2761"/>
+            </a:solidFill>
+            <a:prstDash val="solid"/>
+          </a:ln>
+        </p:spPr>
+      </p:sp>
+      <p:sp>
+        <p:nvSpPr>
+          <p:cNvPr id="6" name="Shape 4"/>
+          <p:cNvSpPr/>
+          <p:nvPr/>
+        </p:nvSpPr>
+        <p:spPr>
+          <a:xfrm>
+            <a:off x="475488" y="1335024"/>
+            <a:ext cx="320040" cy="320040"/>
+          </a:xfrm>
+          <a:prstGeom prst="ellipse">
+            <a:avLst/>
+          </a:prstGeom>
+          <a:solidFill>
+            <a:srgbClr val="1E2761"/>
+          </a:solidFill>
+          <a:ln/>
+        </p:spPr>
+      </p:sp>
+      <p:sp>
+        <p:nvSpPr>
+          <p:cNvPr id="7" name="Text 5"/>
+          <p:cNvSpPr/>
+          <p:nvPr/>
+        </p:nvSpPr>
+        <p:spPr>
+          <a:xfrm>
+            <a:off x="475488" y="1385316"/>
+            <a:ext cx="320040" cy="146304"/>
+          </a:xfrm>
+          <a:prstGeom prst="rect">
+            <a:avLst/>
+          </a:prstGeom>
+          <a:noFill/>
+          <a:ln/>
+        </p:spPr>
+        <p:txBody>
+          <a:bodyPr wrap="square" lIns="0" tIns="0" rIns="0" bIns="0" rtlCol="0" anchor="ctr"/>
+          <a:lstStyle/>
+          <a:p>
+            <a:pPr algn="ctr" indent="0" marL="0">
+              <a:buNone/>
+            </a:pPr>
+            <a:r>
+              <a:rPr lang="en-US" sz="900" b="1" dirty="0">
+                <a:solidFill>
+                  <a:srgbClr val="FFFFFF"/>
+                </a:solidFill>
+                <a:latin typeface="Calibri" pitchFamily="34" charset="0"/>
+                <a:ea typeface="Calibri" pitchFamily="34" charset="-122"/>
+                <a:cs typeface="Calibri" pitchFamily="34" charset="-120"/>
+              </a:rPr>
+              <a:t>1</a:t>
+            </a:r>
+            <a:endParaRPr lang="en-US" sz="900" dirty="0"/>
+          </a:p>
+        </p:txBody>
+      </p:sp>
+      <p:sp>
+        <p:nvSpPr>
+          <p:cNvPr id="8" name="Text 6"/>
+          <p:cNvSpPr/>
+          <p:nvPr/>
+        </p:nvSpPr>
+        <p:spPr>
+          <a:xfrm>
+            <a:off x="896112" y="1335024"/>
+            <a:ext cx="1252728" cy="310896"/>
+          </a:xfrm>
+          <a:prstGeom prst="rect">
+            <a:avLst/>
+          </a:prstGeom>
+          <a:noFill/>
+          <a:ln/>
+        </p:spPr>
+        <p:txBody>
+          <a:bodyPr wrap="square" lIns="0" tIns="0" rIns="0" bIns="0" rtlCol="0" anchor="ctr">
+            <a:normAutofit/>
+          </a:bodyPr>
+          <a:lstStyle/>
+          <a:p>
+            <a:pPr indent="0" marL="0">
+              <a:buNone/>
+            </a:pPr>
+            <a:r>
+              <a:rPr lang="en-US" sz="1500" b="1" dirty="0">
+                <a:solidFill>
+                  <a:srgbClr val="1E2761"/>
+                </a:solidFill>
+                <a:latin typeface="Calibri" pitchFamily="34" charset="0"/>
+                <a:ea typeface="Calibri" pitchFamily="34" charset="-122"/>
+                <a:cs typeface="Calibri" pitchFamily="34" charset="-120"/>
+              </a:rPr>
+              <a:t>Rebuild</a:t>
+            </a:r>
+            <a:endParaRPr lang="en-US" sz="1500" dirty="0"/>
+          </a:p>
+        </p:txBody>
+      </p:sp>
+      <p:sp>
+        <p:nvSpPr>
+          <p:cNvPr id="9" name="Text 7"/>
+          <p:cNvSpPr/>
+          <p:nvPr/>
+        </p:nvSpPr>
+        <p:spPr>
+          <a:xfrm>
+            <a:off x="512064" y="1719072"/>
+            <a:ext cx="1618488" cy="1527048"/>
           </a:xfrm>
           <a:prstGeom prst="rect">
             <a:avLst/>
@@ -5157,15 +6043,11 @@
           </a:bodyPr>
           <a:lstStyle/>
           <a:p>
-            <a:pPr marL="342900" indent="-342900">
-              <a:spcAft>
-                <a:spcPts val="1000"/>
-              </a:spcAft>
-              <a:buSzPct val="100000"/>
-              <a:buChar char="•"/>
-            </a:pPr>
-            <a:r>
-              <a:rPr lang="en-US" sz="1600" dirty="0">
+            <a:pPr indent="0" marL="0">
+              <a:buNone/>
+            </a:pPr>
+            <a:r>
+              <a:rPr lang="en-US" sz="1150" dirty="0">
                 <a:solidFill>
                   <a:srgbClr val="212121"/>
                 </a:solidFill>
@@ -5173,20 +6055,187 @@
                 <a:ea typeface="Calibri" pitchFamily="34" charset="-122"/>
                 <a:cs typeface="Calibri" pitchFamily="34" charset="-120"/>
               </a:rPr>
-              <a:t>A conditional edge has no built-in max_iterations — unlike AgentLoopMiddleware's single-agent loop, nothing stops this loop automatically</a:t>
-            </a:r>
-            <a:endParaRPr lang="en-US" sz="1600" dirty="0"/>
-          </a:p>
-          <a:p>
-            <a:pPr marL="342900" indent="-342900">
-              <a:spcAft>
-                <a:spcPts val="1000"/>
-              </a:spcAft>
-              <a:buSzPct val="100000"/>
-              <a:buChar char="•"/>
-            </a:pPr>
-            <a:r>
-              <a:rPr lang="en-US" sz="1600" dirty="0">
+              <a:t>same three roles as plain participants, now with GroupChatBuilder(participants=[...], orchestrator_agent=..., termination_condition=...)</a:t>
+            </a:r>
+            <a:endParaRPr lang="en-US" sz="1150" dirty="0"/>
+          </a:p>
+        </p:txBody>
+      </p:sp>
+      <p:sp>
+        <p:nvSpPr>
+          <p:cNvPr id="10" name="Shape 8"/>
+          <p:cNvSpPr/>
+          <p:nvPr/>
+        </p:nvSpPr>
+        <p:spPr>
+          <a:xfrm>
+            <a:off x="2313432" y="2180844"/>
+            <a:ext cx="164592" cy="219456"/>
+          </a:xfrm>
+          <a:prstGeom prst="chevron">
+            <a:avLst/>
+          </a:prstGeom>
+          <a:solidFill>
+            <a:srgbClr val="E8A87C"/>
+          </a:solidFill>
+          <a:ln/>
+        </p:spPr>
+      </p:sp>
+      <p:sp>
+        <p:nvSpPr>
+          <p:cNvPr id="11" name="Shape 9"/>
+          <p:cNvSpPr/>
+          <p:nvPr/>
+        </p:nvSpPr>
+        <p:spPr>
+          <a:xfrm>
+            <a:off x="2532888" y="1216152"/>
+            <a:ext cx="1911096" cy="2148840"/>
+          </a:xfrm>
+          <a:prstGeom prst="roundRect">
+            <a:avLst>
+              <a:gd name="adj" fmla="val 2871"/>
+            </a:avLst>
+          </a:prstGeom>
+          <a:solidFill>
+            <a:srgbClr val="F3F4F6"/>
+          </a:solidFill>
+          <a:ln w="10160">
+            <a:solidFill>
+              <a:srgbClr val="D1D5DB"/>
+            </a:solidFill>
+            <a:prstDash val="solid"/>
+          </a:ln>
+        </p:spPr>
+      </p:sp>
+      <p:sp>
+        <p:nvSpPr>
+          <p:cNvPr id="12" name="Shape 10"/>
+          <p:cNvSpPr/>
+          <p:nvPr/>
+        </p:nvSpPr>
+        <p:spPr>
+          <a:xfrm>
+            <a:off x="2642616" y="1335024"/>
+            <a:ext cx="320040" cy="320040"/>
+          </a:xfrm>
+          <a:prstGeom prst="ellipse">
+            <a:avLst/>
+          </a:prstGeom>
+          <a:solidFill>
+            <a:srgbClr val="1E2761"/>
+          </a:solidFill>
+          <a:ln/>
+        </p:spPr>
+      </p:sp>
+      <p:sp>
+        <p:nvSpPr>
+          <p:cNvPr id="13" name="Text 11"/>
+          <p:cNvSpPr/>
+          <p:nvPr/>
+        </p:nvSpPr>
+        <p:spPr>
+          <a:xfrm>
+            <a:off x="2642616" y="1385316"/>
+            <a:ext cx="320040" cy="146304"/>
+          </a:xfrm>
+          <a:prstGeom prst="rect">
+            <a:avLst/>
+          </a:prstGeom>
+          <a:noFill/>
+          <a:ln/>
+        </p:spPr>
+        <p:txBody>
+          <a:bodyPr wrap="square" lIns="0" tIns="0" rIns="0" bIns="0" rtlCol="0" anchor="ctr"/>
+          <a:lstStyle/>
+          <a:p>
+            <a:pPr algn="ctr" indent="0" marL="0">
+              <a:buNone/>
+            </a:pPr>
+            <a:r>
+              <a:rPr lang="en-US" sz="900" b="1" dirty="0">
+                <a:solidFill>
+                  <a:srgbClr val="FFFFFF"/>
+                </a:solidFill>
+                <a:latin typeface="Calibri" pitchFamily="34" charset="0"/>
+                <a:ea typeface="Calibri" pitchFamily="34" charset="-122"/>
+                <a:cs typeface="Calibri" pitchFamily="34" charset="-120"/>
+              </a:rPr>
+              <a:t>2</a:t>
+            </a:r>
+            <a:endParaRPr lang="en-US" sz="900" dirty="0"/>
+          </a:p>
+        </p:txBody>
+      </p:sp>
+      <p:sp>
+        <p:nvSpPr>
+          <p:cNvPr id="14" name="Text 12"/>
+          <p:cNvSpPr/>
+          <p:nvPr/>
+        </p:nvSpPr>
+        <p:spPr>
+          <a:xfrm>
+            <a:off x="3063240" y="1335024"/>
+            <a:ext cx="1252728" cy="310896"/>
+          </a:xfrm>
+          <a:prstGeom prst="rect">
+            <a:avLst/>
+          </a:prstGeom>
+          <a:noFill/>
+          <a:ln/>
+        </p:spPr>
+        <p:txBody>
+          <a:bodyPr wrap="square" lIns="0" tIns="0" rIns="0" bIns="0" rtlCol="0" anchor="ctr">
+            <a:normAutofit/>
+          </a:bodyPr>
+          <a:lstStyle/>
+          <a:p>
+            <a:pPr indent="0" marL="0">
+              <a:buNone/>
+            </a:pPr>
+            <a:r>
+              <a:rPr lang="en-US" sz="1500" b="1" dirty="0">
+                <a:solidFill>
+                  <a:srgbClr val="1E2761"/>
+                </a:solidFill>
+                <a:latin typeface="Calibri" pitchFamily="34" charset="0"/>
+                <a:ea typeface="Calibri" pitchFamily="34" charset="-122"/>
+                <a:cs typeface="Calibri" pitchFamily="34" charset="-120"/>
+              </a:rPr>
+              <a:t>Orchestrator decides, not Python</a:t>
+            </a:r>
+            <a:endParaRPr lang="en-US" sz="1500" dirty="0"/>
+          </a:p>
+        </p:txBody>
+      </p:sp>
+      <p:sp>
+        <p:nvSpPr>
+          <p:cNvPr id="15" name="Text 13"/>
+          <p:cNvSpPr/>
+          <p:nvPr/>
+        </p:nvSpPr>
+        <p:spPr>
+          <a:xfrm>
+            <a:off x="2679192" y="1719072"/>
+            <a:ext cx="1618488" cy="1527048"/>
+          </a:xfrm>
+          <a:prstGeom prst="rect">
+            <a:avLst/>
+          </a:prstGeom>
+          <a:noFill/>
+          <a:ln/>
+        </p:spPr>
+        <p:txBody>
+          <a:bodyPr wrap="square" lIns="0" tIns="0" rIns="0" bIns="0" rtlCol="0" anchor="t">
+            <a:normAutofit/>
+          </a:bodyPr>
+          <a:lstStyle/>
+          <a:p>
+            <a:pPr indent="0" marL="0">
+              <a:buNone/>
+            </a:pPr>
+            <a:r>
+              <a:rPr lang="en-US" sz="1150" dirty="0">
                 <a:solidFill>
                   <a:srgbClr val="212121"/>
                 </a:solidFill>
@@ -5194,20 +6243,187 @@
                 <a:ea typeface="Calibri" pitchFamily="34" charset="-122"/>
                 <a:cs typeface="Calibri" pitchFamily="34" charset="-120"/>
               </a:rPr>
-              <a:t>Add your own counter in workflow state (ctx.set_state/get_state), checked inside the condition function</a:t>
-            </a:r>
-            <a:endParaRPr lang="en-US" sz="1600" dirty="0"/>
-          </a:p>
-          <a:p>
-            <a:pPr marL="342900" indent="-342900">
-              <a:spcAft>
-                <a:spcPts val="1000"/>
-              </a:spcAft>
-              <a:buSzPct val="100000"/>
-              <a:buChar char="•"/>
-            </a:pPr>
-            <a:r>
-              <a:rPr lang="en-US" sz="1600" dirty="0">
+              <a:t>an LLM agent reads the shared conversation and picks who speaks next; no condition function to write</a:t>
+            </a:r>
+            <a:endParaRPr lang="en-US" sz="1150" dirty="0"/>
+          </a:p>
+        </p:txBody>
+      </p:sp>
+      <p:sp>
+        <p:nvSpPr>
+          <p:cNvPr id="16" name="Shape 14"/>
+          <p:cNvSpPr/>
+          <p:nvPr/>
+        </p:nvSpPr>
+        <p:spPr>
+          <a:xfrm>
+            <a:off x="4480560" y="2180844"/>
+            <a:ext cx="164592" cy="219456"/>
+          </a:xfrm>
+          <a:prstGeom prst="chevron">
+            <a:avLst/>
+          </a:prstGeom>
+          <a:solidFill>
+            <a:srgbClr val="E8A87C"/>
+          </a:solidFill>
+          <a:ln/>
+        </p:spPr>
+      </p:sp>
+      <p:sp>
+        <p:nvSpPr>
+          <p:cNvPr id="17" name="Shape 15"/>
+          <p:cNvSpPr/>
+          <p:nvPr/>
+        </p:nvSpPr>
+        <p:spPr>
+          <a:xfrm>
+            <a:off x="4700016" y="1216152"/>
+            <a:ext cx="1911096" cy="2148840"/>
+          </a:xfrm>
+          <a:prstGeom prst="roundRect">
+            <a:avLst>
+              <a:gd name="adj" fmla="val 2871"/>
+            </a:avLst>
+          </a:prstGeom>
+          <a:solidFill>
+            <a:srgbClr val="F3F4F6"/>
+          </a:solidFill>
+          <a:ln w="10160">
+            <a:solidFill>
+              <a:srgbClr val="D1D5DB"/>
+            </a:solidFill>
+            <a:prstDash val="solid"/>
+          </a:ln>
+        </p:spPr>
+      </p:sp>
+      <p:sp>
+        <p:nvSpPr>
+          <p:cNvPr id="18" name="Shape 16"/>
+          <p:cNvSpPr/>
+          <p:nvPr/>
+        </p:nvSpPr>
+        <p:spPr>
+          <a:xfrm>
+            <a:off x="4809744" y="1335024"/>
+            <a:ext cx="320040" cy="320040"/>
+          </a:xfrm>
+          <a:prstGeom prst="ellipse">
+            <a:avLst/>
+          </a:prstGeom>
+          <a:solidFill>
+            <a:srgbClr val="1E2761"/>
+          </a:solidFill>
+          <a:ln/>
+        </p:spPr>
+      </p:sp>
+      <p:sp>
+        <p:nvSpPr>
+          <p:cNvPr id="19" name="Text 17"/>
+          <p:cNvSpPr/>
+          <p:nvPr/>
+        </p:nvSpPr>
+        <p:spPr>
+          <a:xfrm>
+            <a:off x="4809744" y="1385316"/>
+            <a:ext cx="320040" cy="146304"/>
+          </a:xfrm>
+          <a:prstGeom prst="rect">
+            <a:avLst/>
+          </a:prstGeom>
+          <a:noFill/>
+          <a:ln/>
+        </p:spPr>
+        <p:txBody>
+          <a:bodyPr wrap="square" lIns="0" tIns="0" rIns="0" bIns="0" rtlCol="0" anchor="ctr"/>
+          <a:lstStyle/>
+          <a:p>
+            <a:pPr algn="ctr" indent="0" marL="0">
+              <a:buNone/>
+            </a:pPr>
+            <a:r>
+              <a:rPr lang="en-US" sz="900" b="1" dirty="0">
+                <a:solidFill>
+                  <a:srgbClr val="FFFFFF"/>
+                </a:solidFill>
+                <a:latin typeface="Calibri" pitchFamily="34" charset="0"/>
+                <a:ea typeface="Calibri" pitchFamily="34" charset="-122"/>
+                <a:cs typeface="Calibri" pitchFamily="34" charset="-120"/>
+              </a:rPr>
+              <a:t>3</a:t>
+            </a:r>
+            <a:endParaRPr lang="en-US" sz="900" dirty="0"/>
+          </a:p>
+        </p:txBody>
+      </p:sp>
+      <p:sp>
+        <p:nvSpPr>
+          <p:cNvPr id="20" name="Text 18"/>
+          <p:cNvSpPr/>
+          <p:nvPr/>
+        </p:nvSpPr>
+        <p:spPr>
+          <a:xfrm>
+            <a:off x="5230368" y="1335024"/>
+            <a:ext cx="1252728" cy="310896"/>
+          </a:xfrm>
+          <a:prstGeom prst="rect">
+            <a:avLst/>
+          </a:prstGeom>
+          <a:noFill/>
+          <a:ln/>
+        </p:spPr>
+        <p:txBody>
+          <a:bodyPr wrap="square" lIns="0" tIns="0" rIns="0" bIns="0" rtlCol="0" anchor="ctr">
+            <a:normAutofit/>
+          </a:bodyPr>
+          <a:lstStyle/>
+          <a:p>
+            <a:pPr indent="0" marL="0">
+              <a:buNone/>
+            </a:pPr>
+            <a:r>
+              <a:rPr lang="en-US" sz="1500" b="1" dirty="0">
+                <a:solidFill>
+                  <a:srgbClr val="1E2761"/>
+                </a:solidFill>
+                <a:latin typeface="Calibri" pitchFamily="34" charset="0"/>
+                <a:ea typeface="Calibri" pitchFamily="34" charset="-122"/>
+                <a:cs typeface="Calibri" pitchFamily="34" charset="-120"/>
+              </a:rPr>
+              <a:t>Context Synchronization does the work revision_gate had to do manually</a:t>
+            </a:r>
+            <a:endParaRPr lang="en-US" sz="1500" dirty="0"/>
+          </a:p>
+        </p:txBody>
+      </p:sp>
+      <p:sp>
+        <p:nvSpPr>
+          <p:cNvPr id="21" name="Text 19"/>
+          <p:cNvSpPr/>
+          <p:nvPr/>
+        </p:nvSpPr>
+        <p:spPr>
+          <a:xfrm>
+            <a:off x="4846320" y="1719072"/>
+            <a:ext cx="1618488" cy="1527048"/>
+          </a:xfrm>
+          <a:prstGeom prst="rect">
+            <a:avLst/>
+          </a:prstGeom>
+          <a:noFill/>
+          <a:ln/>
+        </p:spPr>
+        <p:txBody>
+          <a:bodyPr wrap="square" lIns="0" tIns="0" rIns="0" bIns="0" rtlCol="0" anchor="t">
+            <a:normAutofit/>
+          </a:bodyPr>
+          <a:lstStyle/>
+          <a:p>
+            <a:pPr indent="0" marL="0">
+              <a:buNone/>
+            </a:pPr>
+            <a:r>
+              <a:rPr lang="en-US" sz="1150" dirty="0">
                 <a:solidFill>
                   <a:srgbClr val="212121"/>
                 </a:solidFill>
@@ -5215,20 +6431,187 @@
                 <a:ea typeface="Calibri" pitchFamily="34" charset="-122"/>
                 <a:cs typeface="Calibri" pitchFamily="34" charset="-120"/>
               </a:rPr>
-              <a:t>Prove the workflow fails safely under it — a bounded, graceful stop, not an unbounded token burn</a:t>
-            </a:r>
-            <a:endParaRPr lang="en-US" sz="1600" dirty="0"/>
-          </a:p>
-          <a:p>
-            <a:pPr marL="342900" indent="-342900">
-              <a:spcAft>
-                <a:spcPts val="1000"/>
-              </a:spcAft>
-              <a:buSzPct val="100000"/>
-              <a:buChar char="•"/>
-            </a:pPr>
-            <a:r>
-              <a:rPr lang="en-US" sz="1600" dirty="0">
+              <a:t>the Planner already sees the Critic's rejection when re-selected, because the conversation is shared</a:t>
+            </a:r>
+            <a:endParaRPr lang="en-US" sz="1150" dirty="0"/>
+          </a:p>
+        </p:txBody>
+      </p:sp>
+      <p:sp>
+        <p:nvSpPr>
+          <p:cNvPr id="22" name="Shape 20"/>
+          <p:cNvSpPr/>
+          <p:nvPr/>
+        </p:nvSpPr>
+        <p:spPr>
+          <a:xfrm>
+            <a:off x="6647688" y="2180844"/>
+            <a:ext cx="164592" cy="219456"/>
+          </a:xfrm>
+          <a:prstGeom prst="chevron">
+            <a:avLst/>
+          </a:prstGeom>
+          <a:solidFill>
+            <a:srgbClr val="E8A87C"/>
+          </a:solidFill>
+          <a:ln/>
+        </p:spPr>
+      </p:sp>
+      <p:sp>
+        <p:nvSpPr>
+          <p:cNvPr id="23" name="Shape 21"/>
+          <p:cNvSpPr/>
+          <p:nvPr/>
+        </p:nvSpPr>
+        <p:spPr>
+          <a:xfrm>
+            <a:off x="6867144" y="1216152"/>
+            <a:ext cx="1911096" cy="2148840"/>
+          </a:xfrm>
+          <a:prstGeom prst="roundRect">
+            <a:avLst>
+              <a:gd name="adj" fmla="val 2871"/>
+            </a:avLst>
+          </a:prstGeom>
+          <a:solidFill>
+            <a:srgbClr val="CADCFC"/>
+          </a:solidFill>
+          <a:ln w="10160">
+            <a:solidFill>
+              <a:srgbClr val="1E2761"/>
+            </a:solidFill>
+            <a:prstDash val="solid"/>
+          </a:ln>
+        </p:spPr>
+      </p:sp>
+      <p:sp>
+        <p:nvSpPr>
+          <p:cNvPr id="24" name="Shape 22"/>
+          <p:cNvSpPr/>
+          <p:nvPr/>
+        </p:nvSpPr>
+        <p:spPr>
+          <a:xfrm>
+            <a:off x="6976872" y="1335024"/>
+            <a:ext cx="320040" cy="320040"/>
+          </a:xfrm>
+          <a:prstGeom prst="ellipse">
+            <a:avLst/>
+          </a:prstGeom>
+          <a:solidFill>
+            <a:srgbClr val="1E2761"/>
+          </a:solidFill>
+          <a:ln/>
+        </p:spPr>
+      </p:sp>
+      <p:sp>
+        <p:nvSpPr>
+          <p:cNvPr id="25" name="Text 23"/>
+          <p:cNvSpPr/>
+          <p:nvPr/>
+        </p:nvSpPr>
+        <p:spPr>
+          <a:xfrm>
+            <a:off x="6976872" y="1385316"/>
+            <a:ext cx="320040" cy="146304"/>
+          </a:xfrm>
+          <a:prstGeom prst="rect">
+            <a:avLst/>
+          </a:prstGeom>
+          <a:noFill/>
+          <a:ln/>
+        </p:spPr>
+        <p:txBody>
+          <a:bodyPr wrap="square" lIns="0" tIns="0" rIns="0" bIns="0" rtlCol="0" anchor="ctr"/>
+          <a:lstStyle/>
+          <a:p>
+            <a:pPr algn="ctr" indent="0" marL="0">
+              <a:buNone/>
+            </a:pPr>
+            <a:r>
+              <a:rPr lang="en-US" sz="900" b="1" dirty="0">
+                <a:solidFill>
+                  <a:srgbClr val="FFFFFF"/>
+                </a:solidFill>
+                <a:latin typeface="Calibri" pitchFamily="34" charset="0"/>
+                <a:ea typeface="Calibri" pitchFamily="34" charset="-122"/>
+                <a:cs typeface="Calibri" pitchFamily="34" charset="-120"/>
+              </a:rPr>
+              <a:t>4</a:t>
+            </a:r>
+            <a:endParaRPr lang="en-US" sz="900" dirty="0"/>
+          </a:p>
+        </p:txBody>
+      </p:sp>
+      <p:sp>
+        <p:nvSpPr>
+          <p:cNvPr id="26" name="Text 24"/>
+          <p:cNvSpPr/>
+          <p:nvPr/>
+        </p:nvSpPr>
+        <p:spPr>
+          <a:xfrm>
+            <a:off x="7397496" y="1335024"/>
+            <a:ext cx="1252728" cy="310896"/>
+          </a:xfrm>
+          <a:prstGeom prst="rect">
+            <a:avLst/>
+          </a:prstGeom>
+          <a:noFill/>
+          <a:ln/>
+        </p:spPr>
+        <p:txBody>
+          <a:bodyPr wrap="square" lIns="0" tIns="0" rIns="0" bIns="0" rtlCol="0" anchor="ctr">
+            <a:normAutofit/>
+          </a:bodyPr>
+          <a:lstStyle/>
+          <a:p>
+            <a:pPr indent="0" marL="0">
+              <a:buNone/>
+            </a:pPr>
+            <a:r>
+              <a:rPr lang="en-US" sz="1500" b="1" dirty="0">
+                <a:solidFill>
+                  <a:srgbClr val="1E2761"/>
+                </a:solidFill>
+                <a:latin typeface="Calibri" pitchFamily="34" charset="0"/>
+                <a:ea typeface="Calibri" pitchFamily="34" charset="-122"/>
+                <a:cs typeface="Calibri" pitchFamily="34" charset="-120"/>
+              </a:rPr>
+              <a:t>The guardrail lives in termination_condition</a:t>
+            </a:r>
+            <a:endParaRPr lang="en-US" sz="1500" dirty="0"/>
+          </a:p>
+        </p:txBody>
+      </p:sp>
+      <p:sp>
+        <p:nvSpPr>
+          <p:cNvPr id="27" name="Text 25"/>
+          <p:cNvSpPr/>
+          <p:nvPr/>
+        </p:nvSpPr>
+        <p:spPr>
+          <a:xfrm>
+            <a:off x="7013448" y="1719072"/>
+            <a:ext cx="1618488" cy="1527048"/>
+          </a:xfrm>
+          <a:prstGeom prst="rect">
+            <a:avLst/>
+          </a:prstGeom>
+          <a:noFill/>
+          <a:ln/>
+        </p:spPr>
+        <p:txBody>
+          <a:bodyPr wrap="square" lIns="0" tIns="0" rIns="0" bIns="0" rtlCol="0" anchor="t">
+            <a:normAutofit/>
+          </a:bodyPr>
+          <a:lstStyle/>
+          <a:p>
+            <a:pPr indent="0" marL="0">
+              <a:buNone/>
+            </a:pPr>
+            <a:r>
+              <a:rPr lang="en-US" sz="1150" dirty="0">
                 <a:solidFill>
                   <a:srgbClr val="212121"/>
                 </a:solidFill>
@@ -5236,15 +6619,15 @@
                 <a:ea typeface="Calibri" pitchFamily="34" charset="-122"/>
                 <a:cs typeface="Calibri" pitchFamily="34" charset="-120"/>
               </a:rPr>
-              <a:t>This is Module 6's advice, applied directly to the one loop this lab can actually trigger</a:t>
-            </a:r>
-            <a:endParaRPr lang="en-US" sz="1600" dirty="0"/>
-          </a:p>
-        </p:txBody>
-      </p:sp>
-      <p:sp>
-        <p:nvSpPr>
-          <p:cNvPr id="6" name="Shape 4"/>
+              <a:t>GroupChatBuilder gives you exactly one hook to control termination, not a graph of edges to route through</a:t>
+            </a:r>
+            <a:endParaRPr lang="en-US" sz="1150" dirty="0"/>
+          </a:p>
+        </p:txBody>
+      </p:sp>
+      <p:sp>
+        <p:nvSpPr>
+          <p:cNvPr id="28" name="Shape 26"/>
           <p:cNvSpPr/>
           <p:nvPr/>
         </p:nvSpPr>
@@ -5267,7 +6650,7 @@
       </p:sp>
       <p:sp>
         <p:nvSpPr>
-          <p:cNvPr id="7" name="Text 5"/>
+          <p:cNvPr id="29" name="Text 27"/>
           <p:cNvSpPr/>
           <p:nvPr/>
         </p:nvSpPr>
@@ -5300,7 +6683,7 @@
                 <a:ea typeface="Calibri" pitchFamily="34" charset="-122"/>
                 <a:cs typeface="Calibri" pitchFamily="34" charset="-120"/>
               </a:rPr>
-              <a:t>Source: https://learn.microsoft.com/en-us/agent-framework/agents/looping</a:t>
+              <a:t>Source: https://learn.microsoft.com/en-us/agent-framework/workflows/orchestrations/group-chat</a:t>
             </a:r>
             <a:endParaRPr lang="en-US" sz="820" dirty="0"/>
           </a:p>
@@ -5426,7 +6809,7 @@
               <a:buNone/>
             </a:pPr>
             <a:r>
-              <a:rPr lang="en-US" sz="2800" b="1" dirty="0">
+              <a:rPr lang="en-US" sz="2300" b="1" dirty="0">
                 <a:solidFill>
                   <a:srgbClr val="1E2761"/>
                 </a:solidFill>
@@ -5434,149 +6817,22 @@
                 <a:ea typeface="Calibri" pitchFamily="34" charset="-122"/>
                 <a:cs typeface="Calibri" pitchFamily="34" charset="-120"/>
               </a:rPr>
-              <a:t>Part C — Swap to Group Chat</a:t>
-            </a:r>
-            <a:endParaRPr lang="en-US" sz="2800" dirty="0"/>
-          </a:p>
-        </p:txBody>
-      </p:sp>
-      <p:sp>
-        <p:nvSpPr>
-          <p:cNvPr id="5" name="Shape 3"/>
-          <p:cNvSpPr/>
-          <p:nvPr/>
-        </p:nvSpPr>
-        <p:spPr>
-          <a:xfrm>
-            <a:off x="365760" y="1216152"/>
-            <a:ext cx="2633472" cy="1572768"/>
-          </a:xfrm>
-          <a:prstGeom prst="roundRect">
-            <a:avLst>
-              <a:gd name="adj" fmla="val 3488"/>
-            </a:avLst>
-          </a:prstGeom>
-          <a:solidFill>
-            <a:srgbClr val="CADCFC"/>
-          </a:solidFill>
-          <a:ln w="10160">
-            <a:solidFill>
-              <a:srgbClr val="1E2761"/>
-            </a:solidFill>
-            <a:prstDash val="solid"/>
-          </a:ln>
-        </p:spPr>
-      </p:sp>
-      <p:sp>
-        <p:nvSpPr>
-          <p:cNvPr id="6" name="Shape 4"/>
-          <p:cNvSpPr/>
-          <p:nvPr/>
-        </p:nvSpPr>
-        <p:spPr>
-          <a:xfrm>
-            <a:off x="475488" y="1335024"/>
-            <a:ext cx="320040" cy="320040"/>
-          </a:xfrm>
-          <a:prstGeom prst="ellipse">
-            <a:avLst/>
-          </a:prstGeom>
-          <a:solidFill>
-            <a:srgbClr val="1E2761"/>
-          </a:solidFill>
-          <a:ln/>
-        </p:spPr>
-      </p:sp>
-      <p:sp>
-        <p:nvSpPr>
-          <p:cNvPr id="7" name="Text 5"/>
-          <p:cNvSpPr/>
-          <p:nvPr/>
-        </p:nvSpPr>
-        <p:spPr>
-          <a:xfrm>
-            <a:off x="475488" y="1385316"/>
-            <a:ext cx="320040" cy="146304"/>
-          </a:xfrm>
-          <a:prstGeom prst="rect">
-            <a:avLst/>
-          </a:prstGeom>
-          <a:noFill/>
-          <a:ln/>
-        </p:spPr>
-        <p:txBody>
-          <a:bodyPr wrap="square" lIns="0" tIns="0" rIns="0" bIns="0" rtlCol="0" anchor="ctr"/>
-          <a:lstStyle/>
-          <a:p>
-            <a:pPr algn="ctr" indent="0" marL="0">
-              <a:buNone/>
-            </a:pPr>
-            <a:r>
-              <a:rPr lang="en-US" sz="900" b="1" dirty="0">
-                <a:solidFill>
-                  <a:srgbClr val="FFFFFF"/>
-                </a:solidFill>
-                <a:latin typeface="Calibri" pitchFamily="34" charset="0"/>
-                <a:ea typeface="Calibri" pitchFamily="34" charset="-122"/>
-                <a:cs typeface="Calibri" pitchFamily="34" charset="-120"/>
-              </a:rPr>
-              <a:t>1</a:t>
-            </a:r>
-            <a:endParaRPr lang="en-US" sz="900" dirty="0"/>
-          </a:p>
-        </p:txBody>
-      </p:sp>
-      <p:sp>
-        <p:nvSpPr>
-          <p:cNvPr id="8" name="Text 6"/>
-          <p:cNvSpPr/>
-          <p:nvPr/>
-        </p:nvSpPr>
-        <p:spPr>
-          <a:xfrm>
-            <a:off x="896112" y="1335024"/>
-            <a:ext cx="1975104" cy="310896"/>
-          </a:xfrm>
-          <a:prstGeom prst="rect">
-            <a:avLst/>
-          </a:prstGeom>
-          <a:noFill/>
-          <a:ln/>
-        </p:spPr>
-        <p:txBody>
-          <a:bodyPr wrap="square" lIns="0" tIns="0" rIns="0" bIns="0" rtlCol="0" anchor="ctr">
-            <a:normAutofit/>
-          </a:bodyPr>
-          <a:lstStyle/>
-          <a:p>
-            <a:pPr indent="0" marL="0">
-              <a:buNone/>
-            </a:pPr>
-            <a:r>
-              <a:rPr lang="en-US" sz="1500" b="1" dirty="0">
-                <a:solidFill>
-                  <a:srgbClr val="1E2761"/>
-                </a:solidFill>
-                <a:latin typeface="Calibri" pitchFamily="34" charset="0"/>
-                <a:ea typeface="Calibri" pitchFamily="34" charset="-122"/>
-                <a:cs typeface="Calibri" pitchFamily="34" charset="-120"/>
-              </a:rPr>
-              <a:t>Rebuild</a:t>
-            </a:r>
-            <a:endParaRPr lang="en-US" sz="1500" dirty="0"/>
-          </a:p>
-        </p:txBody>
-      </p:sp>
-      <p:sp>
-        <p:nvSpPr>
-          <p:cNvPr id="9" name="Text 7"/>
-          <p:cNvSpPr/>
-          <p:nvPr/>
-        </p:nvSpPr>
-        <p:spPr>
-          <a:xfrm>
-            <a:off x="512064" y="1719072"/>
-            <a:ext cx="2340864" cy="950976"/>
+              <a:t>Part B's guardrail is required for both fixes</a:t>
+            </a:r>
+            <a:endParaRPr lang="en-US" sz="2300" dirty="0"/>
+          </a:p>
+        </p:txBody>
+      </p:sp>
+      <p:sp>
+        <p:nvSpPr>
+          <p:cNvPr id="5" name="Text 3"/>
+          <p:cNvSpPr/>
+          <p:nvPr/>
+        </p:nvSpPr>
+        <p:spPr>
+          <a:xfrm>
+            <a:off x="502920" y="1170432"/>
+            <a:ext cx="7955280" cy="3520440"/>
           </a:xfrm>
           <a:prstGeom prst="rect">
             <a:avLst/>
@@ -5590,11 +6846,95 @@
           </a:bodyPr>
           <a:lstStyle/>
           <a:p>
+            <a:pPr marL="342900" indent="-342900">
+              <a:spcAft>
+                <a:spcPts val="1000"/>
+              </a:spcAft>
+              <a:buSzPct val="100000"/>
+              <a:buChar char="•"/>
+            </a:pPr>
+            <a:r>
+              <a:rPr lang="en-US" sz="1600" dirty="0">
+                <a:solidFill>
+                  <a:srgbClr val="212121"/>
+                </a:solidFill>
+                <a:latin typeface="Calibri" pitchFamily="34" charset="0"/>
+                <a:ea typeface="Calibri" pitchFamily="34" charset="-122"/>
+                <a:cs typeface="Calibri" pitchFamily="34" charset="-120"/>
+              </a:rPr>
+              <a:t>Neither a conditional edge nor an LLM orchestrator has a built-in max_iterations — unlike AgentLoopMiddleware's single-agent loop, nothing stops either loop automatically</a:t>
+            </a:r>
+            <a:endParaRPr lang="en-US" sz="1600" dirty="0"/>
+          </a:p>
+          <a:p>
+            <a:pPr marL="342900" indent="-342900">
+              <a:spcAft>
+                <a:spcPts val="1000"/>
+              </a:spcAft>
+              <a:buSzPct val="100000"/>
+              <a:buChar char="•"/>
+            </a:pPr>
+            <a:r>
+              <a:rPr lang="en-US" sz="1600" dirty="0">
+                <a:solidFill>
+                  <a:srgbClr val="212121"/>
+                </a:solidFill>
+                <a:latin typeface="Calibri" pitchFamily="34" charset="0"/>
+                <a:ea typeface="Calibri" pitchFamily="34" charset="-122"/>
+                <a:cs typeface="Calibri" pitchFamily="34" charset="-120"/>
+              </a:rPr>
+              <a:t>Construction #2: a counter in workflow state (ctx.set_state/get_state), checked by a small executor since condition functions never get ctx</a:t>
+            </a:r>
+            <a:endParaRPr lang="en-US" sz="1600" dirty="0"/>
+          </a:p>
+          <a:p>
+            <a:pPr marL="342900" indent="-342900">
+              <a:spcAft>
+                <a:spcPts val="1000"/>
+              </a:spcAft>
+              <a:buSzPct val="100000"/>
+              <a:buChar char="•"/>
+            </a:pPr>
+            <a:r>
+              <a:rPr lang="en-US" sz="1600" dirty="0">
+                <a:solidFill>
+                  <a:srgbClr val="212121"/>
+                </a:solidFill>
+                <a:latin typeface="Calibri" pitchFamily="34" charset="0"/>
+                <a:ea typeface="Calibri" pitchFamily="34" charset="-122"/>
+                <a:cs typeface="Calibri" pitchFamily="34" charset="-120"/>
+              </a:rPr>
+              <a:t>Construction #3: termination_condition itself is the guardrail — a message-count cap alongside the "Critic approved" check, in one function</a:t>
+            </a:r>
+            <a:endParaRPr lang="en-US" sz="1600" dirty="0"/>
+          </a:p>
+          <a:p>
+            <a:pPr marL="342900" indent="-342900">
+              <a:spcAft>
+                <a:spcPts val="1000"/>
+              </a:spcAft>
+              <a:buSzPct val="100000"/>
+              <a:buChar char="•"/>
+            </a:pPr>
+            <a:r>
+              <a:rPr lang="en-US" sz="1600" b="1" dirty="0">
+                <a:solidFill>
+                  <a:srgbClr val="1E2761"/>
+                </a:solidFill>
+                <a:latin typeface="Calibri" pitchFamily="34" charset="0"/>
+                <a:ea typeface="Calibri" pitchFamily="34" charset="-122"/>
+                <a:cs typeface="Calibri" pitchFamily="34" charset="-120"/>
+              </a:rPr>
+              <a:t>Prove both fail safely</a:t>
+            </a:r>
             <a:pPr indent="0" marL="0">
-              <a:buNone/>
-            </a:pPr>
-            <a:r>
-              <a:rPr lang="en-US" sz="1150" dirty="0">
+              <a:spcAft>
+                <a:spcPts val="1000"/>
+              </a:spcAft>
+              <a:buNone/>
+            </a:pPr>
+            <a:r>
+              <a:rPr lang="en-US" sz="1600" dirty="0">
                 <a:solidFill>
                   <a:srgbClr val="212121"/>
                 </a:solidFill>
@@ -5602,747 +6942,15 @@
                 <a:ea typeface="Calibri" pitchFamily="34" charset="-122"/>
                 <a:cs typeface="Calibri" pitchFamily="34" charset="-120"/>
               </a:rPr>
-              <a:t>same three roles, now with GroupChatBuilder(participants=[...], orchestrator_agent=critic_orchestrator)</a:t>
-            </a:r>
-            <a:endParaRPr lang="en-US" sz="1150" dirty="0"/>
-          </a:p>
-        </p:txBody>
-      </p:sp>
-      <p:sp>
-        <p:nvSpPr>
-          <p:cNvPr id="10" name="Shape 8"/>
-          <p:cNvSpPr/>
-          <p:nvPr/>
-        </p:nvSpPr>
-        <p:spPr>
-          <a:xfrm>
-            <a:off x="3035808" y="1892808"/>
-            <a:ext cx="164592" cy="219456"/>
-          </a:xfrm>
-          <a:prstGeom prst="chevron">
-            <a:avLst/>
-          </a:prstGeom>
-          <a:solidFill>
-            <a:srgbClr val="E8A87C"/>
-          </a:solidFill>
-          <a:ln/>
-        </p:spPr>
-      </p:sp>
-      <p:sp>
-        <p:nvSpPr>
-          <p:cNvPr id="11" name="Shape 9"/>
-          <p:cNvSpPr/>
-          <p:nvPr/>
-        </p:nvSpPr>
-        <p:spPr>
-          <a:xfrm>
-            <a:off x="3255264" y="1216152"/>
-            <a:ext cx="2633472" cy="1572768"/>
-          </a:xfrm>
-          <a:prstGeom prst="roundRect">
-            <a:avLst>
-              <a:gd name="adj" fmla="val 3488"/>
-            </a:avLst>
-          </a:prstGeom>
-          <a:solidFill>
-            <a:srgbClr val="F3F4F6"/>
-          </a:solidFill>
-          <a:ln w="10160">
-            <a:solidFill>
-              <a:srgbClr val="D1D5DB"/>
-            </a:solidFill>
-            <a:prstDash val="solid"/>
-          </a:ln>
-        </p:spPr>
-      </p:sp>
-      <p:sp>
-        <p:nvSpPr>
-          <p:cNvPr id="12" name="Shape 10"/>
-          <p:cNvSpPr/>
-          <p:nvPr/>
-        </p:nvSpPr>
-        <p:spPr>
-          <a:xfrm>
-            <a:off x="3364992" y="1335024"/>
-            <a:ext cx="320040" cy="320040"/>
-          </a:xfrm>
-          <a:prstGeom prst="ellipse">
-            <a:avLst/>
-          </a:prstGeom>
-          <a:solidFill>
-            <a:srgbClr val="1E2761"/>
-          </a:solidFill>
-          <a:ln/>
-        </p:spPr>
-      </p:sp>
-      <p:sp>
-        <p:nvSpPr>
-          <p:cNvPr id="13" name="Text 11"/>
-          <p:cNvSpPr/>
-          <p:nvPr/>
-        </p:nvSpPr>
-        <p:spPr>
-          <a:xfrm>
-            <a:off x="3364992" y="1385316"/>
-            <a:ext cx="320040" cy="146304"/>
-          </a:xfrm>
-          <a:prstGeom prst="rect">
-            <a:avLst/>
-          </a:prstGeom>
-          <a:noFill/>
-          <a:ln/>
-        </p:spPr>
-        <p:txBody>
-          <a:bodyPr wrap="square" lIns="0" tIns="0" rIns="0" bIns="0" rtlCol="0" anchor="ctr"/>
-          <a:lstStyle/>
-          <a:p>
-            <a:pPr algn="ctr" indent="0" marL="0">
-              <a:buNone/>
-            </a:pPr>
-            <a:r>
-              <a:rPr lang="en-US" sz="900" b="1" dirty="0">
-                <a:solidFill>
-                  <a:srgbClr val="FFFFFF"/>
-                </a:solidFill>
-                <a:latin typeface="Calibri" pitchFamily="34" charset="0"/>
-                <a:ea typeface="Calibri" pitchFamily="34" charset="-122"/>
-                <a:cs typeface="Calibri" pitchFamily="34" charset="-120"/>
-              </a:rPr>
-              <a:t>2</a:t>
-            </a:r>
-            <a:endParaRPr lang="en-US" sz="900" dirty="0"/>
-          </a:p>
-        </p:txBody>
-      </p:sp>
-      <p:sp>
-        <p:nvSpPr>
-          <p:cNvPr id="14" name="Text 12"/>
-          <p:cNvSpPr/>
-          <p:nvPr/>
-        </p:nvSpPr>
-        <p:spPr>
-          <a:xfrm>
-            <a:off x="3785616" y="1335024"/>
-            <a:ext cx="1975104" cy="310896"/>
-          </a:xfrm>
-          <a:prstGeom prst="rect">
-            <a:avLst/>
-          </a:prstGeom>
-          <a:noFill/>
-          <a:ln/>
-        </p:spPr>
-        <p:txBody>
-          <a:bodyPr wrap="square" lIns="0" tIns="0" rIns="0" bIns="0" rtlCol="0" anchor="ctr">
-            <a:normAutofit/>
-          </a:bodyPr>
-          <a:lstStyle/>
-          <a:p>
-            <a:pPr indent="0" marL="0">
-              <a:buNone/>
-            </a:pPr>
-            <a:r>
-              <a:rPr lang="en-US" sz="1500" b="1" dirty="0">
-                <a:solidFill>
-                  <a:srgbClr val="1E2761"/>
-                </a:solidFill>
-                <a:latin typeface="Calibri" pitchFamily="34" charset="0"/>
-                <a:ea typeface="Calibri" pitchFamily="34" charset="-122"/>
-                <a:cs typeface="Calibri" pitchFamily="34" charset="-120"/>
-              </a:rPr>
-              <a:t>Baseline</a:t>
-            </a:r>
-            <a:endParaRPr lang="en-US" sz="1500" dirty="0"/>
-          </a:p>
-        </p:txBody>
-      </p:sp>
-      <p:sp>
-        <p:nvSpPr>
-          <p:cNvPr id="15" name="Text 13"/>
-          <p:cNvSpPr/>
-          <p:nvPr/>
-        </p:nvSpPr>
-        <p:spPr>
-          <a:xfrm>
-            <a:off x="3401568" y="1719072"/>
-            <a:ext cx="2340864" cy="950976"/>
-          </a:xfrm>
-          <a:prstGeom prst="rect">
-            <a:avLst/>
-          </a:prstGeom>
-          <a:noFill/>
-          <a:ln/>
-        </p:spPr>
-        <p:txBody>
-          <a:bodyPr wrap="square" lIns="0" tIns="0" rIns="0" bIns="0" rtlCol="0" anchor="t">
-            <a:normAutofit/>
-          </a:bodyPr>
-          <a:lstStyle/>
-          <a:p>
-            <a:pPr indent="0" marL="0">
-              <a:buNone/>
-            </a:pPr>
-            <a:r>
-              <a:rPr lang="en-US" sz="1150" dirty="0">
-                <a:solidFill>
-                  <a:srgbClr val="212121"/>
-                </a:solidFill>
-                <a:latin typeface="Calibri" pitchFamily="34" charset="0"/>
-                <a:ea typeface="Calibri" pitchFamily="34" charset="-122"/>
-                <a:cs typeface="Calibri" pitchFamily="34" charset="-120"/>
-              </a:rPr>
-              <a:t>you already have Part B's trajectory eval scores and cost per successful outcome</a:t>
-            </a:r>
-            <a:endParaRPr lang="en-US" sz="1150" dirty="0"/>
-          </a:p>
-        </p:txBody>
-      </p:sp>
-      <p:sp>
-        <p:nvSpPr>
-          <p:cNvPr id="16" name="Shape 14"/>
-          <p:cNvSpPr/>
-          <p:nvPr/>
-        </p:nvSpPr>
-        <p:spPr>
-          <a:xfrm>
-            <a:off x="5925312" y="1892808"/>
-            <a:ext cx="164592" cy="219456"/>
-          </a:xfrm>
-          <a:prstGeom prst="chevron">
-            <a:avLst/>
-          </a:prstGeom>
-          <a:solidFill>
-            <a:srgbClr val="E8A87C"/>
-          </a:solidFill>
-          <a:ln/>
-        </p:spPr>
-      </p:sp>
-      <p:sp>
-        <p:nvSpPr>
-          <p:cNvPr id="17" name="Shape 15"/>
-          <p:cNvSpPr/>
-          <p:nvPr/>
-        </p:nvSpPr>
-        <p:spPr>
-          <a:xfrm>
-            <a:off x="6144768" y="1216152"/>
-            <a:ext cx="2633472" cy="1572768"/>
-          </a:xfrm>
-          <a:prstGeom prst="roundRect">
-            <a:avLst>
-              <a:gd name="adj" fmla="val 3488"/>
-            </a:avLst>
-          </a:prstGeom>
-          <a:solidFill>
-            <a:srgbClr val="F3F4F6"/>
-          </a:solidFill>
-          <a:ln w="10160">
-            <a:solidFill>
-              <a:srgbClr val="D1D5DB"/>
-            </a:solidFill>
-            <a:prstDash val="solid"/>
-          </a:ln>
-        </p:spPr>
-      </p:sp>
-      <p:sp>
-        <p:nvSpPr>
-          <p:cNvPr id="18" name="Shape 16"/>
-          <p:cNvSpPr/>
-          <p:nvPr/>
-        </p:nvSpPr>
-        <p:spPr>
-          <a:xfrm>
-            <a:off x="6254496" y="1335024"/>
-            <a:ext cx="320040" cy="320040"/>
-          </a:xfrm>
-          <a:prstGeom prst="ellipse">
-            <a:avLst/>
-          </a:prstGeom>
-          <a:solidFill>
-            <a:srgbClr val="1E2761"/>
-          </a:solidFill>
-          <a:ln/>
-        </p:spPr>
-      </p:sp>
-      <p:sp>
-        <p:nvSpPr>
-          <p:cNvPr id="19" name="Text 17"/>
-          <p:cNvSpPr/>
-          <p:nvPr/>
-        </p:nvSpPr>
-        <p:spPr>
-          <a:xfrm>
-            <a:off x="6254496" y="1385316"/>
-            <a:ext cx="320040" cy="146304"/>
-          </a:xfrm>
-          <a:prstGeom prst="rect">
-            <a:avLst/>
-          </a:prstGeom>
-          <a:noFill/>
-          <a:ln/>
-        </p:spPr>
-        <p:txBody>
-          <a:bodyPr wrap="square" lIns="0" tIns="0" rIns="0" bIns="0" rtlCol="0" anchor="ctr"/>
-          <a:lstStyle/>
-          <a:p>
-            <a:pPr algn="ctr" indent="0" marL="0">
-              <a:buNone/>
-            </a:pPr>
-            <a:r>
-              <a:rPr lang="en-US" sz="900" b="1" dirty="0">
-                <a:solidFill>
-                  <a:srgbClr val="FFFFFF"/>
-                </a:solidFill>
-                <a:latin typeface="Calibri" pitchFamily="34" charset="0"/>
-                <a:ea typeface="Calibri" pitchFamily="34" charset="-122"/>
-                <a:cs typeface="Calibri" pitchFamily="34" charset="-120"/>
-              </a:rPr>
-              <a:t>3</a:t>
-            </a:r>
-            <a:endParaRPr lang="en-US" sz="900" dirty="0"/>
-          </a:p>
-        </p:txBody>
-      </p:sp>
-      <p:sp>
-        <p:nvSpPr>
-          <p:cNvPr id="20" name="Text 18"/>
-          <p:cNvSpPr/>
-          <p:nvPr/>
-        </p:nvSpPr>
-        <p:spPr>
-          <a:xfrm>
-            <a:off x="6675120" y="1335024"/>
-            <a:ext cx="1975104" cy="310896"/>
-          </a:xfrm>
-          <a:prstGeom prst="rect">
-            <a:avLst/>
-          </a:prstGeom>
-          <a:noFill/>
-          <a:ln/>
-        </p:spPr>
-        <p:txBody>
-          <a:bodyPr wrap="square" lIns="0" tIns="0" rIns="0" bIns="0" rtlCol="0" anchor="ctr">
-            <a:normAutofit/>
-          </a:bodyPr>
-          <a:lstStyle/>
-          <a:p>
-            <a:pPr indent="0" marL="0">
-              <a:buNone/>
-            </a:pPr>
-            <a:r>
-              <a:rPr lang="en-US" sz="1500" b="1" dirty="0">
-                <a:solidFill>
-                  <a:srgbClr val="1E2761"/>
-                </a:solidFill>
-                <a:latin typeface="Calibri" pitchFamily="34" charset="0"/>
-                <a:ea typeface="Calibri" pitchFamily="34" charset="-122"/>
-                <a:cs typeface="Calibri" pitchFamily="34" charset="-120"/>
-              </a:rPr>
-              <a:t>Re-run</a:t>
-            </a:r>
-            <a:endParaRPr lang="en-US" sz="1500" dirty="0"/>
-          </a:p>
-        </p:txBody>
-      </p:sp>
-      <p:sp>
-        <p:nvSpPr>
-          <p:cNvPr id="21" name="Text 19"/>
-          <p:cNvSpPr/>
-          <p:nvPr/>
-        </p:nvSpPr>
-        <p:spPr>
-          <a:xfrm>
-            <a:off x="6291072" y="1719072"/>
-            <a:ext cx="2340864" cy="950976"/>
-          </a:xfrm>
-          <a:prstGeom prst="rect">
-            <a:avLst/>
-          </a:prstGeom>
-          <a:noFill/>
-          <a:ln/>
-        </p:spPr>
-        <p:txBody>
-          <a:bodyPr wrap="square" lIns="0" tIns="0" rIns="0" bIns="0" rtlCol="0" anchor="t">
-            <a:normAutofit/>
-          </a:bodyPr>
-          <a:lstStyle/>
-          <a:p>
-            <a:pPr indent="0" marL="0">
-              <a:buNone/>
-            </a:pPr>
-            <a:r>
-              <a:rPr lang="en-US" sz="1150" dirty="0">
-                <a:solidFill>
-                  <a:srgbClr val="212121"/>
-                </a:solidFill>
-                <a:latin typeface="Calibri" pitchFamily="34" charset="0"/>
-                <a:ea typeface="Calibri" pitchFamily="34" charset="-122"/>
-                <a:cs typeface="Calibri" pitchFamily="34" charset="-120"/>
-              </a:rPr>
-              <a:t>the same golden set, same evaluators, against Part C</a:t>
-            </a:r>
-            <a:endParaRPr lang="en-US" sz="1150" dirty="0"/>
-          </a:p>
-        </p:txBody>
-      </p:sp>
-      <p:sp>
-        <p:nvSpPr>
-          <p:cNvPr id="22" name="Shape 20"/>
-          <p:cNvSpPr/>
-          <p:nvPr/>
-        </p:nvSpPr>
-        <p:spPr>
-          <a:xfrm>
-            <a:off x="365760" y="3044952"/>
-            <a:ext cx="2633472" cy="1572768"/>
-          </a:xfrm>
-          <a:prstGeom prst="roundRect">
-            <a:avLst>
-              <a:gd name="adj" fmla="val 3488"/>
-            </a:avLst>
-          </a:prstGeom>
-          <a:solidFill>
-            <a:srgbClr val="F3F4F6"/>
-          </a:solidFill>
-          <a:ln w="10160">
-            <a:solidFill>
-              <a:srgbClr val="D1D5DB"/>
-            </a:solidFill>
-            <a:prstDash val="solid"/>
-          </a:ln>
-        </p:spPr>
-      </p:sp>
-      <p:sp>
-        <p:nvSpPr>
-          <p:cNvPr id="23" name="Shape 21"/>
-          <p:cNvSpPr/>
-          <p:nvPr/>
-        </p:nvSpPr>
-        <p:spPr>
-          <a:xfrm>
-            <a:off x="475488" y="3163824"/>
-            <a:ext cx="320040" cy="320040"/>
-          </a:xfrm>
-          <a:prstGeom prst="ellipse">
-            <a:avLst/>
-          </a:prstGeom>
-          <a:solidFill>
-            <a:srgbClr val="1E2761"/>
-          </a:solidFill>
-          <a:ln/>
-        </p:spPr>
-      </p:sp>
-      <p:sp>
-        <p:nvSpPr>
-          <p:cNvPr id="24" name="Text 22"/>
-          <p:cNvSpPr/>
-          <p:nvPr/>
-        </p:nvSpPr>
-        <p:spPr>
-          <a:xfrm>
-            <a:off x="475488" y="3214116"/>
-            <a:ext cx="320040" cy="146304"/>
-          </a:xfrm>
-          <a:prstGeom prst="rect">
-            <a:avLst/>
-          </a:prstGeom>
-          <a:noFill/>
-          <a:ln/>
-        </p:spPr>
-        <p:txBody>
-          <a:bodyPr wrap="square" lIns="0" tIns="0" rIns="0" bIns="0" rtlCol="0" anchor="ctr"/>
-          <a:lstStyle/>
-          <a:p>
-            <a:pPr algn="ctr" indent="0" marL="0">
-              <a:buNone/>
-            </a:pPr>
-            <a:r>
-              <a:rPr lang="en-US" sz="900" b="1" dirty="0">
-                <a:solidFill>
-                  <a:srgbClr val="FFFFFF"/>
-                </a:solidFill>
-                <a:latin typeface="Calibri" pitchFamily="34" charset="0"/>
-                <a:ea typeface="Calibri" pitchFamily="34" charset="-122"/>
-                <a:cs typeface="Calibri" pitchFamily="34" charset="-120"/>
-              </a:rPr>
-              <a:t>4</a:t>
-            </a:r>
-            <a:endParaRPr lang="en-US" sz="900" dirty="0"/>
-          </a:p>
-        </p:txBody>
-      </p:sp>
-      <p:sp>
-        <p:nvSpPr>
-          <p:cNvPr id="25" name="Text 23"/>
-          <p:cNvSpPr/>
-          <p:nvPr/>
-        </p:nvSpPr>
-        <p:spPr>
-          <a:xfrm>
-            <a:off x="896112" y="3163824"/>
-            <a:ext cx="1975104" cy="310896"/>
-          </a:xfrm>
-          <a:prstGeom prst="rect">
-            <a:avLst/>
-          </a:prstGeom>
-          <a:noFill/>
-          <a:ln/>
-        </p:spPr>
-        <p:txBody>
-          <a:bodyPr wrap="square" lIns="0" tIns="0" rIns="0" bIns="0" rtlCol="0" anchor="ctr">
-            <a:normAutofit/>
-          </a:bodyPr>
-          <a:lstStyle/>
-          <a:p>
-            <a:pPr indent="0" marL="0">
-              <a:buNone/>
-            </a:pPr>
-            <a:r>
-              <a:rPr lang="en-US" sz="1500" b="1" dirty="0">
-                <a:solidFill>
-                  <a:srgbClr val="1E2761"/>
-                </a:solidFill>
-                <a:latin typeface="Calibri" pitchFamily="34" charset="0"/>
-                <a:ea typeface="Calibri" pitchFamily="34" charset="-122"/>
-                <a:cs typeface="Calibri" pitchFamily="34" charset="-120"/>
-              </a:rPr>
-              <a:t>Quantify the delta</a:t>
-            </a:r>
-            <a:endParaRPr lang="en-US" sz="1500" dirty="0"/>
-          </a:p>
-        </p:txBody>
-      </p:sp>
-      <p:sp>
-        <p:nvSpPr>
-          <p:cNvPr id="26" name="Text 24"/>
-          <p:cNvSpPr/>
-          <p:nvPr/>
-        </p:nvSpPr>
-        <p:spPr>
-          <a:xfrm>
-            <a:off x="512064" y="3547872"/>
-            <a:ext cx="2340864" cy="950976"/>
-          </a:xfrm>
-          <a:prstGeom prst="rect">
-            <a:avLst/>
-          </a:prstGeom>
-          <a:noFill/>
-          <a:ln/>
-        </p:spPr>
-        <p:txBody>
-          <a:bodyPr wrap="square" lIns="0" tIns="0" rIns="0" bIns="0" rtlCol="0" anchor="t">
-            <a:normAutofit/>
-          </a:bodyPr>
-          <a:lstStyle/>
-          <a:p>
-            <a:pPr indent="0" marL="0">
-              <a:buNone/>
-            </a:pPr>
-            <a:r>
-              <a:rPr lang="en-US" sz="1150" dirty="0">
-                <a:solidFill>
-                  <a:srgbClr val="212121"/>
-                </a:solidFill>
-                <a:latin typeface="Calibri" pitchFamily="34" charset="0"/>
-                <a:ea typeface="Calibri" pitchFamily="34" charset="-122"/>
-                <a:cs typeface="Calibri" pitchFamily="34" charset="-120"/>
-              </a:rPr>
-              <a:t>did the pass rate change? Did cost per successful outcome change?</a:t>
-            </a:r>
-            <a:endParaRPr lang="en-US" sz="1150" dirty="0"/>
-          </a:p>
-        </p:txBody>
-      </p:sp>
-      <p:sp>
-        <p:nvSpPr>
-          <p:cNvPr id="27" name="Shape 25"/>
-          <p:cNvSpPr/>
-          <p:nvPr/>
-        </p:nvSpPr>
-        <p:spPr>
-          <a:xfrm>
-            <a:off x="3035808" y="3721608"/>
-            <a:ext cx="164592" cy="219456"/>
-          </a:xfrm>
-          <a:prstGeom prst="chevron">
-            <a:avLst/>
-          </a:prstGeom>
-          <a:solidFill>
-            <a:srgbClr val="E8A87C"/>
-          </a:solidFill>
-          <a:ln/>
-        </p:spPr>
-      </p:sp>
-      <p:sp>
-        <p:nvSpPr>
-          <p:cNvPr id="28" name="Shape 26"/>
-          <p:cNvSpPr/>
-          <p:nvPr/>
-        </p:nvSpPr>
-        <p:spPr>
-          <a:xfrm>
-            <a:off x="3255264" y="3044952"/>
-            <a:ext cx="2633472" cy="1572768"/>
-          </a:xfrm>
-          <a:prstGeom prst="roundRect">
-            <a:avLst>
-              <a:gd name="adj" fmla="val 3488"/>
-            </a:avLst>
-          </a:prstGeom>
-          <a:solidFill>
-            <a:srgbClr val="CADCFC"/>
-          </a:solidFill>
-          <a:ln w="10160">
-            <a:solidFill>
-              <a:srgbClr val="1E2761"/>
-            </a:solidFill>
-            <a:prstDash val="solid"/>
-          </a:ln>
-        </p:spPr>
-      </p:sp>
-      <p:sp>
-        <p:nvSpPr>
-          <p:cNvPr id="29" name="Shape 27"/>
-          <p:cNvSpPr/>
-          <p:nvPr/>
-        </p:nvSpPr>
-        <p:spPr>
-          <a:xfrm>
-            <a:off x="3364992" y="3163824"/>
-            <a:ext cx="320040" cy="320040"/>
-          </a:xfrm>
-          <a:prstGeom prst="ellipse">
-            <a:avLst/>
-          </a:prstGeom>
-          <a:solidFill>
-            <a:srgbClr val="1E2761"/>
-          </a:solidFill>
-          <a:ln/>
-        </p:spPr>
-      </p:sp>
-      <p:sp>
-        <p:nvSpPr>
-          <p:cNvPr id="30" name="Text 28"/>
-          <p:cNvSpPr/>
-          <p:nvPr/>
-        </p:nvSpPr>
-        <p:spPr>
-          <a:xfrm>
-            <a:off x="3364992" y="3214116"/>
-            <a:ext cx="320040" cy="146304"/>
-          </a:xfrm>
-          <a:prstGeom prst="rect">
-            <a:avLst/>
-          </a:prstGeom>
-          <a:noFill/>
-          <a:ln/>
-        </p:spPr>
-        <p:txBody>
-          <a:bodyPr wrap="square" lIns="0" tIns="0" rIns="0" bIns="0" rtlCol="0" anchor="ctr"/>
-          <a:lstStyle/>
-          <a:p>
-            <a:pPr algn="ctr" indent="0" marL="0">
-              <a:buNone/>
-            </a:pPr>
-            <a:r>
-              <a:rPr lang="en-US" sz="900" b="1" dirty="0">
-                <a:solidFill>
-                  <a:srgbClr val="FFFFFF"/>
-                </a:solidFill>
-                <a:latin typeface="Calibri" pitchFamily="34" charset="0"/>
-                <a:ea typeface="Calibri" pitchFamily="34" charset="-122"/>
-                <a:cs typeface="Calibri" pitchFamily="34" charset="-120"/>
-              </a:rPr>
-              <a:t>5</a:t>
-            </a:r>
-            <a:endParaRPr lang="en-US" sz="900" dirty="0"/>
-          </a:p>
-        </p:txBody>
-      </p:sp>
-      <p:sp>
-        <p:nvSpPr>
-          <p:cNvPr id="31" name="Text 29"/>
-          <p:cNvSpPr/>
-          <p:nvPr/>
-        </p:nvSpPr>
-        <p:spPr>
-          <a:xfrm>
-            <a:off x="3785616" y="3163824"/>
-            <a:ext cx="1975104" cy="310896"/>
-          </a:xfrm>
-          <a:prstGeom prst="rect">
-            <a:avLst/>
-          </a:prstGeom>
-          <a:noFill/>
-          <a:ln/>
-        </p:spPr>
-        <p:txBody>
-          <a:bodyPr wrap="square" lIns="0" tIns="0" rIns="0" bIns="0" rtlCol="0" anchor="ctr">
-            <a:normAutofit/>
-          </a:bodyPr>
-          <a:lstStyle/>
-          <a:p>
-            <a:pPr indent="0" marL="0">
-              <a:buNone/>
-            </a:pPr>
-            <a:r>
-              <a:rPr lang="en-US" sz="1500" b="1" dirty="0">
-                <a:solidFill>
-                  <a:srgbClr val="1E2761"/>
-                </a:solidFill>
-                <a:latin typeface="Calibri" pitchFamily="34" charset="0"/>
-                <a:ea typeface="Calibri" pitchFamily="34" charset="-122"/>
-                <a:cs typeface="Calibri" pitchFamily="34" charset="-120"/>
-              </a:rPr>
-              <a:t>Reflect</a:t>
-            </a:r>
-            <a:endParaRPr lang="en-US" sz="1500" dirty="0"/>
-          </a:p>
-        </p:txBody>
-      </p:sp>
-      <p:sp>
-        <p:nvSpPr>
-          <p:cNvPr id="32" name="Text 30"/>
-          <p:cNvSpPr/>
-          <p:nvPr/>
-        </p:nvSpPr>
-        <p:spPr>
-          <a:xfrm>
-            <a:off x="3401568" y="3547872"/>
-            <a:ext cx="2340864" cy="950976"/>
-          </a:xfrm>
-          <a:prstGeom prst="rect">
-            <a:avLst/>
-          </a:prstGeom>
-          <a:noFill/>
-          <a:ln/>
-        </p:spPr>
-        <p:txBody>
-          <a:bodyPr wrap="square" lIns="0" tIns="0" rIns="0" bIns="0" rtlCol="0" anchor="t">
-            <a:normAutofit/>
-          </a:bodyPr>
-          <a:lstStyle/>
-          <a:p>
-            <a:pPr indent="0" marL="0">
-              <a:buNone/>
-            </a:pPr>
-            <a:r>
-              <a:rPr lang="en-US" sz="1150" dirty="0">
-                <a:solidFill>
-                  <a:srgbClr val="212121"/>
-                </a:solidFill>
-                <a:latin typeface="Calibri" pitchFamily="34" charset="0"/>
-                <a:ea typeface="Calibri" pitchFamily="34" charset="-122"/>
-                <a:cs typeface="Calibri" pitchFamily="34" charset="-120"/>
-              </a:rPr>
-              <a:t>which approach fit best, and why — write it down, it's part of Done</a:t>
-            </a:r>
-            <a:endParaRPr lang="en-US" sz="1150" dirty="0"/>
-          </a:p>
-        </p:txBody>
-      </p:sp>
-      <p:sp>
-        <p:nvSpPr>
-          <p:cNvPr id="33" name="Shape 31"/>
+              <a:t>  —  a bounded, graceful stop, not an unbounded token burn. This is Module 6's advice, applied to the two loops this lab can actually trigger</a:t>
+            </a:r>
+            <a:endParaRPr lang="en-US" sz="1600" dirty="0"/>
+          </a:p>
+        </p:txBody>
+      </p:sp>
+      <p:sp>
+        <p:nvSpPr>
+          <p:cNvPr id="6" name="Shape 4"/>
           <p:cNvSpPr/>
           <p:nvPr/>
         </p:nvSpPr>
@@ -6365,7 +6973,7 @@
       </p:sp>
       <p:sp>
         <p:nvSpPr>
-          <p:cNvPr id="34" name="Text 32"/>
+          <p:cNvPr id="7" name="Text 5"/>
           <p:cNvSpPr/>
           <p:nvPr/>
         </p:nvSpPr>
@@ -6398,7 +7006,7 @@
                 <a:ea typeface="Calibri" pitchFamily="34" charset="-122"/>
                 <a:cs typeface="Calibri" pitchFamily="34" charset="-120"/>
               </a:rPr>
-              <a:t>Source: https://learn.microsoft.com/en-us/agent-framework/workflows/orchestrations/group-chat</a:t>
+              <a:t>Source: https://learn.microsoft.com/en-us/agent-framework/agents/looping</a:t>
             </a:r>
             <a:endParaRPr lang="en-US" sz="820" dirty="0"/>
           </a:p>
@@ -6524,7 +7132,7 @@
               <a:buNone/>
             </a:pPr>
             <a:r>
-              <a:rPr lang="en-US" sz="2300" b="1" dirty="0">
+              <a:rPr lang="en-US" sz="2800" b="1" dirty="0">
                 <a:solidFill>
                   <a:srgbClr val="1E2761"/>
                 </a:solidFill>
@@ -6532,9 +7140,9 @@
                 <a:ea typeface="Calibri" pitchFamily="34" charset="-122"/>
                 <a:cs typeface="Calibri" pitchFamily="34" charset="-120"/>
               </a:rPr>
-              <a:t>Build one golden set, use it for all three parts</a:t>
-            </a:r>
-            <a:endParaRPr lang="en-US" sz="2300" dirty="0"/>
+              <a:t>Part C — Evaluate and compare</a:t>
+            </a:r>
+            <a:endParaRPr lang="en-US" sz="2800" dirty="0"/>
           </a:p>
         </p:txBody>
       </p:sp>
@@ -6577,7 +7185,7 @@
                 <a:ea typeface="Calibri" pitchFamily="34" charset="-122"/>
                 <a:cs typeface="Calibri" pitchFamily="34" charset="-120"/>
               </a:rPr>
-              <a:t>~15 realistic questions, each with expected citations/answers as ground truth</a:t>
+              <a:t>Imports Part B's three build_workflow_*() functions directly — no new orchestration code</a:t>
             </a:r>
             <a:endParaRPr lang="en-US" sz="1600" dirty="0"/>
           </a:p>
@@ -6598,7 +7206,7 @@
                 <a:ea typeface="Calibri" pitchFamily="34" charset="-122"/>
                 <a:cs typeface="Calibri" pitchFamily="34" charset="-120"/>
               </a:rPr>
-              <a:t>Cover the real branches: a question that grounds cleanly on the first pass, one that needs the Critic's revision loop, and a general-knowledge question needing no retrieval at all</a:t>
+              <a:t>Runs the SAME golden-set slice against all three constructions: Sequential, custom graph, Group Chat</a:t>
             </a:r>
             <a:endParaRPr lang="en-US" sz="1600" dirty="0"/>
           </a:p>
@@ -6619,7 +7227,45 @@
                 <a:ea typeface="Calibri" pitchFamily="34" charset="-122"/>
                 <a:cs typeface="Calibri" pitchFamily="34" charset="-120"/>
               </a:rPr>
-              <a:t>Build it once, before Part A — every part runs against the exact same set, so the eval deltas mean something</a:t>
+              <a:t>Reports a comparison table: approved rate for each, plus guardrail-trip rate for construction #2 specifically (construction #3's guardrail has no distinct signal from a plain rejection)</a:t>
+            </a:r>
+            <a:endParaRPr lang="en-US" sz="1600" dirty="0"/>
+          </a:p>
+          <a:p>
+            <a:pPr marL="342900" indent="-342900">
+              <a:spcAft>
+                <a:spcPts val="1000"/>
+              </a:spcAft>
+              <a:buSzPct val="100000"/>
+              <a:buChar char="•"/>
+            </a:pPr>
+            <a:r>
+              <a:rPr lang="en-US" sz="1600" b="1" dirty="0">
+                <a:solidFill>
+                  <a:srgbClr val="1E2761"/>
+                </a:solidFill>
+                <a:latin typeface="Calibri" pitchFamily="34" charset="0"/>
+                <a:ea typeface="Calibri" pitchFamily="34" charset="-122"/>
+                <a:cs typeface="Calibri" pitchFamily="34" charset="-120"/>
+              </a:rPr>
+              <a:t>Reflect</a:t>
+            </a:r>
+            <a:pPr indent="0" marL="0">
+              <a:spcAft>
+                <a:spcPts val="1000"/>
+              </a:spcAft>
+              <a:buNone/>
+            </a:pPr>
+            <a:r>
+              <a:rPr lang="en-US" sz="1600" dirty="0">
+                <a:solidFill>
+                  <a:srgbClr val="212121"/>
+                </a:solidFill>
+                <a:latin typeface="Calibri" pitchFamily="34" charset="0"/>
+                <a:ea typeface="Calibri" pitchFamily="34" charset="-122"/>
+                <a:cs typeface="Calibri" pitchFamily="34" charset="-120"/>
+              </a:rPr>
+              <a:t>  —  which approach fit best, and why — write it down, it's part of Done</a:t>
             </a:r>
             <a:endParaRPr lang="en-US" sz="1600" dirty="0"/>
           </a:p>
@@ -6809,7 +7455,7 @@
               <a:buNone/>
             </a:pPr>
             <a:r>
-              <a:rPr lang="en-US" sz="2800" b="1" dirty="0">
+              <a:rPr lang="en-US" sz="2500" b="1" dirty="0">
                 <a:solidFill>
                   <a:srgbClr val="1E2761"/>
                 </a:solidFill>
@@ -6817,9 +7463,9 @@
                 <a:ea typeface="Calibri" pitchFamily="34" charset="-122"/>
                 <a:cs typeface="Calibri" pitchFamily="34" charset="-120"/>
               </a:rPr>
-              <a:t>Run the trajectory evaluation</a:t>
-            </a:r>
-            <a:endParaRPr lang="en-US" sz="2800" dirty="0"/>
+              <a:t>Build one golden set, use it for Part C</a:t>
+            </a:r>
+            <a:endParaRPr lang="en-US" sz="2500" dirty="0"/>
           </a:p>
         </p:txBody>
       </p:sp>
@@ -6854,23 +7500,6 @@
               <a:buChar char="•"/>
             </a:pPr>
             <a:r>
-              <a:rPr lang="en-US" sz="1600" b="1" dirty="0">
-                <a:solidFill>
-                  <a:srgbClr val="1E2761"/>
-                </a:solidFill>
-                <a:latin typeface="Calibri" pitchFamily="34" charset="0"/>
-                <a:ea typeface="Calibri" pitchFamily="34" charset="-122"/>
-                <a:cs typeface="Calibri" pitchFamily="34" charset="-120"/>
-              </a:rPr>
-              <a:t>Plan quality</a:t>
-            </a:r>
-            <a:pPr indent="0" marL="0">
-              <a:spcAft>
-                <a:spcPts val="1000"/>
-              </a:spcAft>
-              <a:buNone/>
-            </a:pPr>
-            <a:r>
               <a:rPr lang="en-US" sz="1600" dirty="0">
                 <a:solidFill>
                   <a:srgbClr val="212121"/>
@@ -6879,7 +7508,7 @@
                 <a:ea typeface="Calibri" pitchFamily="34" charset="-122"/>
                 <a:cs typeface="Calibri" pitchFamily="34" charset="-120"/>
               </a:rPr>
-              <a:t>  —  did the Planner's decomposition make sense for the question?</a:t>
+              <a:t>~15 realistic questions, each with expected citations/answers as ground truth</a:t>
             </a:r>
             <a:endParaRPr lang="en-US" sz="1600" dirty="0"/>
           </a:p>
@@ -6892,23 +7521,6 @@
               <a:buChar char="•"/>
             </a:pPr>
             <a:r>
-              <a:rPr lang="en-US" sz="1600" b="1" dirty="0">
-                <a:solidFill>
-                  <a:srgbClr val="1E2761"/>
-                </a:solidFill>
-                <a:latin typeface="Calibri" pitchFamily="34" charset="0"/>
-                <a:ea typeface="Calibri" pitchFamily="34" charset="-122"/>
-                <a:cs typeface="Calibri" pitchFamily="34" charset="-120"/>
-              </a:rPr>
-              <a:t>Retrieval recall</a:t>
-            </a:r>
-            <a:pPr indent="0" marL="0">
-              <a:spcAft>
-                <a:spcPts val="1000"/>
-              </a:spcAft>
-              <a:buNone/>
-            </a:pPr>
-            <a:r>
               <a:rPr lang="en-US" sz="1600" dirty="0">
                 <a:solidFill>
                   <a:srgbClr val="212121"/>
@@ -6917,7 +7529,7 @@
                 <a:ea typeface="Calibri" pitchFamily="34" charset="-122"/>
                 <a:cs typeface="Calibri" pitchFamily="34" charset="-120"/>
               </a:rPr>
-              <a:t>  —  did the Retriever actually find the right grounding?</a:t>
+              <a:t>Cover the real branches: a question that grounds cleanly on the first pass, one that needs the Critic's revision loop, and a general-knowledge question needing no retrieval at all</a:t>
             </a:r>
             <a:endParaRPr lang="en-US" sz="1600" dirty="0"/>
           </a:p>
@@ -6930,23 +7542,6 @@
               <a:buChar char="•"/>
             </a:pPr>
             <a:r>
-              <a:rPr lang="en-US" sz="1600" b="1" dirty="0">
-                <a:solidFill>
-                  <a:srgbClr val="1E2761"/>
-                </a:solidFill>
-                <a:latin typeface="Calibri" pitchFamily="34" charset="0"/>
-                <a:ea typeface="Calibri" pitchFamily="34" charset="-122"/>
-                <a:cs typeface="Calibri" pitchFamily="34" charset="-120"/>
-              </a:rPr>
-              <a:t>Critic accuracy</a:t>
-            </a:r>
-            <a:pPr indent="0" marL="0">
-              <a:spcAft>
-                <a:spcPts val="1000"/>
-              </a:spcAft>
-              <a:buNone/>
-            </a:pPr>
-            <a:r>
               <a:rPr lang="en-US" sz="1600" dirty="0">
                 <a:solidFill>
                   <a:srgbClr val="212121"/>
@@ -6955,83 +7550,7 @@
                 <a:ea typeface="Calibri" pitchFamily="34" charset="-122"/>
                 <a:cs typeface="Calibri" pitchFamily="34" charset="-120"/>
               </a:rPr>
-              <a:t>  —  both decisions: the reject-and-loop call (Parts B/C only — Part A's Critic never loops), *and* the final structured Answer</a:t>
-            </a:r>
-            <a:endParaRPr lang="en-US" sz="1600" dirty="0"/>
-          </a:p>
-          <a:p>
-            <a:pPr marL="342900" indent="-342900">
-              <a:spcAft>
-                <a:spcPts val="1000"/>
-              </a:spcAft>
-              <a:buSzPct val="100000"/>
-              <a:buChar char="•"/>
-            </a:pPr>
-            <a:r>
-              <a:rPr lang="en-US" sz="1600" b="1" dirty="0">
-                <a:solidFill>
-                  <a:srgbClr val="1E2761"/>
-                </a:solidFill>
-                <a:latin typeface="Calibri" pitchFamily="34" charset="0"/>
-                <a:ea typeface="Calibri" pitchFamily="34" charset="-122"/>
-                <a:cs typeface="Calibri" pitchFamily="34" charset="-120"/>
-              </a:rPr>
-              <a:t>End-to-end task success</a:t>
-            </a:r>
-            <a:pPr indent="0" marL="0">
-              <a:spcAft>
-                <a:spcPts val="1000"/>
-              </a:spcAft>
-              <a:buNone/>
-            </a:pPr>
-            <a:r>
-              <a:rPr lang="en-US" sz="1600" dirty="0">
-                <a:solidFill>
-                  <a:srgbClr val="212121"/>
-                </a:solidFill>
-                <a:latin typeface="Calibri" pitchFamily="34" charset="0"/>
-                <a:ea typeface="Calibri" pitchFamily="34" charset="-122"/>
-                <a:cs typeface="Calibri" pitchFamily="34" charset="-120"/>
-              </a:rPr>
-              <a:t>  —  did the whole workflow produce a usable answer?</a:t>
-            </a:r>
-            <a:endParaRPr lang="en-US" sz="1600" dirty="0"/>
-          </a:p>
-          <a:p>
-            <a:pPr marL="342900" indent="-342900">
-              <a:spcAft>
-                <a:spcPts val="1000"/>
-              </a:spcAft>
-              <a:buSzPct val="100000"/>
-              <a:buChar char="•"/>
-            </a:pPr>
-            <a:r>
-              <a:rPr lang="en-US" sz="1600" b="1" dirty="0">
-                <a:solidFill>
-                  <a:srgbClr val="1E2761"/>
-                </a:solidFill>
-                <a:latin typeface="Calibri" pitchFamily="34" charset="0"/>
-                <a:ea typeface="Calibri" pitchFamily="34" charset="-122"/>
-                <a:cs typeface="Calibri" pitchFamily="34" charset="-120"/>
-              </a:rPr>
-              <a:t>Cost per successful outcome</a:t>
-            </a:r>
-            <a:pPr indent="0" marL="0">
-              <a:spcAft>
-                <a:spcPts val="1000"/>
-              </a:spcAft>
-              <a:buNone/>
-            </a:pPr>
-            <a:r>
-              <a:rPr lang="en-US" sz="1600" dirty="0">
-                <a:solidFill>
-                  <a:srgbClr val="212121"/>
-                </a:solidFill>
-                <a:latin typeface="Calibri" pitchFamily="34" charset="0"/>
-                <a:ea typeface="Calibri" pitchFamily="34" charset="-122"/>
-                <a:cs typeface="Calibri" pitchFamily="34" charset="-120"/>
-              </a:rPr>
-              <a:t>  —  tokens summed across every agent, divided by successful cases (Module 5)</a:t>
+              <a:t>Build it once, before Part C — every construction runs against the exact same set, so the comparison means something</a:t>
             </a:r>
             <a:endParaRPr lang="en-US" sz="1600" dirty="0"/>
           </a:p>
@@ -7095,7 +7614,7 @@
                 <a:ea typeface="Calibri" pitchFamily="34" charset="-122"/>
                 <a:cs typeface="Calibri" pitchFamily="34" charset="-120"/>
               </a:rPr>
-              <a:t>Source: https://learn.microsoft.com/azure/foundry/concepts/evaluation-evaluators/agent-evaluators</a:t>
+              <a:t>Source: https://learn.microsoft.com/en-us/agent-framework/agents/evaluation</a:t>
             </a:r>
             <a:endParaRPr lang="en-US" sz="820" dirty="0"/>
           </a:p>
@@ -7229,7 +7748,7 @@
                 <a:ea typeface="Calibri" pitchFamily="34" charset="-122"/>
                 <a:cs typeface="Calibri" pitchFamily="34" charset="-120"/>
               </a:rPr>
-              <a:t>Prerequisites</a:t>
+              <a:t>Run the trajectory evaluation</a:t>
             </a:r>
             <a:endParaRPr lang="en-US" sz="2800" dirty="0"/>
           </a:p>
@@ -7237,82 +7756,14 @@
       </p:sp>
       <p:sp>
         <p:nvSpPr>
-          <p:cNvPr id="5" name="Shape 3"/>
-          <p:cNvSpPr/>
-          <p:nvPr/>
-        </p:nvSpPr>
-        <p:spPr>
-          <a:xfrm>
-            <a:off x="365760" y="1078992"/>
-            <a:ext cx="4105656" cy="1655064"/>
-          </a:xfrm>
-          <a:prstGeom prst="roundRect">
-            <a:avLst>
-              <a:gd name="adj" fmla="val 3315"/>
-            </a:avLst>
-          </a:prstGeom>
-          <a:solidFill>
-            <a:srgbClr val="CADCFC"/>
-          </a:solidFill>
-          <a:ln w="10160">
-            <a:solidFill>
-              <a:srgbClr val="1E2761"/>
-            </a:solidFill>
-            <a:prstDash val="solid"/>
-          </a:ln>
-        </p:spPr>
-      </p:sp>
-      <p:sp>
-        <p:nvSpPr>
-          <p:cNvPr id="6" name="Text 4"/>
-          <p:cNvSpPr/>
-          <p:nvPr/>
-        </p:nvSpPr>
-        <p:spPr>
-          <a:xfrm>
-            <a:off x="512064" y="1197864"/>
-            <a:ext cx="3813048" cy="310896"/>
-          </a:xfrm>
-          <a:prstGeom prst="rect">
-            <a:avLst/>
-          </a:prstGeom>
-          <a:noFill/>
-          <a:ln/>
-        </p:spPr>
-        <p:txBody>
-          <a:bodyPr wrap="square" lIns="0" tIns="0" rIns="0" bIns="0" rtlCol="0" anchor="ctr">
-            <a:normAutofit/>
-          </a:bodyPr>
-          <a:lstStyle/>
-          <a:p>
-            <a:pPr indent="0" marL="0">
-              <a:buNone/>
-            </a:pPr>
-            <a:r>
-              <a:rPr lang="en-US" sz="1500" b="1" dirty="0">
-                <a:solidFill>
-                  <a:srgbClr val="1E2761"/>
-                </a:solidFill>
-                <a:latin typeface="Calibri" pitchFamily="34" charset="0"/>
-                <a:ea typeface="Calibri" pitchFamily="34" charset="-122"/>
-                <a:cs typeface="Calibri" pitchFamily="34" charset="-120"/>
-              </a:rPr>
-              <a:t>Day 3 lab complete</a:t>
-            </a:r>
-            <a:endParaRPr lang="en-US" sz="1500" dirty="0"/>
-          </a:p>
-        </p:txBody>
-      </p:sp>
-      <p:sp>
-        <p:nvSpPr>
-          <p:cNvPr id="7" name="Text 5"/>
-          <p:cNvSpPr/>
-          <p:nvPr/>
-        </p:nvSpPr>
-        <p:spPr>
-          <a:xfrm>
-            <a:off x="512064" y="1581912"/>
-            <a:ext cx="3813048" cy="1033272"/>
+          <p:cNvPr id="5" name="Text 3"/>
+          <p:cNvSpPr/>
+          <p:nvPr/>
+        </p:nvSpPr>
+        <p:spPr>
+          <a:xfrm>
+            <a:off x="502920" y="1170432"/>
+            <a:ext cx="7955280" cy="3520440"/>
           </a:xfrm>
           <a:prstGeom prst="rect">
             <a:avLst/>
@@ -7326,11 +7777,32 @@
           </a:bodyPr>
           <a:lstStyle/>
           <a:p>
+            <a:pPr marL="342900" indent="-342900">
+              <a:spcAft>
+                <a:spcPts val="1000"/>
+              </a:spcAft>
+              <a:buSzPct val="100000"/>
+              <a:buChar char="•"/>
+            </a:pPr>
+            <a:r>
+              <a:rPr lang="en-US" sz="1600" b="1" dirty="0">
+                <a:solidFill>
+                  <a:srgbClr val="1E2761"/>
+                </a:solidFill>
+                <a:latin typeface="Calibri" pitchFamily="34" charset="0"/>
+                <a:ea typeface="Calibri" pitchFamily="34" charset="-122"/>
+                <a:cs typeface="Calibri" pitchFamily="34" charset="-120"/>
+              </a:rPr>
+              <a:t>Plan quality</a:t>
+            </a:r>
             <a:pPr indent="0" marL="0">
-              <a:buNone/>
-            </a:pPr>
-            <a:r>
-              <a:rPr lang="en-US" sz="1150" dirty="0">
+              <a:spcAft>
+                <a:spcPts val="1000"/>
+              </a:spcAft>
+              <a:buNone/>
+            </a:pPr>
+            <a:r>
+              <a:rPr lang="en-US" sz="1600" dirty="0">
                 <a:solidFill>
                   <a:srgbClr val="212121"/>
                 </a:solidFill>
@@ -7338,67 +7810,58 @@
                 <a:ea typeface="Calibri" pitchFamily="34" charset="-122"/>
                 <a:cs typeface="Calibri" pitchFamily="34" charset="-120"/>
               </a:rPr>
-              <a:t>a working single agent with memory, streaming, structured outputs, and MCP</a:t>
-            </a:r>
-            <a:endParaRPr lang="en-US" sz="1150" dirty="0"/>
-          </a:p>
-        </p:txBody>
-      </p:sp>
-      <p:sp>
-        <p:nvSpPr>
-          <p:cNvPr id="8" name="Shape 6"/>
-          <p:cNvSpPr/>
-          <p:nvPr/>
-        </p:nvSpPr>
-        <p:spPr>
-          <a:xfrm>
-            <a:off x="4672584" y="1078992"/>
-            <a:ext cx="4105656" cy="1655064"/>
-          </a:xfrm>
-          <a:prstGeom prst="roundRect">
-            <a:avLst>
-              <a:gd name="adj" fmla="val 3315"/>
-            </a:avLst>
-          </a:prstGeom>
-          <a:solidFill>
-            <a:srgbClr val="F3F4F6"/>
-          </a:solidFill>
-          <a:ln w="10160">
-            <a:solidFill>
-              <a:srgbClr val="D1D5DB"/>
-            </a:solidFill>
-            <a:prstDash val="solid"/>
-          </a:ln>
-        </p:spPr>
-      </p:sp>
-      <p:sp>
-        <p:nvSpPr>
-          <p:cNvPr id="9" name="Text 7"/>
-          <p:cNvSpPr/>
-          <p:nvPr/>
-        </p:nvSpPr>
-        <p:spPr>
-          <a:xfrm>
-            <a:off x="4818888" y="1197864"/>
-            <a:ext cx="3813048" cy="310896"/>
-          </a:xfrm>
-          <a:prstGeom prst="rect">
-            <a:avLst/>
-          </a:prstGeom>
-          <a:noFill/>
-          <a:ln/>
-        </p:spPr>
-        <p:txBody>
-          <a:bodyPr wrap="square" lIns="0" tIns="0" rIns="0" bIns="0" rtlCol="0" anchor="ctr">
-            <a:normAutofit/>
-          </a:bodyPr>
-          <a:lstStyle/>
-          <a:p>
+              <a:t>  —  did the Planner's decomposition make sense for the question?</a:t>
+            </a:r>
+            <a:endParaRPr lang="en-US" sz="1600" dirty="0"/>
+          </a:p>
+          <a:p>
+            <a:pPr marL="342900" indent="-342900">
+              <a:spcAft>
+                <a:spcPts val="1000"/>
+              </a:spcAft>
+              <a:buSzPct val="100000"/>
+              <a:buChar char="•"/>
+            </a:pPr>
+            <a:r>
+              <a:rPr lang="en-US" sz="1600" b="1" dirty="0">
+                <a:solidFill>
+                  <a:srgbClr val="1E2761"/>
+                </a:solidFill>
+                <a:latin typeface="Calibri" pitchFamily="34" charset="0"/>
+                <a:ea typeface="Calibri" pitchFamily="34" charset="-122"/>
+                <a:cs typeface="Calibri" pitchFamily="34" charset="-120"/>
+              </a:rPr>
+              <a:t>Retrieval recall</a:t>
+            </a:r>
             <a:pPr indent="0" marL="0">
-              <a:buNone/>
-            </a:pPr>
-            <a:r>
-              <a:rPr lang="en-US" sz="1500" b="1" dirty="0">
+              <a:spcAft>
+                <a:spcPts val="1000"/>
+              </a:spcAft>
+              <a:buNone/>
+            </a:pPr>
+            <a:r>
+              <a:rPr lang="en-US" sz="1600" dirty="0">
+                <a:solidFill>
+                  <a:srgbClr val="212121"/>
+                </a:solidFill>
+                <a:latin typeface="Calibri" pitchFamily="34" charset="0"/>
+                <a:ea typeface="Calibri" pitchFamily="34" charset="-122"/>
+                <a:cs typeface="Calibri" pitchFamily="34" charset="-120"/>
+              </a:rPr>
+              <a:t>  —  did the Retriever actually find the right grounding?</a:t>
+            </a:r>
+            <a:endParaRPr lang="en-US" sz="1600" dirty="0"/>
+          </a:p>
+          <a:p>
+            <a:pPr marL="342900" indent="-342900">
+              <a:spcAft>
+                <a:spcPts val="1000"/>
+              </a:spcAft>
+              <a:buSzPct val="100000"/>
+              <a:buChar char="•"/>
+            </a:pPr>
+            <a:r>
+              <a:rPr lang="en-US" sz="1600" b="1" dirty="0">
                 <a:solidFill>
                   <a:srgbClr val="1E2761"/>
                 </a:solidFill>
@@ -7406,40 +7869,16 @@
                 <a:ea typeface="Calibri" pitchFamily="34" charset="-122"/>
                 <a:cs typeface="Calibri" pitchFamily="34" charset="-120"/>
               </a:rPr>
-              <a:t>Bundled reference docs</a:t>
-            </a:r>
-            <a:endParaRPr lang="en-US" sz="1500" dirty="0"/>
-          </a:p>
-        </p:txBody>
-      </p:sp>
-      <p:sp>
-        <p:nvSpPr>
-          <p:cNvPr id="10" name="Text 8"/>
-          <p:cNvSpPr/>
-          <p:nvPr/>
-        </p:nvSpPr>
-        <p:spPr>
-          <a:xfrm>
-            <a:off x="4818888" y="1581912"/>
-            <a:ext cx="3813048" cy="1033272"/>
-          </a:xfrm>
-          <a:prstGeom prst="rect">
-            <a:avLst/>
-          </a:prstGeom>
-          <a:noFill/>
-          <a:ln/>
-        </p:spPr>
-        <p:txBody>
-          <a:bodyPr wrap="square" lIns="0" tIns="0" rIns="0" bIns="0" rtlCol="0" anchor="t">
-            <a:normAutofit/>
-          </a:bodyPr>
-          <a:lstStyle/>
-          <a:p>
+              <a:t>Critic accuracy</a:t>
+            </a:r>
             <a:pPr indent="0" marL="0">
-              <a:buNone/>
-            </a:pPr>
-            <a:r>
-              <a:rPr lang="en-US" sz="1150" dirty="0">
+              <a:spcAft>
+                <a:spcPts val="1000"/>
+              </a:spcAft>
+              <a:buNone/>
+            </a:pPr>
+            <a:r>
+              <a:rPr lang="en-US" sz="1600" dirty="0">
                 <a:solidFill>
                   <a:srgbClr val="212121"/>
                 </a:solidFill>
@@ -7447,67 +7886,58 @@
                 <a:ea typeface="Calibri" pitchFamily="34" charset="-122"/>
                 <a:cs typeface="Calibri" pitchFamily="34" charset="-120"/>
               </a:rPr>
-              <a:t>included in the repo (labs/day4/python/data/docs/); nothing to provision, no live knowledge base required</a:t>
-            </a:r>
-            <a:endParaRPr lang="en-US" sz="1150" dirty="0"/>
-          </a:p>
-        </p:txBody>
-      </p:sp>
-      <p:sp>
-        <p:nvSpPr>
-          <p:cNvPr id="11" name="Shape 9"/>
-          <p:cNvSpPr/>
-          <p:nvPr/>
-        </p:nvSpPr>
-        <p:spPr>
-          <a:xfrm>
-            <a:off x="365760" y="2935224"/>
-            <a:ext cx="4105656" cy="1655064"/>
-          </a:xfrm>
-          <a:prstGeom prst="roundRect">
-            <a:avLst>
-              <a:gd name="adj" fmla="val 3315"/>
-            </a:avLst>
-          </a:prstGeom>
-          <a:solidFill>
-            <a:srgbClr val="F3F4F6"/>
-          </a:solidFill>
-          <a:ln w="10160">
-            <a:solidFill>
-              <a:srgbClr val="D1D5DB"/>
-            </a:solidFill>
-            <a:prstDash val="solid"/>
-          </a:ln>
-        </p:spPr>
-      </p:sp>
-      <p:sp>
-        <p:nvSpPr>
-          <p:cNvPr id="12" name="Text 10"/>
-          <p:cNvSpPr/>
-          <p:nvPr/>
-        </p:nvSpPr>
-        <p:spPr>
-          <a:xfrm>
-            <a:off x="512064" y="3054096"/>
-            <a:ext cx="3813048" cy="310896"/>
-          </a:xfrm>
-          <a:prstGeom prst="rect">
-            <a:avLst/>
-          </a:prstGeom>
-          <a:noFill/>
-          <a:ln/>
-        </p:spPr>
-        <p:txBody>
-          <a:bodyPr wrap="square" lIns="0" tIns="0" rIns="0" bIns="0" rtlCol="0" anchor="ctr">
-            <a:normAutofit/>
-          </a:bodyPr>
-          <a:lstStyle/>
-          <a:p>
+              <a:t>  —  both decisions: the reject-and-loop call (constructions #2/#3 only — construction #1 never loops), *and* the final structured Answer</a:t>
+            </a:r>
+            <a:endParaRPr lang="en-US" sz="1600" dirty="0"/>
+          </a:p>
+          <a:p>
+            <a:pPr marL="342900" indent="-342900">
+              <a:spcAft>
+                <a:spcPts val="1000"/>
+              </a:spcAft>
+              <a:buSzPct val="100000"/>
+              <a:buChar char="•"/>
+            </a:pPr>
+            <a:r>
+              <a:rPr lang="en-US" sz="1600" b="1" dirty="0">
+                <a:solidFill>
+                  <a:srgbClr val="1E2761"/>
+                </a:solidFill>
+                <a:latin typeface="Calibri" pitchFamily="34" charset="0"/>
+                <a:ea typeface="Calibri" pitchFamily="34" charset="-122"/>
+                <a:cs typeface="Calibri" pitchFamily="34" charset="-120"/>
+              </a:rPr>
+              <a:t>End-to-end task success</a:t>
+            </a:r>
             <a:pPr indent="0" marL="0">
-              <a:buNone/>
-            </a:pPr>
-            <a:r>
-              <a:rPr lang="en-US" sz="1500" b="1" dirty="0">
+              <a:spcAft>
+                <a:spcPts val="1000"/>
+              </a:spcAft>
+              <a:buNone/>
+            </a:pPr>
+            <a:r>
+              <a:rPr lang="en-US" sz="1600" dirty="0">
+                <a:solidFill>
+                  <a:srgbClr val="212121"/>
+                </a:solidFill>
+                <a:latin typeface="Calibri" pitchFamily="34" charset="0"/>
+                <a:ea typeface="Calibri" pitchFamily="34" charset="-122"/>
+                <a:cs typeface="Calibri" pitchFamily="34" charset="-120"/>
+              </a:rPr>
+              <a:t>  —  did the whole workflow produce a usable answer? (this lab's actual implemented metric: approved / not approved / guardrail tripped)</a:t>
+            </a:r>
+            <a:endParaRPr lang="en-US" sz="1600" dirty="0"/>
+          </a:p>
+          <a:p>
+            <a:pPr marL="342900" indent="-342900">
+              <a:spcAft>
+                <a:spcPts val="1000"/>
+              </a:spcAft>
+              <a:buSzPct val="100000"/>
+              <a:buChar char="•"/>
+            </a:pPr>
+            <a:r>
+              <a:rPr lang="en-US" sz="1600" b="1" dirty="0">
                 <a:solidFill>
                   <a:srgbClr val="1E2761"/>
                 </a:solidFill>
@@ -7515,40 +7945,16 @@
                 <a:ea typeface="Calibri" pitchFamily="34" charset="-122"/>
                 <a:cs typeface="Calibri" pitchFamily="34" charset="-120"/>
               </a:rPr>
-              <a:t>A Foundry judge model deployment</a:t>
-            </a:r>
-            <a:endParaRPr lang="en-US" sz="1500" dirty="0"/>
-          </a:p>
-        </p:txBody>
-      </p:sp>
-      <p:sp>
-        <p:nvSpPr>
-          <p:cNvPr id="13" name="Text 11"/>
-          <p:cNvSpPr/>
-          <p:nvPr/>
-        </p:nvSpPr>
-        <p:spPr>
-          <a:xfrm>
-            <a:off x="512064" y="3438144"/>
-            <a:ext cx="3813048" cy="1033272"/>
-          </a:xfrm>
-          <a:prstGeom prst="rect">
-            <a:avLst/>
-          </a:prstGeom>
-          <a:noFill/>
-          <a:ln/>
-        </p:spPr>
-        <p:txBody>
-          <a:bodyPr wrap="square" lIns="0" tIns="0" rIns="0" bIns="0" rtlCol="0" anchor="t">
-            <a:normAutofit/>
-          </a:bodyPr>
-          <a:lstStyle/>
-          <a:p>
+              <a:t>Cost per successful outcome</a:t>
+            </a:r>
             <a:pPr indent="0" marL="0">
-              <a:buNone/>
-            </a:pPr>
-            <a:r>
-              <a:rPr lang="en-US" sz="1150" dirty="0">
+              <a:spcAft>
+                <a:spcPts val="1000"/>
+              </a:spcAft>
+              <a:buNone/>
+            </a:pPr>
+            <a:r>
+              <a:rPr lang="en-US" sz="1600" dirty="0">
                 <a:solidFill>
                   <a:srgbClr val="212121"/>
                 </a:solidFill>
@@ -7556,124 +7962,15 @@
                 <a:ea typeface="Calibri" pitchFamily="34" charset="-122"/>
                 <a:cs typeface="Calibri" pitchFamily="34" charset="-120"/>
               </a:rPr>
-              <a:t>for cost/trajectory evaluation</a:t>
-            </a:r>
-            <a:endParaRPr lang="en-US" sz="1150" dirty="0"/>
-          </a:p>
-        </p:txBody>
-      </p:sp>
-      <p:sp>
-        <p:nvSpPr>
-          <p:cNvPr id="14" name="Shape 12"/>
-          <p:cNvSpPr/>
-          <p:nvPr/>
-        </p:nvSpPr>
-        <p:spPr>
-          <a:xfrm>
-            <a:off x="4672584" y="2935224"/>
-            <a:ext cx="4105656" cy="1655064"/>
-          </a:xfrm>
-          <a:prstGeom prst="roundRect">
-            <a:avLst>
-              <a:gd name="adj" fmla="val 3315"/>
-            </a:avLst>
-          </a:prstGeom>
-          <a:solidFill>
-            <a:srgbClr val="F3F4F6"/>
-          </a:solidFill>
-          <a:ln w="10160">
-            <a:solidFill>
-              <a:srgbClr val="D1D5DB"/>
-            </a:solidFill>
-            <a:prstDash val="solid"/>
-          </a:ln>
-        </p:spPr>
-      </p:sp>
-      <p:sp>
-        <p:nvSpPr>
-          <p:cNvPr id="15" name="Text 13"/>
-          <p:cNvSpPr/>
-          <p:nvPr/>
-        </p:nvSpPr>
-        <p:spPr>
-          <a:xfrm>
-            <a:off x="4818888" y="3054096"/>
-            <a:ext cx="3813048" cy="310896"/>
-          </a:xfrm>
-          <a:prstGeom prst="rect">
-            <a:avLst/>
-          </a:prstGeom>
-          <a:noFill/>
-          <a:ln/>
-        </p:spPr>
-        <p:txBody>
-          <a:bodyPr wrap="square" lIns="0" tIns="0" rIns="0" bIns="0" rtlCol="0" anchor="ctr">
-            <a:normAutofit/>
-          </a:bodyPr>
-          <a:lstStyle/>
-          <a:p>
-            <a:pPr indent="0" marL="0">
-              <a:buNone/>
-            </a:pPr>
-            <a:r>
-              <a:rPr lang="en-US" sz="1500" b="1" dirty="0">
-                <a:solidFill>
-                  <a:srgbClr val="1E2761"/>
-                </a:solidFill>
-                <a:latin typeface="Calibri" pitchFamily="34" charset="0"/>
-                <a:ea typeface="Calibri" pitchFamily="34" charset="-122"/>
-                <a:cs typeface="Calibri" pitchFamily="34" charset="-120"/>
-              </a:rPr>
-              <a:t>(Optional stretch only)</a:t>
-            </a:r>
-            <a:endParaRPr lang="en-US" sz="1500" dirty="0"/>
-          </a:p>
-        </p:txBody>
-      </p:sp>
-      <p:sp>
-        <p:nvSpPr>
-          <p:cNvPr id="16" name="Text 14"/>
-          <p:cNvSpPr/>
-          <p:nvPr/>
-        </p:nvSpPr>
-        <p:spPr>
-          <a:xfrm>
-            <a:off x="4818888" y="3438144"/>
-            <a:ext cx="3813048" cy="1033272"/>
-          </a:xfrm>
-          <a:prstGeom prst="rect">
-            <a:avLst/>
-          </a:prstGeom>
-          <a:noFill/>
-          <a:ln/>
-        </p:spPr>
-        <p:txBody>
-          <a:bodyPr wrap="square" lIns="0" tIns="0" rIns="0" bIns="0" rtlCol="0" anchor="t">
-            <a:normAutofit/>
-          </a:bodyPr>
-          <a:lstStyle/>
-          <a:p>
-            <a:pPr indent="0" marL="0">
-              <a:buNone/>
-            </a:pPr>
-            <a:r>
-              <a:rPr lang="en-US" sz="1150" dirty="0">
-                <a:solidFill>
-                  <a:srgbClr val="212121"/>
-                </a:solidFill>
-                <a:latin typeface="Calibri" pitchFamily="34" charset="0"/>
-                <a:ea typeface="Calibri" pitchFamily="34" charset="-122"/>
-                <a:cs typeface="Calibri" pitchFamily="34" charset="-120"/>
-              </a:rPr>
-              <a:t>Day 3's Azure DevOps MCP path, for the Ticket agent</a:t>
-            </a:r>
-            <a:endParaRPr lang="en-US" sz="1150" dirty="0"/>
-          </a:p>
-        </p:txBody>
-      </p:sp>
-      <p:sp>
-        <p:nvSpPr>
-          <p:cNvPr id="17" name="Shape 15"/>
+              <a:t>  —  tokens summed across every agent, divided by successful cases (Module 5 names this; not implemented in this lab's Part C — a real extension, flagged rather than assumed)</a:t>
+            </a:r>
+            <a:endParaRPr lang="en-US" sz="1600" dirty="0"/>
+          </a:p>
+        </p:txBody>
+      </p:sp>
+      <p:sp>
+        <p:nvSpPr>
+          <p:cNvPr id="6" name="Shape 4"/>
           <p:cNvSpPr/>
           <p:nvPr/>
         </p:nvSpPr>
@@ -7696,7 +7993,7 @@
       </p:sp>
       <p:sp>
         <p:nvSpPr>
-          <p:cNvPr id="18" name="Text 16"/>
+          <p:cNvPr id="7" name="Text 5"/>
           <p:cNvSpPr/>
           <p:nvPr/>
         </p:nvSpPr>
@@ -7729,7 +8026,7 @@
                 <a:ea typeface="Calibri" pitchFamily="34" charset="-122"/>
                 <a:cs typeface="Calibri" pitchFamily="34" charset="-120"/>
               </a:rPr>
-              <a:t>Source: https://learn.microsoft.com/en-us/agent-framework/agents/evaluation</a:t>
+              <a:t>Source: https://learn.microsoft.com/azure/foundry/concepts/evaluation-evaluators/agent-evaluators</a:t>
             </a:r>
             <a:endParaRPr lang="en-US" sz="820" dirty="0"/>
           </a:p>

--- a/decks/day4/module-7-lab-kickoff.pptx
+++ b/decks/day4/module-7-lab-kickoff.pptx
@@ -513,7 +513,7 @@
           <a:p>
             <a:r>
               <a:rPr lang="en-US" dirty="0"/>
-              <a:t>• This lab composes every module from today: workflow primitives (3), orchestration patterns (2), memory contracts (4), and a trajectory evaluation with a cost metric (5), plus the guardrail from Module 6 — now a required deliverable, not a stretch goal. Note for presenters: the lab's own part order (basics, then orchestrations, then eval) deliberately runs opposite to today's lecture order (orchestration patterns in Module 2, before workflow fundamentals in Module 3) — build it by hand first, then appreciate the shortcut, is the lab's own teaching sequence.
+              <a:t>• This lab composes every module from today: workflow primitives (3), orchestration patterns (2), memory contracts (4), and a trajectory evaluation with a cost metric (5), plus the guardrail from Module 6 — now a required deliverable, not a stretch goal. Note for presenters: the lab's own part order (basics, then orchestrations, then eval) deliberately runs opposite to today's lecture order (orchestration patterns in Module 2, before workflow fundamentals in Module 3) — build it by hand first, then appreciate the shortcut, is the lab's own teaching sequence. Part naming matches labs/day4/README.md exactly: A, B1, B2, C — not the three-part A/B/C shape an earlier lab draft used.
 • GROUNDING SOURCE: https://learn.microsoft.com/en-us/agent-framework/concepts/workflows/
 • GROUNDING SOURCE: https://learn.microsoft.com/azure/foundry/concepts/evaluation-evaluators/agent-evaluators</a:t>
             </a:r>
@@ -603,7 +603,7 @@
           <a:p>
             <a:r>
               <a:rPr lang="en-US" dirty="0"/>
-              <a:t>• Mirrors Day 3 Module 9's prerequisites-card style. The ADO MCP path is only needed for the optional Ticket agent stretch, not the core lab.
+              <a:t>• Mirrors Day 3 Module 9's prerequisites-card style. Matches labs/day4/README.md's own prerequisites list, including the Foundry judge model being for the optional --foundry cloud pass only — the core comparison (pass rate, cost/success, revisions) is local and deterministic, no judge model required. The ADO MCP path is only needed for the optional Ticket agent stretch, not the core lab.
 • GROUNDING SOURCE: https://learn.microsoft.com/en-us/agent-framework/agents/evaluation</a:t>
             </a:r>
             <a:endParaRPr lang="en-US" dirty="0"/>
@@ -692,7 +692,7 @@
           <a:p>
             <a:r>
               <a:rPr lang="en-US" dirty="0"/>
-              <a:t>• Reworded for the workflow-basics/orchestrations/evaluate structure — the budget guardrail is a required deliverable for BOTH orchestration constructions in Part B, not a stretch goal.
+              <a:t>• Reworded for the A/B1/B2/C structure — each row now matches labs/day4/README.md's own per-part "Definition of done" bullets almost verbatim, rather than paraphrasing a since-superseded 3-part (A/B/C) shape. The Part B2 guardrail is a required deliverable, not a stretch goal.
 • GROUNDING SOURCE: https://learn.microsoft.com/en-us/agent-framework/agents/evaluation
 • GROUNDING SOURCE: https://learn.microsoft.com/en-us/agent-framework/agents/looping</a:t>
             </a:r>
@@ -782,7 +782,7 @@
           <a:p>
             <a:r>
               <a:rPr lang="en-US" dirty="0"/>
-              <a:t>• Close the core Day 4 live time here. Learners have every primitive from Modules 1-6 before starting the lab.
+              <a:t>• Close the core Day 4 live time here. Learners have every primitive from Modules 1-6 before starting the lab. Reworded for the A/B1/B2/C structure — Part B2's guardrail is test-driven, a distinct authoring mode from Parts A/B1/C's TODOs, worth naming explicitly.
 • GROUNDING SOURCE: https://learn.microsoft.com/en-us/agent-framework/concepts/workflows/
 • GROUNDING SOURCE: https://learn.microsoft.com/azure/foundry/concepts/evaluation-evaluators/agent-evaluators</a:t>
             </a:r>
@@ -872,7 +872,7 @@
           <a:p>
             <a:r>
               <a:rPr lang="en-US" dirty="0"/>
-              <a:t>• Same Planner/Retriever/Critic roles across all three parts — the roles don't change, only what runs them does. The Summarizer role from an earlier draft was folded into the Critic to keep this lab digestible — the Critic both judges and produces the final answer.
+              <a:t>• Same Planner/Retriever/Critic roles across all four parts — the roles don't change, only what runs them does. The Summarizer role from an earlier draft was folded into the Critic to keep this lab digestible — the Critic both judges and produces the final answer.
 • GROUNDING SOURCE: https://learn.microsoft.com/en-us/agent-framework/concepts/workflows/</a:t>
             </a:r>
             <a:endParaRPr lang="en-US" dirty="0"/>
@@ -961,8 +961,8 @@
           <a:p>
             <a:r>
               <a:rPr lang="en-US" dirty="0"/>
-              <a:t>• This is deliberately NOT SequentialBuilder — that's Part B's shortcut. Part A wires the same three roles by hand with WorkflowBuilder + add_edge, straight-line, no conditional edges, so the graph primitives are visible before the prebuilt templates hide them. output_from is the one detail worth dwelling on: every AgentExecutor yields its own response as output by default, so without output_from=[critic] this 3-executor graph would produce three outputs, not one.
-• GROUNDING SOURCE: https://learn.microsoft.com/en-us/agent-framework/concepts/workflows/executors</a:t>
+              <a:t>• Matches labs/day4/python/part_a_sequential.py's own docstring almost verbatim -- that file IS the ceiling narrative, not a paraphrase of it. No golden set in this part; that's Part C's job once there's something worth comparing (evaluate.py's docstring: "no scoring in this part").
+• GROUNDING SOURCE: https://learn.microsoft.com/en-us/agent-framework/workflows/orchestrations/sequential</a:t>
             </a:r>
             <a:endParaRPr lang="en-US" dirty="0"/>
           </a:p>
@@ -1050,7 +1050,7 @@
           <a:p>
             <a:r>
               <a:rPr lang="en-US" dirty="0"/>
-              <a:t>• Construction #1 (Sequential) is the shortcut for exactly what Part A built by hand — same limitation, one line of code. Construction #2 fixes it. Rebuilding with a custom WorkflowBuilder graph is a genuine rewrite of the orchestration plumbing, not a small diff on construction #1's code — set that expectation directly with attendees.
+              <a:t>• Rebuilding with a custom WorkflowBuilder graph is a genuine rewrite of the orchestration plumbing, not a small diff on Part A's code — set that expectation directly with attendees, per part_b_graph.py's own docstring ("This is a genuine rewrite, not a diff on Part A").
 • GROUNDING SOURCE: https://learn.microsoft.com/en-us/agent-framework/workflows/orchestrations/sequential
 • GROUNDING SOURCE: https://learn.microsoft.com/en-us/agent-framework/concepts/workflows/edges</a:t>
             </a:r>
@@ -1140,7 +1140,7 @@
           <a:p>
             <a:r>
               <a:rPr lang="en-US" dirty="0"/>
-              <a:t>• GroupChatBuilder's orchestrator_agent parameter is a real Agent, not a plain function — it decides who speaks next by reading the shared conversation, not by evaluating a Python condition. Participants here are plain Agent instances, not AgentExecutor-wrapped like construction #2 — confirmed against the framework's own Group Chat tutorial and Python sample. This is a genuine third implementation, not a one-line pattern swap.
+              <a:t>• GroupChatBuilder's orchestrator_agent parameter is a real Agent, not a plain function — it decides who speaks next by reading the shared conversation, not by evaluating a Python condition. Matches part_c_group_chat.py's own docstring and TODO comments, including the termination_condition example (8 assistant turns). Card titles kept short on purpose — longer titles here used to overflow into the body text below (a real rendering bug in addCard, fixed at the theme level for every deck, not just worked around by shortening these).
 • GROUNDING SOURCE: https://learn.microsoft.com/en-us/agent-framework/workflows/orchestrations/group-chat</a:t>
             </a:r>
             <a:endParaRPr lang="en-US" dirty="0"/>
@@ -1229,7 +1229,7 @@
           <a:p>
             <a:r>
               <a:rPr lang="en-US" dirty="0"/>
-              <a:t>• Unlike AgentLoopMiddleware's built-in max_iterations, neither construction #2's conditional edge nor construction #3's orchestrator has an automatic cap — both loops can genuinely run forever if the model never approves. This is a correctness requirement for BOTH constructions, not a stretch goal, and it's the concrete reason Day 5's "budget guardrails revisited" module has something real to point back at.
+              <a:t>• Grounded directly in tests/test_guardrail.py's own docstring and the three tests it specifies. MAX_REVISIONS=2 and the capped=True field name are the lab's actual code, not illustrative — confirmed against workflow_nodes.py and the test file.
 • GROUNDING SOURCE: https://learn.microsoft.com/en-us/agent-framework/agents/looping</a:t>
             </a:r>
             <a:endParaRPr lang="en-US" dirty="0"/>
@@ -1318,7 +1318,7 @@
           <a:p>
             <a:r>
               <a:rPr lang="en-US" dirty="0"/>
-              <a:t>• Part C builds nothing new — it imports Part B's three build_workflow_*() functions directly. This is where Module 5's evaluation anchor actually lives in the lab, instead of being smeared across every part.
+              <a:t>• evaluate.py imports build_sequential_workflow / build_graph_workflow / build_group_chat_workflow from three separate files (part_a_sequential.py, part_b_graph.py, part_c_group_chat.py) — one function per part, not "Part B's three functions", which was this slide's old (inaccurate) framing. The comparison table's actual columns, per evaluate.py's own report() function, are pass rate, cost/success, and a raw revisions count — there is no separate "guardrail-trip rate" column.
 • GROUNDING SOURCE: https://learn.microsoft.com/en-us/agent-framework/agents/evaluation</a:t>
             </a:r>
             <a:endParaRPr lang="en-US" dirty="0"/>
@@ -1407,7 +1407,7 @@
           <a:p>
             <a:r>
               <a:rPr lang="en-US" dirty="0"/>
-              <a:t>• Same discipline as Day 3 Part E, at workflow scale — Module 5's own framing. Building it once and reusing it for Part C's comparison is what makes the progression meaningful instead of three disconnected exercises. Part A and Part B's own demos use one hand-picked question each, not the golden set — the golden set's job is Part C's statistical comparison.
+              <a:t>• Same discipline as Day 3 Part E, at workflow scale — Module 5's own framing. Matches the lab's own current golden_set.jsonl and README exactly (8 cases across 4 branches) — updated from an earlier ~15-question, 3-branch spec after the lab's restructure. Parts A and B1/B2's own demos use one hand-picked question each, not the golden set — the golden set's job is Part C's statistical comparison.
 • GROUNDING SOURCE: https://learn.microsoft.com/en-us/agent-framework/agents/evaluation</a:t>
             </a:r>
             <a:endParaRPr lang="en-US" dirty="0"/>
@@ -1496,7 +1496,7 @@
           <a:p>
             <a:r>
               <a:rPr lang="en-US" dirty="0"/>
-              <a:t>• The lab's own definition of what to measure, straight from the locked spec — plan quality, retrieval recall, and BOTH of the Critic's decisions (the reject-and-loop call and the final Answer), not just the final output. This lab's actual implemented scope stops at approved/rejected/guardrail-tripped counting — cost-per-outcome and an LLM-judged trajectory score are named here as what a fuller harness would add, flagged explicitly as not implemented, not silently assumed.
+              <a:t>• Rewritten to match evaluate.py's own "WHAT IT MEASURES" docstring exactly — all four of these ARE implemented and printed, deterministic and local, no judge model required for the core comparison. The previous version of this slide claimed cost-per-outcome was "not implemented" — it is; PartResult.cost_per_success is real, working code. --foundry is an optional extra pass that also sends the same trajectories to Foundry's cloud evaluators.
 • GROUNDING SOURCE: https://learn.microsoft.com/azure/foundry/concepts/evaluation-evaluators/agent-evaluators</a:t>
             </a:r>
             <a:endParaRPr lang="en-US" dirty="0"/>
@@ -1981,7 +1981,7 @@
                 <a:ea typeface="Calibri" pitchFamily="34" charset="-122"/>
                 <a:cs typeface="Calibri" pitchFamily="34" charset="-120"/>
               </a:rPr>
-              <a:t>Three parts, one scenario — workflow basics, then orchestrations, then evaluation</a:t>
+              <a:t>Four parts, one scenario — Sequential's ceiling, the graph that fixes it, bound the loop, then measure Group Chat against both</a:t>
             </a:r>
             <a:endParaRPr lang="en-US" sz="1800" dirty="0"/>
           </a:p>
@@ -2260,16 +2260,16 @@
         <p:spPr>
           <a:xfrm>
             <a:off x="512064" y="1197864"/>
-            <a:ext cx="3813048" cy="310896"/>
-          </a:xfrm>
-          <a:prstGeom prst="rect">
-            <a:avLst/>
-          </a:prstGeom>
-          <a:noFill/>
-          <a:ln/>
-        </p:spPr>
-        <p:txBody>
-          <a:bodyPr wrap="square" lIns="0" tIns="0" rIns="0" bIns="0" rtlCol="0" anchor="ctr">
+            <a:ext cx="3813048" cy="311277"/>
+          </a:xfrm>
+          <a:prstGeom prst="rect">
+            <a:avLst/>
+          </a:prstGeom>
+          <a:noFill/>
+          <a:ln/>
+        </p:spPr>
+        <p:txBody>
+          <a:bodyPr wrap="square" lIns="0" tIns="0" rIns="0" bIns="0" rtlCol="0" anchor="t">
             <a:normAutofit/>
           </a:bodyPr>
           <a:lstStyle/>
@@ -2300,8 +2300,8 @@
         </p:nvSpPr>
         <p:spPr>
           <a:xfrm>
-            <a:off x="512064" y="1581912"/>
-            <a:ext cx="3813048" cy="1033272"/>
+            <a:off x="512064" y="1564005"/>
+            <a:ext cx="3813048" cy="1078611"/>
           </a:xfrm>
           <a:prstGeom prst="rect">
             <a:avLst/>
@@ -2369,16 +2369,16 @@
         <p:spPr>
           <a:xfrm>
             <a:off x="4818888" y="1197864"/>
-            <a:ext cx="3813048" cy="310896"/>
-          </a:xfrm>
-          <a:prstGeom prst="rect">
-            <a:avLst/>
-          </a:prstGeom>
-          <a:noFill/>
-          <a:ln/>
-        </p:spPr>
-        <p:txBody>
-          <a:bodyPr wrap="square" lIns="0" tIns="0" rIns="0" bIns="0" rtlCol="0" anchor="ctr">
+            <a:ext cx="3813048" cy="311277"/>
+          </a:xfrm>
+          <a:prstGeom prst="rect">
+            <a:avLst/>
+          </a:prstGeom>
+          <a:noFill/>
+          <a:ln/>
+        </p:spPr>
+        <p:txBody>
+          <a:bodyPr wrap="square" lIns="0" tIns="0" rIns="0" bIns="0" rtlCol="0" anchor="t">
             <a:normAutofit/>
           </a:bodyPr>
           <a:lstStyle/>
@@ -2409,8 +2409,8 @@
         </p:nvSpPr>
         <p:spPr>
           <a:xfrm>
-            <a:off x="4818888" y="1581912"/>
-            <a:ext cx="3813048" cy="1033272"/>
+            <a:off x="4818888" y="1564005"/>
+            <a:ext cx="3813048" cy="1078611"/>
           </a:xfrm>
           <a:prstGeom prst="rect">
             <a:avLst/>
@@ -2478,48 +2478,7 @@
         <p:spPr>
           <a:xfrm>
             <a:off x="512064" y="3054096"/>
-            <a:ext cx="3813048" cy="310896"/>
-          </a:xfrm>
-          <a:prstGeom prst="rect">
-            <a:avLst/>
-          </a:prstGeom>
-          <a:noFill/>
-          <a:ln/>
-        </p:spPr>
-        <p:txBody>
-          <a:bodyPr wrap="square" lIns="0" tIns="0" rIns="0" bIns="0" rtlCol="0" anchor="ctr">
-            <a:normAutofit/>
-          </a:bodyPr>
-          <a:lstStyle/>
-          <a:p>
-            <a:pPr indent="0" marL="0">
-              <a:buNone/>
-            </a:pPr>
-            <a:r>
-              <a:rPr lang="en-US" sz="1500" b="1" dirty="0">
-                <a:solidFill>
-                  <a:srgbClr val="1E2761"/>
-                </a:solidFill>
-                <a:latin typeface="Calibri" pitchFamily="34" charset="0"/>
-                <a:ea typeface="Calibri" pitchFamily="34" charset="-122"/>
-                <a:cs typeface="Calibri" pitchFamily="34" charset="-120"/>
-              </a:rPr>
-              <a:t>A Foundry judge model deployment</a:t>
-            </a:r>
-            <a:endParaRPr lang="en-US" sz="1500" dirty="0"/>
-          </a:p>
-        </p:txBody>
-      </p:sp>
-      <p:sp>
-        <p:nvSpPr>
-          <p:cNvPr id="13" name="Text 11"/>
-          <p:cNvSpPr/>
-          <p:nvPr/>
-        </p:nvSpPr>
-        <p:spPr>
-          <a:xfrm>
-            <a:off x="512064" y="3438144"/>
-            <a:ext cx="3813048" cy="1033272"/>
+            <a:ext cx="3813048" cy="311277"/>
           </a:xfrm>
           <a:prstGeom prst="rect">
             <a:avLst/>
@@ -2537,6 +2496,47 @@
               <a:buNone/>
             </a:pPr>
             <a:r>
+              <a:rPr lang="en-US" sz="1500" b="1" dirty="0">
+                <a:solidFill>
+                  <a:srgbClr val="1E2761"/>
+                </a:solidFill>
+                <a:latin typeface="Calibri" pitchFamily="34" charset="0"/>
+                <a:ea typeface="Calibri" pitchFamily="34" charset="-122"/>
+                <a:cs typeface="Calibri" pitchFamily="34" charset="-120"/>
+              </a:rPr>
+              <a:t>A Foundry judge model deployment</a:t>
+            </a:r>
+            <a:endParaRPr lang="en-US" sz="1500" dirty="0"/>
+          </a:p>
+        </p:txBody>
+      </p:sp>
+      <p:sp>
+        <p:nvSpPr>
+          <p:cNvPr id="13" name="Text 11"/>
+          <p:cNvSpPr/>
+          <p:nvPr/>
+        </p:nvSpPr>
+        <p:spPr>
+          <a:xfrm>
+            <a:off x="512064" y="3420237"/>
+            <a:ext cx="3813048" cy="1078611"/>
+          </a:xfrm>
+          <a:prstGeom prst="rect">
+            <a:avLst/>
+          </a:prstGeom>
+          <a:noFill/>
+          <a:ln/>
+        </p:spPr>
+        <p:txBody>
+          <a:bodyPr wrap="square" lIns="0" tIns="0" rIns="0" bIns="0" rtlCol="0" anchor="t">
+            <a:normAutofit/>
+          </a:bodyPr>
+          <a:lstStyle/>
+          <a:p>
+            <a:pPr indent="0" marL="0">
+              <a:buNone/>
+            </a:pPr>
+            <a:r>
               <a:rPr lang="en-US" sz="1150" dirty="0">
                 <a:solidFill>
                   <a:srgbClr val="212121"/>
@@ -2545,7 +2545,7 @@
                 <a:ea typeface="Calibri" pitchFamily="34" charset="-122"/>
                 <a:cs typeface="Calibri" pitchFamily="34" charset="-120"/>
               </a:rPr>
-              <a:t>for cost/trajectory evaluation</a:t>
+              <a:t>optional: only for evaluate.py --foundry's cloud evaluator pass; the core comparison is local and deterministic</a:t>
             </a:r>
             <a:endParaRPr lang="en-US" sz="1150" dirty="0"/>
           </a:p>
@@ -2587,16 +2587,16 @@
         <p:spPr>
           <a:xfrm>
             <a:off x="4818888" y="3054096"/>
-            <a:ext cx="3813048" cy="310896"/>
-          </a:xfrm>
-          <a:prstGeom prst="rect">
-            <a:avLst/>
-          </a:prstGeom>
-          <a:noFill/>
-          <a:ln/>
-        </p:spPr>
-        <p:txBody>
-          <a:bodyPr wrap="square" lIns="0" tIns="0" rIns="0" bIns="0" rtlCol="0" anchor="ctr">
+            <a:ext cx="3813048" cy="311277"/>
+          </a:xfrm>
+          <a:prstGeom prst="rect">
+            <a:avLst/>
+          </a:prstGeom>
+          <a:noFill/>
+          <a:ln/>
+        </p:spPr>
+        <p:txBody>
+          <a:bodyPr wrap="square" lIns="0" tIns="0" rIns="0" bIns="0" rtlCol="0" anchor="t">
             <a:normAutofit/>
           </a:bodyPr>
           <a:lstStyle/>
@@ -2627,8 +2627,8 @@
         </p:nvSpPr>
         <p:spPr>
           <a:xfrm>
-            <a:off x="4818888" y="3438144"/>
-            <a:ext cx="3813048" cy="1033272"/>
+            <a:off x="4818888" y="3420237"/>
+            <a:ext cx="3813048" cy="1078611"/>
           </a:xfrm>
           <a:prstGeom prst="rect">
             <a:avLst/>
@@ -3108,7 +3108,7 @@
                           <a:ea typeface="Calibri" pitchFamily="34" charset="-122"/>
                           <a:cs typeface="Calibri" pitchFamily="34" charset="-120"/>
                         </a:rPr>
-                        <a:t>The graph runs end-to-end and prints the Critic's verdict; the Mermaid diagram matches the graph</a:t>
+                        <a:t>Both runs complete and print a trace you can read; you can explain why Run 2 ends without fixing itself</a:t>
                       </a:r>
                       <a:endParaRPr lang="en-US" sz="950" dirty="0">
                         <a:latin typeface="Calibri" charset="0"/>
@@ -3178,7 +3178,7 @@
                           <a:ea typeface="Calibri" pitchFamily="34" charset="-122"/>
                           <a:cs typeface="Calibri" pitchFamily="34" charset="-120"/>
                         </a:rPr>
-                        <a:t>Part B</a:t>
+                        <a:t>Part B1</a:t>
                       </a:r>
                       <a:endParaRPr lang="en-US" sz="950" dirty="0">
                         <a:latin typeface="Calibri" charset="0"/>
@@ -3246,7 +3246,7 @@
                           <a:ea typeface="Calibri" pitchFamily="34" charset="-122"/>
                           <a:cs typeface="Calibri" pitchFamily="34" charset="-120"/>
                         </a:rPr>
-                        <a:t>All three constructions run on the same hard question; constructions #2/#3 both recover from construction #1's limitation</a:t>
+                        <a:t>The graph runs end-to-end and the Mermaid diagram shows the loop-back edge; you can point to the one line that closes the cycle</a:t>
                       </a:r>
                       <a:endParaRPr lang="en-US" sz="950" dirty="0">
                         <a:latin typeface="Calibri" charset="0"/>
@@ -3316,7 +3316,7 @@
                           <a:ea typeface="Calibri" pitchFamily="34" charset="-122"/>
                           <a:cs typeface="Calibri" pitchFamily="34" charset="-120"/>
                         </a:rPr>
-                        <a:t>Part B guardrail</a:t>
+                        <a:t>Part B2</a:t>
                       </a:r>
                       <a:endParaRPr lang="en-US" sz="950" dirty="0">
                         <a:latin typeface="Calibri" charset="0"/>
@@ -3384,7 +3384,7 @@
                           <a:ea typeface="Calibri" pitchFamily="34" charset="-122"/>
                           <a:cs typeface="Calibri" pitchFamily="34" charset="-120"/>
                         </a:rPr>
-                        <a:t>Triggers cleanly in a stress test for BOTH constructions #2 and #3 — required, not stretch</a:t>
+                        <a:t>All of tests/test_guardrail.py passes — required, not stretch</a:t>
                       </a:r>
                       <a:endParaRPr lang="en-US" sz="950" dirty="0">
                         <a:latin typeface="Calibri" charset="0"/>
@@ -3522,7 +3522,7 @@
                           <a:ea typeface="Calibri" pitchFamily="34" charset="-122"/>
                           <a:cs typeface="Calibri" pitchFamily="34" charset="-120"/>
                         </a:rPr>
-                        <a:t>Golden set runs against all three constructions; a comparison table reports approved rate side by side</a:t>
+                        <a:t>The GroupChatBuilder construction runs end-to-end with a working termination bound; you've run the 3-repetition comparison</a:t>
                       </a:r>
                       <a:endParaRPr lang="en-US" sz="950" dirty="0">
                         <a:latin typeface="Calibri" charset="0"/>
@@ -3660,7 +3660,7 @@
                           <a:ea typeface="Calibri" pitchFamily="34" charset="-122"/>
                           <a:cs typeface="Calibri" pitchFamily="34" charset="-120"/>
                         </a:rPr>
-                        <a:t>Which construction fit best, and why — committed to the repo</a:t>
+                        <a:t>Which construction you'd actually ship, and why — committed to the repo</a:t>
                       </a:r>
                       <a:endParaRPr lang="en-US" sz="950" dirty="0">
                         <a:latin typeface="Calibri" charset="0"/>
@@ -4171,7 +4171,7 @@
                 <a:ea typeface="Calibri" pitchFamily="34" charset="-122"/>
                 <a:cs typeface="Calibri" pitchFamily="34" charset="-120"/>
               </a:rPr>
-              <a:t>You build a workflow by hand before you use the prebuilt shortcut — Part A first, Part B second, deliberately in that order.</a:t>
+              <a:t>You start with the fastest correct orchestration and find its ceiling before you fix it — Part A's SequentialBuilder, then Part B1's custom graph, deliberately in that order.</a:t>
             </a:r>
             <a:endParaRPr lang="en-US" sz="1300" dirty="0"/>
           </a:p>
@@ -4421,7 +4421,7 @@
                 <a:ea typeface="Calibri" pitchFamily="34" charset="-122"/>
                 <a:cs typeface="Calibri" pitchFamily="34" charset="-120"/>
               </a:rPr>
-              <a:t>You measure every construction against the same golden set in one dedicated evaluation pass, so the differences you see are real, not noise.</a:t>
+              <a:t>You build the guardrail Module 6 argued for as a test-driven spec, not an afterthought — Part B2's failing test IS the requirement, required for both loops this lab can trigger.</a:t>
             </a:r>
             <a:endParaRPr lang="en-US" sz="1300" dirty="0"/>
           </a:p>
@@ -4546,7 +4546,7 @@
                 <a:ea typeface="Calibri" pitchFamily="34" charset="-122"/>
                 <a:cs typeface="Calibri" pitchFamily="34" charset="-120"/>
               </a:rPr>
-              <a:t>You build the guardrail Module 6 argued for — required for both fixes, because nothing else bounds either loop.</a:t>
+              <a:t>You measure every construction against the same golden set in one dedicated evaluation pass, so the differences you see are real, not noise.</a:t>
             </a:r>
             <a:endParaRPr lang="en-US" sz="1300" dirty="0"/>
           </a:p>
@@ -4810,7 +4810,7 @@
                 <a:ea typeface="Calibri" pitchFamily="34" charset="-122"/>
                 <a:cs typeface="Calibri" pitchFamily="34" charset="-120"/>
               </a:rPr>
-              <a:t>Part A — a raw WorkflowBuilder graph, by hand, no loop</a:t>
+              <a:t>Part A — SequentialBuilder's one-line shortcut, and the ceiling it runs into</a:t>
             </a:r>
             <a:endParaRPr lang="en-US" sz="1600" dirty="0"/>
           </a:p>
@@ -4831,7 +4831,7 @@
                 <a:ea typeface="Calibri" pitchFamily="34" charset="-122"/>
                 <a:cs typeface="Calibri" pitchFamily="34" charset="-120"/>
               </a:rPr>
-              <a:t>Part B — the SAME roles, three ways: SequentialBuilder's shortcut, a custom graph with a revision loop, GroupChatBuilder's alternative fix</a:t>
+              <a:t>Part B1 — a custom WorkflowBuilder graph with a conditional edge that fixes it</a:t>
             </a:r>
             <a:endParaRPr lang="en-US" sz="1600" dirty="0"/>
           </a:p>
@@ -4852,7 +4852,28 @@
                 <a:ea typeface="Calibri" pitchFamily="34" charset="-122"/>
                 <a:cs typeface="Calibri" pitchFamily="34" charset="-120"/>
               </a:rPr>
-              <a:t>Part C — the golden set against all three of Part B's constructions</a:t>
+              <a:t>Part B2 — bound that loop, test-driven: a failing spec is the requirement, not a TODO comment</a:t>
+            </a:r>
+            <a:endParaRPr lang="en-US" sz="1600" dirty="0"/>
+          </a:p>
+          <a:p>
+            <a:pPr lvl="1" marL="457200" indent="-228600">
+              <a:spcAft>
+                <a:spcPts val="1000"/>
+              </a:spcAft>
+              <a:buSzPct val="100000"/>
+              <a:buChar char="•"/>
+            </a:pPr>
+            <a:r>
+              <a:rPr lang="en-US" sz="1600" dirty="0">
+                <a:solidFill>
+                  <a:srgbClr val="212121"/>
+                </a:solidFill>
+                <a:latin typeface="Calibri" pitchFamily="34" charset="0"/>
+                <a:ea typeface="Calibri" pitchFamily="34" charset="-122"/>
+                <a:cs typeface="Calibri" pitchFamily="34" charset="-120"/>
+              </a:rPr>
+              <a:t>Part C — the same roles a third way, GroupChatBuilder, then measure all three constructions against one golden set</a:t>
             </a:r>
             <a:endParaRPr lang="en-US" sz="1600" dirty="0"/>
           </a:p>
@@ -4891,27 +4912,6 @@
                 <a:cs typeface="Calibri" pitchFamily="34" charset="-120"/>
               </a:rPr>
               <a:t>  —  a Ticket agent that files a real Azure DevOps work item (Day 3's MCP path) when the Critic flags a documentation gap</a:t>
-            </a:r>
-            <a:endParaRPr lang="en-US" sz="1600" dirty="0"/>
-          </a:p>
-          <a:p>
-            <a:pPr marL="342900" indent="-342900">
-              <a:spcAft>
-                <a:spcPts val="1000"/>
-              </a:spcAft>
-              <a:buSzPct val="100000"/>
-              <a:buChar char="•"/>
-            </a:pPr>
-            <a:r>
-              <a:rPr lang="en-US" sz="1600" dirty="0">
-                <a:solidFill>
-                  <a:srgbClr val="212121"/>
-                </a:solidFill>
-                <a:latin typeface="Calibri" pitchFamily="34" charset="0"/>
-                <a:ea typeface="Calibri" pitchFamily="34" charset="-122"/>
-                <a:cs typeface="Calibri" pitchFamily="34" charset="-120"/>
-              </a:rPr>
-              <a:t>Part C runs the same golden set against every construction from Part B — same questions, one comparison table</a:t>
             </a:r>
             <a:endParaRPr lang="en-US" sz="1600" dirty="0"/>
           </a:p>
@@ -5101,7 +5101,7 @@
               <a:buNone/>
             </a:pPr>
             <a:r>
-              <a:rPr lang="en-US" sz="2800" b="1" dirty="0">
+              <a:rPr lang="en-US" sz="2500" b="1" dirty="0">
                 <a:solidFill>
                   <a:srgbClr val="1E2761"/>
                 </a:solidFill>
@@ -5109,9 +5109,9 @@
                 <a:ea typeface="Calibri" pitchFamily="34" charset="-122"/>
                 <a:cs typeface="Calibri" pitchFamily="34" charset="-120"/>
               </a:rPr>
-              <a:t>Part A — Workflow basics</a:t>
-            </a:r>
-            <a:endParaRPr lang="en-US" sz="2800" dirty="0"/>
+              <a:t>Part A — Sequential, and its ceiling</a:t>
+            </a:r>
+            <a:endParaRPr lang="en-US" sz="2500" dirty="0"/>
           </a:p>
         </p:txBody>
       </p:sp>
@@ -5154,7 +5154,7 @@
                 <a:ea typeface="Calibri" pitchFamily="34" charset="-122"/>
                 <a:cs typeface="Calibri" pitchFamily="34" charset="-120"/>
               </a:rPr>
-              <a:t>Wrap Planner, Retriever, Critic in AgentExecutor; wire them straight-line with WorkflowBuilder + add_edge — no loop, no conditional edges yet</a:t>
+              <a:t>SequentialBuilder(participants=[planner, retriever, critic]).build() — the three roles, wired in one line</a:t>
             </a:r>
             <a:endParaRPr lang="en-US" sz="1600" dirty="0"/>
           </a:p>
@@ -5175,7 +5175,7 @@
                 <a:ea typeface="Calibri" pitchFamily="34" charset="-122"/>
                 <a:cs typeface="Calibri" pitchFamily="34" charset="-120"/>
               </a:rPr>
-              <a:t>output_from=[critic] designates the Critic's response as the ONE workflow output — without it, all three executors' responses would count</a:t>
+              <a:t>Run 1 (a single-document question): Planner, Retriever, Critic each run once, in order — clean</a:t>
             </a:r>
             <a:endParaRPr lang="en-US" sz="1600" dirty="0"/>
           </a:p>
@@ -5196,7 +5196,7 @@
                 <a:ea typeface="Calibri" pitchFamily="34" charset="-122"/>
                 <a:cs typeface="Calibri" pitchFamily="34" charset="-120"/>
               </a:rPr>
-              <a:t>Run it once on a single question; visualize the graph with WorkflowViz(workflow).to_mermaid() (Module 3's own visualization tooling)</a:t>
+              <a:t>Run 2 (a question spanning two documents): the Critic says approved=false with a precise reason — and the workflow ends anyway</a:t>
             </a:r>
             <a:endParaRPr lang="en-US" sz="1600" dirty="0"/>
           </a:p>
@@ -5217,7 +5217,7 @@
                 <a:ea typeface="Calibri" pitchFamily="34" charset="-122"/>
                 <a:cs typeface="Calibri" pitchFamily="34" charset="-120"/>
               </a:rPr>
-              <a:t>No golden set here — that's Part C's job. Part A is purely "how is a workflow actually built"</a:t>
+              <a:t>The ceiling: Sequential is forward-only — there's no edge from the Critic back to the Planner, so a correct rejection has nowhere to go. Part B1 fixes exactly this.</a:t>
             </a:r>
             <a:endParaRPr lang="en-US" sz="1600" dirty="0"/>
           </a:p>
@@ -5281,7 +5281,7 @@
                 <a:ea typeface="Calibri" pitchFamily="34" charset="-122"/>
                 <a:cs typeface="Calibri" pitchFamily="34" charset="-120"/>
               </a:rPr>
-              <a:t>Source: https://learn.microsoft.com/en-us/agent-framework/concepts/workflows/executors</a:t>
+              <a:t>Source: https://learn.microsoft.com/en-us/agent-framework/workflows/orchestrations/sequential</a:t>
             </a:r>
             <a:endParaRPr lang="en-US" sz="820" dirty="0"/>
           </a:p>
@@ -5415,7 +5415,7 @@
                 <a:ea typeface="Calibri" pitchFamily="34" charset="-122"/>
                 <a:cs typeface="Calibri" pitchFamily="34" charset="-120"/>
               </a:rPr>
-              <a:t>Part B — Orchestrations</a:t>
+              <a:t>Part B1 — The graph that fixes it</a:t>
             </a:r>
             <a:endParaRPr lang="en-US" sz="2800" dirty="0"/>
           </a:p>
@@ -5481,7 +5481,7 @@
                 <a:ea typeface="Consolas" pitchFamily="34" charset="-122"/>
                 <a:cs typeface="Consolas" pitchFamily="34" charset="-120"/>
               </a:rPr>
-              <a:t># Construction #1 — the shortcut for Part A's graph</a:t>
+              <a:t># Part A's shortcut — the ceiling this fixes</a:t>
             </a:r>
             <a:endParaRPr lang="en-US" sz="1280" dirty="0"/>
           </a:p>
@@ -5521,7 +5521,7 @@
                 <a:ea typeface="Consolas" pitchFamily="34" charset="-122"/>
                 <a:cs typeface="Consolas" pitchFamily="34" charset="-120"/>
               </a:rPr>
-              <a:t># Construction #2 — fixes its limitation</a:t>
+              <a:t># Part B1 — a custom graph with a loop-back edge</a:t>
             </a:r>
             <a:endParaRPr lang="en-US" sz="1280" dirty="0"/>
           </a:p>
@@ -5689,7 +5689,7 @@
                 <a:ea typeface="Calibri" pitchFamily="34" charset="-122"/>
                 <a:cs typeface="Calibri" pitchFamily="34" charset="-120"/>
               </a:rPr>
-              <a:t>Same limitation as Part A: Sequential's Critic runs once, with nowhere to send a rejected verdict. Construction #2 fixes it with a conditional loop back to the Planner.</a:t>
+              <a:t>Same three roles, same shape — one new edge. When the Critic doesn't approve, the graph now has somewhere to send that verdict: back to the Planner.</a:t>
             </a:r>
             <a:endParaRPr lang="en-US" sz="1300" dirty="0"/>
           </a:p>
@@ -5879,7 +5879,7 @@
               <a:buNone/>
             </a:pPr>
             <a:r>
-              <a:rPr lang="en-US" sz="2800" b="1" dirty="0">
+              <a:rPr lang="en-US" sz="2500" b="1" dirty="0">
                 <a:solidFill>
                   <a:srgbClr val="1E2761"/>
                 </a:solidFill>
@@ -5887,9 +5887,9 @@
                 <a:ea typeface="Calibri" pitchFamily="34" charset="-122"/>
                 <a:cs typeface="Calibri" pitchFamily="34" charset="-120"/>
               </a:rPr>
-              <a:t>Part B — Group Chat, a second fix</a:t>
-            </a:r>
-            <a:endParaRPr lang="en-US" sz="2800" dirty="0"/>
+              <a:t>Part C — Group Chat, and bound it too</a:t>
+            </a:r>
+            <a:endParaRPr lang="en-US" sz="2500" dirty="0"/>
           </a:p>
         </p:txBody>
       </p:sp>
@@ -5988,16 +5988,16 @@
         <p:spPr>
           <a:xfrm>
             <a:off x="896112" y="1335024"/>
-            <a:ext cx="1252728" cy="310896"/>
-          </a:xfrm>
-          <a:prstGeom prst="rect">
-            <a:avLst/>
-          </a:prstGeom>
-          <a:noFill/>
-          <a:ln/>
-        </p:spPr>
-        <p:txBody>
-          <a:bodyPr wrap="square" lIns="0" tIns="0" rIns="0" bIns="0" rtlCol="0" anchor="ctr">
+            <a:ext cx="1252728" cy="311277"/>
+          </a:xfrm>
+          <a:prstGeom prst="rect">
+            <a:avLst/>
+          </a:prstGeom>
+          <a:noFill/>
+          <a:ln/>
+        </p:spPr>
+        <p:txBody>
+          <a:bodyPr wrap="square" lIns="0" tIns="0" rIns="0" bIns="0" rtlCol="0" anchor="t">
             <a:normAutofit/>
           </a:bodyPr>
           <a:lstStyle/>
@@ -6028,8 +6028,8 @@
         </p:nvSpPr>
         <p:spPr>
           <a:xfrm>
-            <a:off x="512064" y="1719072"/>
-            <a:ext cx="1618488" cy="1527048"/>
+            <a:off x="512064" y="1701165"/>
+            <a:ext cx="1618488" cy="1572387"/>
           </a:xfrm>
           <a:prstGeom prst="rect">
             <a:avLst/>
@@ -6176,16 +6176,16 @@
         <p:spPr>
           <a:xfrm>
             <a:off x="3063240" y="1335024"/>
-            <a:ext cx="1252728" cy="310896"/>
-          </a:xfrm>
-          <a:prstGeom prst="rect">
-            <a:avLst/>
-          </a:prstGeom>
-          <a:noFill/>
-          <a:ln/>
-        </p:spPr>
-        <p:txBody>
-          <a:bodyPr wrap="square" lIns="0" tIns="0" rIns="0" bIns="0" rtlCol="0" anchor="ctr">
+            <a:ext cx="1252728" cy="549402"/>
+          </a:xfrm>
+          <a:prstGeom prst="rect">
+            <a:avLst/>
+          </a:prstGeom>
+          <a:noFill/>
+          <a:ln/>
+        </p:spPr>
+        <p:txBody>
+          <a:bodyPr wrap="square" lIns="0" tIns="0" rIns="0" bIns="0" rtlCol="0" anchor="t">
             <a:normAutofit/>
           </a:bodyPr>
           <a:lstStyle/>
@@ -6202,7 +6202,7 @@
                 <a:ea typeface="Calibri" pitchFamily="34" charset="-122"/>
                 <a:cs typeface="Calibri" pitchFamily="34" charset="-120"/>
               </a:rPr>
-              <a:t>Orchestrator decides, not Python</a:t>
+              <a:t>Orchestrator picks</a:t>
             </a:r>
             <a:endParaRPr lang="en-US" sz="1500" dirty="0"/>
           </a:p>
@@ -6216,8 +6216,8 @@
         </p:nvSpPr>
         <p:spPr>
           <a:xfrm>
-            <a:off x="2679192" y="1719072"/>
-            <a:ext cx="1618488" cy="1527048"/>
+            <a:off x="2679192" y="1939290"/>
+            <a:ext cx="1618488" cy="1334262"/>
           </a:xfrm>
           <a:prstGeom prst="rect">
             <a:avLst/>
@@ -6364,48 +6364,7 @@
         <p:spPr>
           <a:xfrm>
             <a:off x="5230368" y="1335024"/>
-            <a:ext cx="1252728" cy="310896"/>
-          </a:xfrm>
-          <a:prstGeom prst="rect">
-            <a:avLst/>
-          </a:prstGeom>
-          <a:noFill/>
-          <a:ln/>
-        </p:spPr>
-        <p:txBody>
-          <a:bodyPr wrap="square" lIns="0" tIns="0" rIns="0" bIns="0" rtlCol="0" anchor="ctr">
-            <a:normAutofit/>
-          </a:bodyPr>
-          <a:lstStyle/>
-          <a:p>
-            <a:pPr indent="0" marL="0">
-              <a:buNone/>
-            </a:pPr>
-            <a:r>
-              <a:rPr lang="en-US" sz="1500" b="1" dirty="0">
-                <a:solidFill>
-                  <a:srgbClr val="1E2761"/>
-                </a:solidFill>
-                <a:latin typeface="Calibri" pitchFamily="34" charset="0"/>
-                <a:ea typeface="Calibri" pitchFamily="34" charset="-122"/>
-                <a:cs typeface="Calibri" pitchFamily="34" charset="-120"/>
-              </a:rPr>
-              <a:t>Context Synchronization does the work revision_gate had to do manually</a:t>
-            </a:r>
-            <a:endParaRPr lang="en-US" sz="1500" dirty="0"/>
-          </a:p>
-        </p:txBody>
-      </p:sp>
-      <p:sp>
-        <p:nvSpPr>
-          <p:cNvPr id="21" name="Text 19"/>
-          <p:cNvSpPr/>
-          <p:nvPr/>
-        </p:nvSpPr>
-        <p:spPr>
-          <a:xfrm>
-            <a:off x="4846320" y="1719072"/>
-            <a:ext cx="1618488" cy="1527048"/>
+            <a:ext cx="1252728" cy="549402"/>
           </a:xfrm>
           <a:prstGeom prst="rect">
             <a:avLst/>
@@ -6423,6 +6382,47 @@
               <a:buNone/>
             </a:pPr>
             <a:r>
+              <a:rPr lang="en-US" sz="1500" b="1" dirty="0">
+                <a:solidFill>
+                  <a:srgbClr val="1E2761"/>
+                </a:solidFill>
+                <a:latin typeface="Calibri" pitchFamily="34" charset="0"/>
+                <a:ea typeface="Calibri" pitchFamily="34" charset="-122"/>
+                <a:cs typeface="Calibri" pitchFamily="34" charset="-120"/>
+              </a:rPr>
+              <a:t>Shared context</a:t>
+            </a:r>
+            <a:endParaRPr lang="en-US" sz="1500" dirty="0"/>
+          </a:p>
+        </p:txBody>
+      </p:sp>
+      <p:sp>
+        <p:nvSpPr>
+          <p:cNvPr id="21" name="Text 19"/>
+          <p:cNvSpPr/>
+          <p:nvPr/>
+        </p:nvSpPr>
+        <p:spPr>
+          <a:xfrm>
+            <a:off x="4846320" y="1939290"/>
+            <a:ext cx="1618488" cy="1334262"/>
+          </a:xfrm>
+          <a:prstGeom prst="rect">
+            <a:avLst/>
+          </a:prstGeom>
+          <a:noFill/>
+          <a:ln/>
+        </p:spPr>
+        <p:txBody>
+          <a:bodyPr wrap="square" lIns="0" tIns="0" rIns="0" bIns="0" rtlCol="0" anchor="t">
+            <a:normAutofit/>
+          </a:bodyPr>
+          <a:lstStyle/>
+          <a:p>
+            <a:pPr indent="0" marL="0">
+              <a:buNone/>
+            </a:pPr>
+            <a:r>
               <a:rPr lang="en-US" sz="1150" dirty="0">
                 <a:solidFill>
                   <a:srgbClr val="212121"/>
@@ -6431,7 +6431,7 @@
                 <a:ea typeface="Calibri" pitchFamily="34" charset="-122"/>
                 <a:cs typeface="Calibri" pitchFamily="34" charset="-120"/>
               </a:rPr>
-              <a:t>the Planner already sees the Critic's rejection when re-selected, because the conversation is shared</a:t>
+              <a:t>the Planner already sees the Critic's rejection when re-selected, because the whole conversation is shared — no manual to_revision adapter needed</a:t>
             </a:r>
             <a:endParaRPr lang="en-US" sz="1150" dirty="0"/>
           </a:p>
@@ -6552,48 +6552,7 @@
         <p:spPr>
           <a:xfrm>
             <a:off x="7397496" y="1335024"/>
-            <a:ext cx="1252728" cy="310896"/>
-          </a:xfrm>
-          <a:prstGeom prst="rect">
-            <a:avLst/>
-          </a:prstGeom>
-          <a:noFill/>
-          <a:ln/>
-        </p:spPr>
-        <p:txBody>
-          <a:bodyPr wrap="square" lIns="0" tIns="0" rIns="0" bIns="0" rtlCol="0" anchor="ctr">
-            <a:normAutofit/>
-          </a:bodyPr>
-          <a:lstStyle/>
-          <a:p>
-            <a:pPr indent="0" marL="0">
-              <a:buNone/>
-            </a:pPr>
-            <a:r>
-              <a:rPr lang="en-US" sz="1500" b="1" dirty="0">
-                <a:solidFill>
-                  <a:srgbClr val="1E2761"/>
-                </a:solidFill>
-                <a:latin typeface="Calibri" pitchFamily="34" charset="0"/>
-                <a:ea typeface="Calibri" pitchFamily="34" charset="-122"/>
-                <a:cs typeface="Calibri" pitchFamily="34" charset="-120"/>
-              </a:rPr>
-              <a:t>The guardrail lives in termination_condition</a:t>
-            </a:r>
-            <a:endParaRPr lang="en-US" sz="1500" dirty="0"/>
-          </a:p>
-        </p:txBody>
-      </p:sp>
-      <p:sp>
-        <p:nvSpPr>
-          <p:cNvPr id="27" name="Text 25"/>
-          <p:cNvSpPr/>
-          <p:nvPr/>
-        </p:nvSpPr>
-        <p:spPr>
-          <a:xfrm>
-            <a:off x="7013448" y="1719072"/>
-            <a:ext cx="1618488" cy="1527048"/>
+            <a:ext cx="1252728" cy="311277"/>
           </a:xfrm>
           <a:prstGeom prst="rect">
             <a:avLst/>
@@ -6611,6 +6570,47 @@
               <a:buNone/>
             </a:pPr>
             <a:r>
+              <a:rPr lang="en-US" sz="1500" b="1" dirty="0">
+                <a:solidFill>
+                  <a:srgbClr val="1E2761"/>
+                </a:solidFill>
+                <a:latin typeface="Calibri" pitchFamily="34" charset="0"/>
+                <a:ea typeface="Calibri" pitchFamily="34" charset="-122"/>
+                <a:cs typeface="Calibri" pitchFamily="34" charset="-120"/>
+              </a:rPr>
+              <a:t>Bound it too</a:t>
+            </a:r>
+            <a:endParaRPr lang="en-US" sz="1500" dirty="0"/>
+          </a:p>
+        </p:txBody>
+      </p:sp>
+      <p:sp>
+        <p:nvSpPr>
+          <p:cNvPr id="27" name="Text 25"/>
+          <p:cNvSpPr/>
+          <p:nvPr/>
+        </p:nvSpPr>
+        <p:spPr>
+          <a:xfrm>
+            <a:off x="7013448" y="1701165"/>
+            <a:ext cx="1618488" cy="1572387"/>
+          </a:xfrm>
+          <a:prstGeom prst="rect">
+            <a:avLst/>
+          </a:prstGeom>
+          <a:noFill/>
+          <a:ln/>
+        </p:spPr>
+        <p:txBody>
+          <a:bodyPr wrap="square" lIns="0" tIns="0" rIns="0" bIns="0" rtlCol="0" anchor="t">
+            <a:normAutofit/>
+          </a:bodyPr>
+          <a:lstStyle/>
+          <a:p>
+            <a:pPr indent="0" marL="0">
+              <a:buNone/>
+            </a:pPr>
+            <a:r>
               <a:rPr lang="en-US" sz="1150" dirty="0">
                 <a:solidFill>
                   <a:srgbClr val="212121"/>
@@ -6619,7 +6619,7 @@
                 <a:ea typeface="Calibri" pitchFamily="34" charset="-122"/>
                 <a:cs typeface="Calibri" pitchFamily="34" charset="-120"/>
               </a:rPr>
-              <a:t>GroupChatBuilder gives you exactly one hook to control termination, not a graph of edges to route through</a:t>
+              <a:t>termination_condition is required for the same reason Part B2's was: stop once there have been 8 assistant turns, a reasonable ceiling for three roles and up to two revision passes</a:t>
             </a:r>
             <a:endParaRPr lang="en-US" sz="1150" dirty="0"/>
           </a:p>
@@ -6809,7 +6809,7 @@
               <a:buNone/>
             </a:pPr>
             <a:r>
-              <a:rPr lang="en-US" sz="2300" b="1" dirty="0">
+              <a:rPr lang="en-US" sz="2800" b="1" dirty="0">
                 <a:solidFill>
                   <a:srgbClr val="1E2761"/>
                 </a:solidFill>
@@ -6817,9 +6817,9 @@
                 <a:ea typeface="Calibri" pitchFamily="34" charset="-122"/>
                 <a:cs typeface="Calibri" pitchFamily="34" charset="-120"/>
               </a:rPr>
-              <a:t>Part B's guardrail is required for both fixes</a:t>
-            </a:r>
-            <a:endParaRPr lang="en-US" sz="2300" dirty="0"/>
+              <a:t>Part B2 — Bound the loop</a:t>
+            </a:r>
+            <a:endParaRPr lang="en-US" sz="2800" dirty="0"/>
           </a:p>
         </p:txBody>
       </p:sp>
@@ -6862,7 +6862,7 @@
                 <a:ea typeface="Calibri" pitchFamily="34" charset="-122"/>
                 <a:cs typeface="Calibri" pitchFamily="34" charset="-120"/>
               </a:rPr>
-              <a:t>Neither a conditional edge nor an LLM orchestrator has a built-in max_iterations — unlike AgentLoopMiddleware's single-agent loop, nothing stops either loop automatically</a:t>
+              <a:t>Part B1's gate loops whenever approved is false — for a Critic that never approves (a genuinely ungroundable question), that's forever</a:t>
             </a:r>
             <a:endParaRPr lang="en-US" sz="1600" dirty="0"/>
           </a:p>
@@ -6883,7 +6883,7 @@
                 <a:ea typeface="Calibri" pitchFamily="34" charset="-122"/>
                 <a:cs typeface="Calibri" pitchFamily="34" charset="-120"/>
               </a:rPr>
-              <a:t>Construction #2: a counter in workflow state (ctx.set_state/get_state), checked by a small executor since condition functions never get ctx</a:t>
+              <a:t>Test-driven, not authored from scratch: tests/test_guardrail.py ships failing — it IS the specification; edit RevisionGate.decide in workflow_nodes.py until all three tests pass</a:t>
             </a:r>
             <a:endParaRPr lang="en-US" sz="1600" dirty="0"/>
           </a:p>
@@ -6904,7 +6904,7 @@
                 <a:ea typeface="Calibri" pitchFamily="34" charset="-122"/>
                 <a:cs typeface="Calibri" pitchFamily="34" charset="-120"/>
               </a:rPr>
-              <a:t>Construction #3: termination_condition itself is the guardrail — a message-count cap alongside the "Critic approved" check, in one function</a:t>
+              <a:t>The bound: stop at MAX_REVISIONS (2 revisions), stop gracefully — a low-confidence Answer with capped=True, never an exception — and a Critic that DOES approve still short-circuits immediately</a:t>
             </a:r>
             <a:endParaRPr lang="en-US" sz="1600" dirty="0"/>
           </a:p>
@@ -6917,23 +6917,6 @@
               <a:buChar char="•"/>
             </a:pPr>
             <a:r>
-              <a:rPr lang="en-US" sz="1600" b="1" dirty="0">
-                <a:solidFill>
-                  <a:srgbClr val="1E2761"/>
-                </a:solidFill>
-                <a:latin typeface="Calibri" pitchFamily="34" charset="0"/>
-                <a:ea typeface="Calibri" pitchFamily="34" charset="-122"/>
-                <a:cs typeface="Calibri" pitchFamily="34" charset="-120"/>
-              </a:rPr>
-              <a:t>Prove both fail safely</a:t>
-            </a:r>
-            <a:pPr indent="0" marL="0">
-              <a:spcAft>
-                <a:spcPts val="1000"/>
-              </a:spcAft>
-              <a:buNone/>
-            </a:pPr>
-            <a:r>
               <a:rPr lang="en-US" sz="1600" dirty="0">
                 <a:solidFill>
                   <a:srgbClr val="212121"/>
@@ -6942,7 +6925,7 @@
                 <a:ea typeface="Calibri" pitchFamily="34" charset="-122"/>
                 <a:cs typeface="Calibri" pitchFamily="34" charset="-120"/>
               </a:rPr>
-              <a:t>  —  a bounded, graceful stop, not an unbounded token burn. This is Module 6's advice, applied to the two loops this lab can actually trigger</a:t>
+              <a:t>Not the same job as WorkflowBuilder(max_iterations=...): that's a whole-graph backstop (defaults to 100 supersteps, and simply stops with no answer); this is a domain rule that ends the run deliberately, with an answer a caller can use. Keep both.</a:t>
             </a:r>
             <a:endParaRPr lang="en-US" sz="1600" dirty="0"/>
           </a:p>
@@ -7185,7 +7168,7 @@
                 <a:ea typeface="Calibri" pitchFamily="34" charset="-122"/>
                 <a:cs typeface="Calibri" pitchFamily="34" charset="-120"/>
               </a:rPr>
-              <a:t>Imports Part B's three build_workflow_*() functions directly — no new orchestration code</a:t>
+              <a:t>Imports one build_*_workflow() function each from part_a_sequential.py, part_b_graph.py, and part_c_group_chat.py — no new orchestration code</a:t>
             </a:r>
             <a:endParaRPr lang="en-US" sz="1600" dirty="0"/>
           </a:p>
@@ -7227,7 +7210,7 @@
                 <a:ea typeface="Calibri" pitchFamily="34" charset="-122"/>
                 <a:cs typeface="Calibri" pitchFamily="34" charset="-120"/>
               </a:rPr>
-              <a:t>Reports a comparison table: approved rate for each, plus guardrail-trip rate for construction #2 specifically (construction #3's guardrail has no distinct signal from a plain rejection)</a:t>
+              <a:t>Reports a comparison table: pass rate (as a range across repetitions), cost per success, and total revisions — side by side for all three</a:t>
             </a:r>
             <a:endParaRPr lang="en-US" sz="1600" dirty="0"/>
           </a:p>
@@ -7508,7 +7491,7 @@
                 <a:ea typeface="Calibri" pitchFamily="34" charset="-122"/>
                 <a:cs typeface="Calibri" pitchFamily="34" charset="-120"/>
               </a:rPr>
-              <a:t>~15 realistic questions, each with expected citations/answers as ground truth</a:t>
+              <a:t>Same discipline as Day 3 Part E, at workflow scale: real queries, expected outcomes, not synthetic passes</a:t>
             </a:r>
             <a:endParaRPr lang="en-US" sz="1600" dirty="0"/>
           </a:p>
@@ -7529,7 +7512,28 @@
                 <a:ea typeface="Calibri" pitchFamily="34" charset="-122"/>
                 <a:cs typeface="Calibri" pitchFamily="34" charset="-120"/>
               </a:rPr>
-              <a:t>Cover the real branches: a question that grounds cleanly on the first pass, one that needs the Critic's revision loop, and a general-knowledge question needing no retrieval at all</a:t>
+              <a:t>The lab's own golden set: 8 cases across 4 branches — small on purpose, since every case runs against all 3 constructions × 3 repetitions (~72 workflow runs already)</a:t>
+            </a:r>
+            <a:endParaRPr lang="en-US" sz="1600" dirty="0"/>
+          </a:p>
+          <a:p>
+            <a:pPr marL="342900" indent="-342900">
+              <a:spcAft>
+                <a:spcPts val="1000"/>
+              </a:spcAft>
+              <a:buSzPct val="100000"/>
+              <a:buChar char="•"/>
+            </a:pPr>
+            <a:r>
+              <a:rPr lang="en-US" sz="1600" dirty="0">
+                <a:solidFill>
+                  <a:srgbClr val="212121"/>
+                </a:solidFill>
+                <a:latin typeface="Calibri" pitchFamily="34" charset="0"/>
+                <a:ea typeface="Calibri" pitchFamily="34" charset="-122"/>
+                <a:cs typeface="Calibri" pitchFamily="34" charset="-120"/>
+              </a:rPr>
+              <a:t>Cover the workflow's real branches: grounded (clean single-document lookup), revision (spans documents, needs the loop), no_retrieval (general knowledge, no tools), and partial (corpus answers half — naming the gap is correct, inventing the rest is a failure)</a:t>
             </a:r>
             <a:endParaRPr lang="en-US" sz="1600" dirty="0"/>
           </a:p>
@@ -7793,7 +7797,7 @@
                 <a:ea typeface="Calibri" pitchFamily="34" charset="-122"/>
                 <a:cs typeface="Calibri" pitchFamily="34" charset="-120"/>
               </a:rPr>
-              <a:t>Plan quality</a:t>
+              <a:t>Task success</a:t>
             </a:r>
             <a:pPr indent="0" marL="0">
               <a:spcAft>
@@ -7810,7 +7814,7 @@
                 <a:ea typeface="Calibri" pitchFamily="34" charset="-122"/>
                 <a:cs typeface="Calibri" pitchFamily="34" charset="-120"/>
               </a:rPr>
-              <a:t>  —  did the Planner's decomposition make sense for the question?</a:t>
+              <a:t>  —  deterministic, local, no judge model: the answer contains what must_mention requires and cites what expected_citations requires</a:t>
             </a:r>
             <a:endParaRPr lang="en-US" sz="1600" dirty="0"/>
           </a:p>
@@ -7831,7 +7835,7 @@
                 <a:ea typeface="Calibri" pitchFamily="34" charset="-122"/>
                 <a:cs typeface="Calibri" pitchFamily="34" charset="-120"/>
               </a:rPr>
-              <a:t>Retrieval recall</a:t>
+              <a:t>Citation accuracy</a:t>
             </a:r>
             <a:pPr indent="0" marL="0">
               <a:spcAft>
@@ -7848,7 +7852,7 @@
                 <a:ea typeface="Calibri" pitchFamily="34" charset="-122"/>
                 <a:cs typeface="Calibri" pitchFamily="34" charset="-120"/>
               </a:rPr>
-              <a:t>  —  did the Retriever actually find the right grounding?</a:t>
+              <a:t>  —  did it cite the documents the answer actually needs (and cite NOTHING on a no-retrieval question)?</a:t>
             </a:r>
             <a:endParaRPr lang="en-US" sz="1600" dirty="0"/>
           </a:p>
@@ -7869,7 +7873,7 @@
                 <a:ea typeface="Calibri" pitchFamily="34" charset="-122"/>
                 <a:cs typeface="Calibri" pitchFamily="34" charset="-120"/>
               </a:rPr>
-              <a:t>Critic accuracy</a:t>
+              <a:t>Trajectory</a:t>
             </a:r>
             <a:pPr indent="0" marL="0">
               <a:spcAft>
@@ -7886,7 +7890,7 @@
                 <a:ea typeface="Calibri" pitchFamily="34" charset="-122"/>
                 <a:cs typeface="Calibri" pitchFamily="34" charset="-120"/>
               </a:rPr>
-              <a:t>  —  both decisions: the reject-and-loop call (constructions #2/#3 only — construction #1 never loops), *and* the final structured Answer</a:t>
+              <a:t>  —  the ordered tool calls against expected_actions; the same ground truth Foundry's Task Navigation Efficiency evaluator consumes when you add --foundry</a:t>
             </a:r>
             <a:endParaRPr lang="en-US" sz="1600" dirty="0"/>
           </a:p>
@@ -7907,7 +7911,7 @@
                 <a:ea typeface="Calibri" pitchFamily="34" charset="-122"/>
                 <a:cs typeface="Calibri" pitchFamily="34" charset="-120"/>
               </a:rPr>
-              <a:t>End-to-end task success</a:t>
+              <a:t>Cost per success</a:t>
             </a:r>
             <a:pPr indent="0" marL="0">
               <a:spcAft>
@@ -7924,45 +7928,7 @@
                 <a:ea typeface="Calibri" pitchFamily="34" charset="-122"/>
                 <a:cs typeface="Calibri" pitchFamily="34" charset="-120"/>
               </a:rPr>
-              <a:t>  —  did the whole workflow produce a usable answer? (this lab's actual implemented metric: approved / not approved / guardrail tripped)</a:t>
-            </a:r>
-            <a:endParaRPr lang="en-US" sz="1600" dirty="0"/>
-          </a:p>
-          <a:p>
-            <a:pPr marL="342900" indent="-342900">
-              <a:spcAft>
-                <a:spcPts val="1000"/>
-              </a:spcAft>
-              <a:buSzPct val="100000"/>
-              <a:buChar char="•"/>
-            </a:pPr>
-            <a:r>
-              <a:rPr lang="en-US" sz="1600" b="1" dirty="0">
-                <a:solidFill>
-                  <a:srgbClr val="1E2761"/>
-                </a:solidFill>
-                <a:latin typeface="Calibri" pitchFamily="34" charset="0"/>
-                <a:ea typeface="Calibri" pitchFamily="34" charset="-122"/>
-                <a:cs typeface="Calibri" pitchFamily="34" charset="-120"/>
-              </a:rPr>
-              <a:t>Cost per successful outcome</a:t>
-            </a:r>
-            <a:pPr indent="0" marL="0">
-              <a:spcAft>
-                <a:spcPts val="1000"/>
-              </a:spcAft>
-              <a:buNone/>
-            </a:pPr>
-            <a:r>
-              <a:rPr lang="en-US" sz="1600" dirty="0">
-                <a:solidFill>
-                  <a:srgbClr val="212121"/>
-                </a:solidFill>
-                <a:latin typeface="Calibri" pitchFamily="34" charset="0"/>
-                <a:ea typeface="Calibri" pitchFamily="34" charset="-122"/>
-                <a:cs typeface="Calibri" pitchFamily="34" charset="-120"/>
-              </a:rPr>
-              <a:t>  —  tokens summed across every agent, divided by successful cases (Module 5 names this; not implemented in this lab's Part C — a real extension, flagged rather than assumed)</a:t>
+              <a:t>  —  total tokens across every agent, divided by the cases that passed; a construction that succeeds cheaply beats one that succeeds expensively at the same pass rate</a:t>
             </a:r>
             <a:endParaRPr lang="en-US" sz="1600" dirty="0"/>
           </a:p>

--- a/decks/day4/module-7-lab-kickoff.pptx
+++ b/decks/day4/module-7-lab-kickoff.pptx
@@ -513,7 +513,7 @@
           <a:p>
             <a:r>
               <a:rPr lang="en-US" dirty="0"/>
-              <a:t>• This lab composes every module from today: workflow primitives (3), orchestration patterns (2), memory contracts (4), and a trajectory evaluation with a cost metric (5), plus the guardrail from Module 6 — now a required deliverable, not a stretch goal. Note for presenters: the lab's own part order (basics, then orchestrations, then eval) deliberately runs opposite to today's lecture order (orchestration patterns in Module 2, before workflow fundamentals in Module 3) — build it by hand first, then appreciate the shortcut, is the lab's own teaching sequence. Part naming matches labs/day4/README.md exactly: A, B1, B2, C — not the three-part A/B/C shape an earlier lab draft used.
+              <a:t>• This lab composes every module from today: workflow primitives (3), orchestration patterns (2), memory contracts (4), and a trajectory evaluation with a cost metric (5), plus the guardrail from Module 6 — now a required deliverable, not a stretch goal. Note for presenters: the lab's own part order (basics, then orchestrations, then eval) deliberately runs opposite to today's lecture order (orchestration patterns in Module 2, before workflow fundamentals in Module 3) — build it by hand first, then appreciate the shortcut, is the lab's own teaching sequence. Part naming matches labs/day4/README.md exactly: A, B1, B2, C, plus an optional Part D (declarative workflows, added later, provided complete) — not the three-part A/B/C shape an earlier lab draft used.
 • GROUNDING SOURCE: https://learn.microsoft.com/en-us/agent-framework/concepts/workflows/
 • GROUNDING SOURCE: https://learn.microsoft.com/azure/foundry/concepts/evaluation-evaluators/agent-evaluators</a:t>
             </a:r>
@@ -603,7 +603,7 @@
           <a:p>
             <a:r>
               <a:rPr lang="en-US" dirty="0"/>
-              <a:t>• Mirrors Day 3 Module 9's prerequisites-card style. Matches labs/day4/README.md's own prerequisites list, including the Foundry judge model being for the optional --foundry cloud pass only — the core comparison (pass rate, cost/success, revisions) is local and deterministic, no judge model required. The ADO MCP path is only needed for the optional Ticket agent stretch, not the core lab.
+              <a:t>• Mirrors Day 3 Module 9's prerequisites-card style. Matches labs/day4/README.md's own prerequisites list, including the Foundry judge model being for the optional --foundry cloud pass only — the core comparison (pass rate, cost/success, revisions) is local and deterministic, no judge model required. Card 4 corrects an earlier stretch-goal claim about an Azure DevOps Ticket agent that was never built into this lab; there is no ADO-related lab content. Part D is real and optional -- provided complete, not authored.
 • GROUNDING SOURCE: https://learn.microsoft.com/en-us/agent-framework/agents/evaluation</a:t>
             </a:r>
             <a:endParaRPr lang="en-US" dirty="0"/>
@@ -692,7 +692,7 @@
           <a:p>
             <a:r>
               <a:rPr lang="en-US" dirty="0"/>
-              <a:t>• Reworded for the A/B1/B2/C structure — each row now matches labs/day4/README.md's own per-part "Definition of done" bullets almost verbatim, rather than paraphrasing a since-superseded 3-part (A/B/C) shape. The Part B2 guardrail is a required deliverable, not a stretch goal.
+              <a:t>• Reworded for the A/B1/B2/C structure — each row now matches labs/day4/README.md's own per-part "Definition of done" bullets almost verbatim, rather than paraphrasing a since-superseded 3-part (A/B/C) shape. The Part B2 guardrail is a required deliverable, not a stretch goal. The last row replaces an earlier "Ticket agent files a real ADO work item" stretch claim that was never built into this lab -- there is no ADO-related lab content -- with Part D, which is real, optional, and provided complete.
 • GROUNDING SOURCE: https://learn.microsoft.com/en-us/agent-framework/agents/evaluation
 • GROUNDING SOURCE: https://learn.microsoft.com/en-us/agent-framework/agents/looping</a:t>
             </a:r>
@@ -2613,7 +2613,7 @@
                 <a:ea typeface="Calibri" pitchFamily="34" charset="-122"/>
                 <a:cs typeface="Calibri" pitchFamily="34" charset="-120"/>
               </a:rPr>
-              <a:t>(Optional stretch only)</a:t>
+              <a:t>(Optional) Python 3.13</a:t>
             </a:r>
             <a:endParaRPr lang="en-US" sz="1500" dirty="0"/>
           </a:p>
@@ -2654,7 +2654,7 @@
                 <a:ea typeface="Calibri" pitchFamily="34" charset="-122"/>
                 <a:cs typeface="Calibri" pitchFamily="34" charset="-120"/>
               </a:rPr>
-              <a:t>Day 3's Azure DevOps MCP path, for the Ticket agent</a:t>
+              <a:t>only for Part D's declarative workflow; agent-framework-declarative doesn't yet support 3.14. Parts A-C need whatever Python 3.11+ you're already using</a:t>
             </a:r>
             <a:endParaRPr lang="en-US" sz="1150" dirty="0"/>
           </a:p>
@@ -3730,7 +3730,7 @@
                           <a:ea typeface="Calibri" pitchFamily="34" charset="-122"/>
                           <a:cs typeface="Calibri" pitchFamily="34" charset="-120"/>
                         </a:rPr>
-                        <a:t>Stretch</a:t>
+                        <a:t>Part D (optional)</a:t>
                       </a:r>
                       <a:endParaRPr lang="en-US" sz="950" dirty="0">
                         <a:latin typeface="Calibri" charset="0"/>
@@ -3798,7 +3798,7 @@
                           <a:ea typeface="Calibri" pitchFamily="34" charset="-122"/>
                           <a:cs typeface="Calibri" pitchFamily="34" charset="-120"/>
                         </a:rPr>
-                        <a:t>Ticket agent files a real ADO work item when the Critic flags a gap</a:t>
+                        <a:t>uv run --python 3.13 part_d_declarative.py prints Hello, Alice!</a:t>
                       </a:r>
                       <a:endParaRPr lang="en-US" sz="950" dirty="0">
                         <a:latin typeface="Calibri" charset="0"/>
@@ -4886,23 +4886,6 @@
               <a:buChar char="•"/>
             </a:pPr>
             <a:r>
-              <a:rPr lang="en-US" sz="1600" b="1" dirty="0">
-                <a:solidFill>
-                  <a:srgbClr val="1E2761"/>
-                </a:solidFill>
-                <a:latin typeface="Calibri" pitchFamily="34" charset="0"/>
-                <a:ea typeface="Calibri" pitchFamily="34" charset="-122"/>
-                <a:cs typeface="Calibri" pitchFamily="34" charset="-120"/>
-              </a:rPr>
-              <a:t>Optional stretch</a:t>
-            </a:r>
-            <a:pPr indent="0" marL="0">
-              <a:spcAft>
-                <a:spcPts val="1000"/>
-              </a:spcAft>
-              <a:buNone/>
-            </a:pPr>
-            <a:r>
               <a:rPr lang="en-US" sz="1600" dirty="0">
                 <a:solidFill>
                   <a:srgbClr val="212121"/>
@@ -4911,7 +4894,7 @@
                 <a:ea typeface="Calibri" pitchFamily="34" charset="-122"/>
                 <a:cs typeface="Calibri" pitchFamily="34" charset="-120"/>
               </a:rPr>
-              <a:t>  —  a Ticket agent that files a real Azure DevOps work item (Day 3's MCP path) when the Critic flags a documentation gap</a:t>
+              <a:t>Optional stretch — Part D: the same Agent Framework engine running a workflow authored as YAML instead of code, no TODOs, provided complete (needs Python 3.13)</a:t>
             </a:r>
             <a:endParaRPr lang="en-US" sz="1600" dirty="0"/>
           </a:p>
